--- a/MamaVege_2026上半年业绩报告.pptx
+++ b/MamaVege_2026上半年业绩报告.pptx
@@ -16,9 +16,10 @@
     <p:sldId id="264" r:id="rId10"/>
     <p:sldId id="265" r:id="rId11"/>
     <p:sldId id="266" r:id="rId12"/>
+    <p:sldId id="267" r:id="rId13"/>
   </p:sldIdLst>
   <p:notesMasterIdLst>
-    <p:notesMasterId r:id="rId13"/>
+    <p:notesMasterId r:id="rId14"/>
   </p:notesMasterIdLst>
   <p:sldSz cx="9144000" cy="5143500"/>
   <p:notesSz cx="5143500" cy="9144000"/>
@@ -443,6 +444,488 @@
 </c:chartSpace>
 </file>
 
+<file path=ppt/charts/chart2.xml><?xml version="1.0" encoding="utf-8"?>
+<c:chartSpace xmlns:c="http://schemas.openxmlformats.org/drawingml/2006/chart" xmlns:a="http://schemas.openxmlformats.org/drawingml/2006/main" xmlns:r="http://schemas.openxmlformats.org/officeDocument/2006/relationships">
+  <c:date1904 val="0"/>
+  <c:roundedCorners val="1"/>
+  <c:chart>
+    <c:autoTitleDeleted val="1"/>
+    <c:plotArea>
+      <c:layout/>
+      <c:barChart>
+        <c:barDir val="col"/>
+        <c:grouping val="stacked"/>
+        <c:varyColors val="0"/>
+        <c:ser>
+          <c:idx val="0"/>
+          <c:order val="0"/>
+          <c:tx>
+            <c:strRef>
+              <c:f>Sheet1!$B$1</c:f>
+              <c:strCache>
+                <c:ptCount val="1"/>
+                <c:pt idx="0">
+                  <c:v>马来西亚线下</c:v>
+                </c:pt>
+              </c:strCache>
+            </c:strRef>
+          </c:tx>
+          <c:spPr>
+            <a:solidFill>
+              <a:srgbClr val="2C6E31"/>
+            </a:solidFill>
+            <a:effectLst/>
+          </c:spPr>
+          <c:invertIfNegative val="0"/>
+          <c:dLbls>
+            <c:numFmt formatCode="#,##0" sourceLinked="0"/>
+            <c:txPr>
+              <a:bodyPr/>
+              <a:lstStyle/>
+              <a:p>
+                <a:pPr>
+                  <a:defRPr b="0" i="0" strike="noStrike" sz="1200" u="none">
+                    <a:solidFill>
+                      <a:srgbClr val="000000"/>
+                    </a:solidFill>
+                    <a:latin typeface="Arial"/>
+                  </a:defRPr>
+                </a:pPr>
+              </a:p>
+            </c:txPr>
+            <c:showLegendKey val="0"/>
+            <c:showVal val="0"/>
+            <c:showCatName val="0"/>
+            <c:showSerName val="0"/>
+            <c:showPercent val="0"/>
+            <c:showBubbleSize val="0"/>
+            <c:showLeaderLines val="0"/>
+          </c:dLbls>
+          <c:cat>
+            <c:multiLvlStrRef>
+              <c:f>Sheet1!$A$2:$A$7</c:f>
+              <c:multiLvlStrCache>
+                <c:ptCount val="6"/>
+                <c:lvl>
+                  <c:pt idx="0">
+                    <c:v>1月</c:v>
+                  </c:pt>
+                  <c:pt idx="1">
+                    <c:v>2月</c:v>
+                  </c:pt>
+                  <c:pt idx="2">
+                    <c:v>3月</c:v>
+                  </c:pt>
+                  <c:pt idx="3">
+                    <c:v>4月</c:v>
+                  </c:pt>
+                  <c:pt idx="4">
+                    <c:v>5月</c:v>
+                  </c:pt>
+                  <c:pt idx="5">
+                    <c:v>6月</c:v>
+                  </c:pt>
+                </c:lvl>
+              </c:multiLvlStrCache>
+            </c:multiLvlStrRef>
+          </c:cat>
+          <c:val>
+            <c:numRef>
+              <c:f>Sheet1!$B$2:$B$7</c:f>
+              <c:numCache>
+                <c:formatCode>General</c:formatCode>
+                <c:ptCount val="6"/>
+                <c:pt idx="0">
+                  <c:v>363652</c:v>
+                </c:pt>
+                <c:pt idx="1">
+                  <c:v>331699</c:v>
+                </c:pt>
+                <c:pt idx="2">
+                  <c:v>364496</c:v>
+                </c:pt>
+                <c:pt idx="3">
+                  <c:v>353928</c:v>
+                </c:pt>
+                <c:pt idx="4">
+                  <c:v>453608</c:v>
+                </c:pt>
+                <c:pt idx="5">
+                  <c:v>295770</c:v>
+                </c:pt>
+              </c:numCache>
+            </c:numRef>
+          </c:val>
+        </c:ser>
+        <c:ser>
+          <c:idx val="1"/>
+          <c:order val="1"/>
+          <c:tx>
+            <c:strRef>
+              <c:f>Sheet1!$C$1</c:f>
+              <c:strCache>
+                <c:ptCount val="1"/>
+                <c:pt idx="0">
+                  <c:v>线上电商</c:v>
+                </c:pt>
+              </c:strCache>
+            </c:strRef>
+          </c:tx>
+          <c:spPr>
+            <a:solidFill>
+              <a:srgbClr val="8FBF4D"/>
+            </a:solidFill>
+            <a:effectLst/>
+          </c:spPr>
+          <c:invertIfNegative val="0"/>
+          <c:dLbls>
+            <c:numFmt formatCode="#,##0" sourceLinked="0"/>
+            <c:txPr>
+              <a:bodyPr/>
+              <a:lstStyle/>
+              <a:p>
+                <a:pPr>
+                  <a:defRPr b="0" i="0" strike="noStrike" sz="1200" u="none">
+                    <a:solidFill>
+                      <a:srgbClr val="000000"/>
+                    </a:solidFill>
+                    <a:latin typeface="Arial"/>
+                  </a:defRPr>
+                </a:pPr>
+              </a:p>
+            </c:txPr>
+            <c:showLegendKey val="0"/>
+            <c:showVal val="0"/>
+            <c:showCatName val="0"/>
+            <c:showSerName val="0"/>
+            <c:showPercent val="0"/>
+            <c:showBubbleSize val="0"/>
+            <c:showLeaderLines val="0"/>
+          </c:dLbls>
+          <c:cat>
+            <c:multiLvlStrRef>
+              <c:f>Sheet1!$A$2:$A$7</c:f>
+              <c:multiLvlStrCache>
+                <c:ptCount val="6"/>
+                <c:lvl>
+                  <c:pt idx="0">
+                    <c:v>1月</c:v>
+                  </c:pt>
+                  <c:pt idx="1">
+                    <c:v>2月</c:v>
+                  </c:pt>
+                  <c:pt idx="2">
+                    <c:v>3月</c:v>
+                  </c:pt>
+                  <c:pt idx="3">
+                    <c:v>4月</c:v>
+                  </c:pt>
+                  <c:pt idx="4">
+                    <c:v>5月</c:v>
+                  </c:pt>
+                  <c:pt idx="5">
+                    <c:v>6月</c:v>
+                  </c:pt>
+                </c:lvl>
+              </c:multiLvlStrCache>
+            </c:multiLvlStrRef>
+          </c:cat>
+          <c:val>
+            <c:numRef>
+              <c:f>Sheet1!$C$2:$C$7</c:f>
+              <c:numCache>
+                <c:formatCode>General</c:formatCode>
+                <c:ptCount val="6"/>
+                <c:pt idx="0">
+                  <c:v>120068</c:v>
+                </c:pt>
+                <c:pt idx="1">
+                  <c:v>156992</c:v>
+                </c:pt>
+                <c:pt idx="2">
+                  <c:v>176840</c:v>
+                </c:pt>
+                <c:pt idx="3">
+                  <c:v>77078</c:v>
+                </c:pt>
+                <c:pt idx="4">
+                  <c:v>94569</c:v>
+                </c:pt>
+                <c:pt idx="5">
+                  <c:v>115868</c:v>
+                </c:pt>
+              </c:numCache>
+            </c:numRef>
+          </c:val>
+        </c:ser>
+        <c:ser>
+          <c:idx val="2"/>
+          <c:order val="2"/>
+          <c:tx>
+            <c:strRef>
+              <c:f>Sheet1!$D$1</c:f>
+              <c:strCache>
+                <c:ptCount val="1"/>
+                <c:pt idx="0">
+                  <c:v>国际业务</c:v>
+                </c:pt>
+              </c:strCache>
+            </c:strRef>
+          </c:tx>
+          <c:spPr>
+            <a:solidFill>
+              <a:srgbClr val="E0A93E"/>
+            </a:solidFill>
+            <a:effectLst/>
+          </c:spPr>
+          <c:invertIfNegative val="0"/>
+          <c:dLbls>
+            <c:numFmt formatCode="#,##0" sourceLinked="0"/>
+            <c:txPr>
+              <a:bodyPr/>
+              <a:lstStyle/>
+              <a:p>
+                <a:pPr>
+                  <a:defRPr b="0" i="0" strike="noStrike" sz="1200" u="none">
+                    <a:solidFill>
+                      <a:srgbClr val="000000"/>
+                    </a:solidFill>
+                    <a:latin typeface="Arial"/>
+                  </a:defRPr>
+                </a:pPr>
+              </a:p>
+            </c:txPr>
+            <c:showLegendKey val="0"/>
+            <c:showVal val="0"/>
+            <c:showCatName val="0"/>
+            <c:showSerName val="0"/>
+            <c:showPercent val="0"/>
+            <c:showBubbleSize val="0"/>
+            <c:showLeaderLines val="0"/>
+          </c:dLbls>
+          <c:cat>
+            <c:multiLvlStrRef>
+              <c:f>Sheet1!$A$2:$A$7</c:f>
+              <c:multiLvlStrCache>
+                <c:ptCount val="6"/>
+                <c:lvl>
+                  <c:pt idx="0">
+                    <c:v>1月</c:v>
+                  </c:pt>
+                  <c:pt idx="1">
+                    <c:v>2月</c:v>
+                  </c:pt>
+                  <c:pt idx="2">
+                    <c:v>3月</c:v>
+                  </c:pt>
+                  <c:pt idx="3">
+                    <c:v>4月</c:v>
+                  </c:pt>
+                  <c:pt idx="4">
+                    <c:v>5月</c:v>
+                  </c:pt>
+                  <c:pt idx="5">
+                    <c:v>6月</c:v>
+                  </c:pt>
+                </c:lvl>
+              </c:multiLvlStrCache>
+            </c:multiLvlStrRef>
+          </c:cat>
+          <c:val>
+            <c:numRef>
+              <c:f>Sheet1!$D$2:$D$7</c:f>
+              <c:numCache>
+                <c:formatCode>General</c:formatCode>
+                <c:ptCount val="6"/>
+                <c:pt idx="0">
+                  <c:v>0</c:v>
+                </c:pt>
+                <c:pt idx="1">
+                  <c:v>0</c:v>
+                </c:pt>
+                <c:pt idx="2">
+                  <c:v>1558</c:v>
+                </c:pt>
+                <c:pt idx="3">
+                  <c:v>77082</c:v>
+                </c:pt>
+                <c:pt idx="4">
+                  <c:v>11157</c:v>
+                </c:pt>
+                <c:pt idx="5">
+                  <c:v>11971</c:v>
+                </c:pt>
+              </c:numCache>
+            </c:numRef>
+          </c:val>
+        </c:ser>
+        <c:dLbls>
+          <c:numFmt formatCode="#,##0" sourceLinked="0"/>
+          <c:txPr>
+            <a:bodyPr/>
+            <a:lstStyle/>
+            <a:p>
+              <a:pPr>
+                <a:defRPr b="0" i="0" strike="noStrike" sz="1200" u="none">
+                  <a:solidFill>
+                    <a:srgbClr val="000000"/>
+                  </a:solidFill>
+                  <a:latin typeface="Arial"/>
+                </a:defRPr>
+              </a:pPr>
+            </a:p>
+          </c:txPr>
+          <c:showLegendKey val="0"/>
+          <c:showVal val="0"/>
+          <c:showCatName val="0"/>
+          <c:showSerName val="0"/>
+          <c:showPercent val="0"/>
+          <c:showBubbleSize val="0"/>
+          <c:showLeaderLines val="0"/>
+        </c:dLbls>
+        <c:gapWidth val="50"/>
+        <c:overlap val="100"/>
+        <c:axId val="2094734554"/>
+        <c:axId val="2094734552"/>
+        <c:axId val="2094734556"/>
+      </c:barChart>
+      <c:catAx>
+        <c:axId val="2094734554"/>
+        <c:scaling>
+          <c:orientation val="minMax"/>
+        </c:scaling>
+        <c:delete val="0"/>
+        <c:axPos val="b"/>
+        <c:numFmt formatCode="General" sourceLinked="1"/>
+        <c:majorTickMark val="out"/>
+        <c:minorTickMark val="none"/>
+        <c:tickLblPos val="low"/>
+        <c:spPr>
+          <a:ln w="12700" cap="flat">
+            <a:solidFill>
+              <a:srgbClr val="888888"/>
+            </a:solidFill>
+            <a:prstDash val="solid"/>
+            <a:round/>
+          </a:ln>
+        </c:spPr>
+        <c:txPr>
+          <a:bodyPr/>
+          <a:lstStyle/>
+          <a:p>
+            <a:pPr>
+              <a:defRPr sz="1200" b="0" i="0" u="none" strike="noStrike">
+                <a:solidFill>
+                  <a:srgbClr val="6B7A6E"/>
+                </a:solidFill>
+                <a:latin typeface="Microsoft YaHei"/>
+              </a:defRPr>
+            </a:pPr>
+            <a:endParaRPr lang="en-US"/>
+          </a:p>
+        </c:txPr>
+        <c:crossAx val="2094734552"/>
+        <c:crosses val="autoZero"/>
+        <c:auto val="1"/>
+        <c:lblAlgn val="ctr"/>
+        <c:noMultiLvlLbl val="1"/>
+      </c:catAx>
+      <c:valAx>
+        <c:axId val="2094734552"/>
+        <c:scaling>
+          <c:orientation val="minMax"/>
+        </c:scaling>
+        <c:delete val="0"/>
+        <c:axPos val="l"/>
+        <c:majorGridlines>
+          <c:spPr>
+            <a:ln w="6350" cap="flat">
+              <a:solidFill>
+                <a:srgbClr val="E4EAE2"/>
+              </a:solidFill>
+              <a:prstDash val="solid"/>
+              <a:round/>
+            </a:ln>
+          </c:spPr>
+        </c:majorGridlines>
+        <c:numFmt formatCode="General" sourceLinked="0"/>
+        <c:majorTickMark val="out"/>
+        <c:minorTickMark val="none"/>
+        <c:tickLblPos val="nextTo"/>
+        <c:spPr>
+          <a:ln w="12700" cap="flat">
+            <a:solidFill>
+              <a:srgbClr val="888888"/>
+            </a:solidFill>
+            <a:prstDash val="solid"/>
+            <a:round/>
+          </a:ln>
+        </c:spPr>
+        <c:txPr>
+          <a:bodyPr/>
+          <a:lstStyle/>
+          <a:p>
+            <a:pPr>
+              <a:defRPr sz="1200" b="0" i="0" u="none" strike="noStrike">
+                <a:solidFill>
+                  <a:srgbClr val="6B7A6E"/>
+                </a:solidFill>
+                <a:latin typeface="Microsoft YaHei"/>
+              </a:defRPr>
+            </a:pPr>
+            <a:endParaRPr lang="en-US"/>
+          </a:p>
+        </c:txPr>
+        <c:crossAx val="2094734554"/>
+        <c:crosses val="autoZero"/>
+        <c:crossBetween val="between"/>
+      </c:valAx>
+      <c:spPr>
+        <a:noFill/>
+        <a:ln>
+          <a:noFill/>
+        </a:ln>
+        <a:effectLst/>
+      </c:spPr>
+    </c:plotArea>
+    <c:legend>
+      <c:legendPos val="b"/>
+      <c:overlay val="0"/>
+      <c:txPr>
+        <a:bodyPr/>
+        <a:lstStyle/>
+        <a:p>
+          <a:pPr>
+            <a:defRPr sz="1000">
+              <a:solidFill>
+                <a:srgbClr val="4A554C"/>
+              </a:solidFill>
+              <a:latin typeface="Microsoft YaHei"/>
+              <a:cs typeface="Microsoft YaHei"/>
+            </a:defRPr>
+          </a:pPr>
+          <a:endParaRPr lang="en-US"/>
+        </a:p>
+      </c:txPr>
+    </c:legend>
+    <c:plotVisOnly val="1"/>
+    <c:dispBlanksAs val="span"/>
+  </c:chart>
+  <c:spPr>
+    <a:solidFill>
+      <a:srgbClr val="FFFFFF"/>
+    </a:solidFill>
+    <a:ln>
+      <a:noFill/>
+    </a:ln>
+    <a:effectLst/>
+  </c:spPr>
+  <c:externalData r:id="rId1">
+    <c:autoUpdate val="0"/>
+  </c:externalData>
+</c:chartSpace>
+</file>
+
 <file path=ppt/notesMasters/notesMaster1.xml><?xml version="1.0" encoding="utf-8"?>
 <p:notesMaster xmlns:a="http://schemas.openxmlformats.org/drawingml/2006/main" xmlns:r="http://schemas.openxmlformats.org/officeDocument/2006/relationships" xmlns:p="http://schemas.openxmlformats.org/presentationml/2006/main">
   <p:cSld>
@@ -1038,6 +1521,94 @@
             <a:fld id="{F7021451-1387-4CA6-816F-3879F97B5CBC}" type="slidenum">
               <a:rPr lang="en-US"/>
               <a:t>11</a:t>
+            </a:fld>
+            <a:endParaRPr lang="en-US"/>
+          </a:p>
+        </p:txBody>
+      </p:sp>
+    </p:spTree>
+    <p:extLst>
+      <p:ext uri="{BB962C8B-B14F-4D97-AF65-F5344CB8AC3E}">
+        <p14:creationId xmlns:p14="http://schemas.microsoft.com/office/powerpoint/2010/main" val="1024086991"/>
+      </p:ext>
+    </p:extLst>
+  </p:cSld>
+  <p:clrMapOvr>
+    <a:masterClrMapping/>
+  </p:clrMapOvr>
+</p:notes>
+</file>
+
+<file path=ppt/notesSlides/notesSlide12.xml><?xml version="1.0" encoding="utf-8"?>
+<p:notes xmlns:a="http://schemas.openxmlformats.org/drawingml/2006/main" xmlns:r="http://schemas.openxmlformats.org/officeDocument/2006/relationships" xmlns:p="http://schemas.openxmlformats.org/presentationml/2006/main">
+  <p:cSld>
+    <p:spTree>
+      <p:nvGrpSpPr>
+        <p:cNvPr id="1" name=""/>
+        <p:cNvGrpSpPr/>
+        <p:nvPr/>
+      </p:nvGrpSpPr>
+      <p:grpSpPr>
+        <a:xfrm>
+          <a:off x="0" y="0"/>
+          <a:ext cx="0" cy="0"/>
+          <a:chOff x="0" y="0"/>
+          <a:chExt cx="0" cy="0"/>
+        </a:xfrm>
+      </p:grpSpPr>
+      <p:sp>
+        <p:nvSpPr>
+          <p:cNvPr id="2" name="Slide Image Placeholder 1"/>
+          <p:cNvSpPr>
+            <a:spLocks noGrp="1" noRot="1" noChangeAspect="1"/>
+          </p:cNvSpPr>
+          <p:nvPr>
+            <p:ph type="sldImg"/>
+          </p:nvPr>
+        </p:nvSpPr>
+        <p:spPr/>
+      </p:sp>
+      <p:sp>
+        <p:nvSpPr>
+          <p:cNvPr id="3" name="Notes Placeholder 2"/>
+          <p:cNvSpPr>
+            <a:spLocks noGrp="1"/>
+          </p:cNvSpPr>
+          <p:nvPr>
+            <p:ph type="body" idx="1"/>
+          </p:nvPr>
+        </p:nvSpPr>
+        <p:spPr/>
+        <p:txBody>
+          <a:bodyPr/>
+          <a:lstStyle/>
+          <a:p>
+            <a:r>
+              <a:rPr lang="en-US" dirty="0"/>
+              <a:t/>
+            </a:r>
+            <a:endParaRPr lang="en-US" dirty="0"/>
+          </a:p>
+        </p:txBody>
+      </p:sp>
+      <p:sp>
+        <p:nvSpPr>
+          <p:cNvPr id="4" name="Slide Number Placeholder 3"/>
+          <p:cNvSpPr>
+            <a:spLocks noGrp="1"/>
+          </p:cNvSpPr>
+          <p:nvPr>
+            <p:ph type="sldNum" sz="quarter" idx="10"/>
+          </p:nvPr>
+        </p:nvSpPr>
+        <p:spPr/>
+        <p:txBody>
+          <a:bodyPr/>
+          <a:lstStyle/>
+          <a:p>
+            <a:fld id="{F7021451-1387-4CA6-816F-3879F97B5CBC}" type="slidenum">
+              <a:rPr lang="en-US"/>
+              <a:t>12</a:t>
             </a:fld>
             <a:endParaRPr lang="en-US"/>
           </a:p>
@@ -2356,7 +2927,7 @@
                 <a:ea typeface="Microsoft YaHei" pitchFamily="34" charset="-122"/>
                 <a:cs typeface="Microsoft YaHei" pitchFamily="34" charset="-120"/>
               </a:rPr>
-              <a:t>把 5 月变成每一个月：每个团队的任务</a:t>
+              <a:t>三个数字达标，会发生什么？</a:t>
             </a:r>
             <a:endParaRPr lang="en-US" sz="2700" dirty="0"/>
           </a:p>
@@ -2370,68 +2941,569 @@
         </p:nvSpPr>
         <p:spPr>
           <a:xfrm>
-            <a:off x="548640" y="1143000"/>
-            <a:ext cx="475488" cy="475488"/>
-          </a:xfrm>
-          <a:prstGeom prst="ellipse">
-            <a:avLst/>
+            <a:off x="384048" y="1417320"/>
+            <a:ext cx="1325880" cy="1188720"/>
+          </a:xfrm>
+          <a:prstGeom prst="roundRect">
+            <a:avLst>
+              <a:gd name="adj" fmla="val 6154"/>
+            </a:avLst>
+          </a:prstGeom>
+          <a:solidFill>
+            <a:srgbClr val="F5F6F4"/>
+          </a:solidFill>
+          <a:ln/>
+          <a:effectLst>
+            <a:outerShdw sx="100000" sy="100000" kx="0" ky="0" algn="bl" rotWithShape="0" blurRad="88900" dist="25400" dir="2700000">
+              <a:srgbClr val="000000">
+                <a:alpha val="13000"/>
+              </a:srgbClr>
+            </a:outerShdw>
+          </a:effectLst>
+        </p:spPr>
+      </p:sp>
+      <p:sp>
+        <p:nvSpPr>
+          <p:cNvPr id="4" name="Text 2"/>
+          <p:cNvSpPr/>
+          <p:nvPr/>
+        </p:nvSpPr>
+        <p:spPr>
+          <a:xfrm>
+            <a:off x="493776" y="1572768"/>
+            <a:ext cx="1143000" cy="320040"/>
+          </a:xfrm>
+          <a:prstGeom prst="rect">
+            <a:avLst/>
+          </a:prstGeom>
+          <a:noFill/>
+          <a:ln/>
+        </p:spPr>
+        <p:txBody>
+          <a:bodyPr wrap="square" lIns="0" tIns="0" rIns="0" bIns="0" rtlCol="0" anchor="ctr"/>
+          <a:lstStyle/>
+          <a:p>
+            <a:pPr indent="0" marL="0">
+              <a:buNone/>
+            </a:pPr>
+            <a:r>
+              <a:rPr lang="en-US" sz="1150" dirty="0">
+                <a:solidFill>
+                  <a:srgbClr val="6B7A6E"/>
+                </a:solidFill>
+                <a:latin typeface="Microsoft YaHei" pitchFamily="34" charset="0"/>
+                <a:ea typeface="Microsoft YaHei" pitchFamily="34" charset="-122"/>
+                <a:cs typeface="Microsoft YaHei" pitchFamily="34" charset="-120"/>
+              </a:rPr>
+              <a:t>月销售</a:t>
+            </a:r>
+            <a:endParaRPr lang="en-US" sz="1150" dirty="0"/>
+          </a:p>
+        </p:txBody>
+      </p:sp>
+      <p:sp>
+        <p:nvSpPr>
+          <p:cNvPr id="5" name="Text 3"/>
+          <p:cNvSpPr/>
+          <p:nvPr/>
+        </p:nvSpPr>
+        <p:spPr>
+          <a:xfrm>
+            <a:off x="493776" y="1901952"/>
+            <a:ext cx="1179576" cy="548640"/>
+          </a:xfrm>
+          <a:prstGeom prst="rect">
+            <a:avLst/>
+          </a:prstGeom>
+          <a:noFill/>
+          <a:ln/>
+        </p:spPr>
+        <p:txBody>
+          <a:bodyPr wrap="square" lIns="0" tIns="0" rIns="0" bIns="0" rtlCol="0" anchor="ctr"/>
+          <a:lstStyle/>
+          <a:p>
+            <a:pPr indent="0" marL="0">
+              <a:buNone/>
+            </a:pPr>
+            <a:r>
+              <a:rPr lang="en-US" sz="1450" b="1" dirty="0">
+                <a:solidFill>
+                  <a:srgbClr val="26312A"/>
+                </a:solidFill>
+                <a:latin typeface="Microsoft YaHei" pitchFamily="34" charset="0"/>
+                <a:ea typeface="Microsoft YaHei" pitchFamily="34" charset="-122"/>
+                <a:cs typeface="Microsoft YaHei" pitchFamily="34" charset="-120"/>
+              </a:rPr>
+              <a:t>RM 550,000</a:t>
+            </a:r>
+            <a:endParaRPr lang="en-US" sz="1450" dirty="0"/>
+          </a:p>
+        </p:txBody>
+      </p:sp>
+      <p:sp>
+        <p:nvSpPr>
+          <p:cNvPr id="6" name="Text 4"/>
+          <p:cNvSpPr/>
+          <p:nvPr/>
+        </p:nvSpPr>
+        <p:spPr>
+          <a:xfrm>
+            <a:off x="1737360" y="1600200"/>
+            <a:ext cx="384048" cy="822960"/>
+          </a:xfrm>
+          <a:prstGeom prst="rect">
+            <a:avLst/>
+          </a:prstGeom>
+          <a:noFill/>
+          <a:ln/>
+        </p:spPr>
+        <p:txBody>
+          <a:bodyPr wrap="square" lIns="0" tIns="0" rIns="0" bIns="0" rtlCol="0" anchor="ctr"/>
+          <a:lstStyle/>
+          <a:p>
+            <a:pPr algn="ctr" indent="0" marL="0">
+              <a:buNone/>
+            </a:pPr>
+            <a:r>
+              <a:rPr lang="en-US" sz="2400" b="1" dirty="0">
+                <a:solidFill>
+                  <a:srgbClr val="6B7A6E"/>
+                </a:solidFill>
+                <a:latin typeface="Microsoft YaHei" pitchFamily="34" charset="0"/>
+                <a:ea typeface="Microsoft YaHei" pitchFamily="34" charset="-122"/>
+                <a:cs typeface="Microsoft YaHei" pitchFamily="34" charset="-120"/>
+              </a:rPr>
+              <a:t>×</a:t>
+            </a:r>
+            <a:endParaRPr lang="en-US" sz="2400" dirty="0"/>
+          </a:p>
+        </p:txBody>
+      </p:sp>
+      <p:sp>
+        <p:nvSpPr>
+          <p:cNvPr id="7" name="Shape 5"/>
+          <p:cNvSpPr/>
+          <p:nvPr/>
+        </p:nvSpPr>
+        <p:spPr>
+          <a:xfrm>
+            <a:off x="2148840" y="1417320"/>
+            <a:ext cx="1691640" cy="1188720"/>
+          </a:xfrm>
+          <a:prstGeom prst="roundRect">
+            <a:avLst>
+              <a:gd name="adj" fmla="val 6154"/>
+            </a:avLst>
+          </a:prstGeom>
+          <a:solidFill>
+            <a:srgbClr val="F5F6F4"/>
+          </a:solidFill>
+          <a:ln/>
+          <a:effectLst>
+            <a:outerShdw sx="100000" sy="100000" kx="0" ky="0" algn="bl" rotWithShape="0" blurRad="88900" dist="25400" dir="2700000">
+              <a:srgbClr val="000000">
+                <a:alpha val="13000"/>
+              </a:srgbClr>
+            </a:outerShdw>
+          </a:effectLst>
+        </p:spPr>
+      </p:sp>
+      <p:sp>
+        <p:nvSpPr>
+          <p:cNvPr id="8" name="Text 6"/>
+          <p:cNvSpPr/>
+          <p:nvPr/>
+        </p:nvSpPr>
+        <p:spPr>
+          <a:xfrm>
+            <a:off x="2258568" y="1572768"/>
+            <a:ext cx="1508760" cy="320040"/>
+          </a:xfrm>
+          <a:prstGeom prst="rect">
+            <a:avLst/>
+          </a:prstGeom>
+          <a:noFill/>
+          <a:ln/>
+        </p:spPr>
+        <p:txBody>
+          <a:bodyPr wrap="square" lIns="0" tIns="0" rIns="0" bIns="0" rtlCol="0" anchor="ctr"/>
+          <a:lstStyle/>
+          <a:p>
+            <a:pPr indent="0" marL="0">
+              <a:buNone/>
+            </a:pPr>
+            <a:r>
+              <a:rPr lang="en-US" sz="1150" dirty="0">
+                <a:solidFill>
+                  <a:srgbClr val="6B7A6E"/>
+                </a:solidFill>
+                <a:latin typeface="Microsoft YaHei" pitchFamily="34" charset="0"/>
+                <a:ea typeface="Microsoft YaHei" pitchFamily="34" charset="-122"/>
+                <a:cs typeface="Microsoft YaHei" pitchFamily="34" charset="-120"/>
+              </a:rPr>
+              <a:t>毛利率 · 5月水平</a:t>
+            </a:r>
+            <a:endParaRPr lang="en-US" sz="1150" dirty="0"/>
+          </a:p>
+        </p:txBody>
+      </p:sp>
+      <p:sp>
+        <p:nvSpPr>
+          <p:cNvPr id="9" name="Text 7"/>
+          <p:cNvSpPr/>
+          <p:nvPr/>
+        </p:nvSpPr>
+        <p:spPr>
+          <a:xfrm>
+            <a:off x="2258568" y="1901952"/>
+            <a:ext cx="1545336" cy="548640"/>
+          </a:xfrm>
+          <a:prstGeom prst="rect">
+            <a:avLst/>
+          </a:prstGeom>
+          <a:noFill/>
+          <a:ln/>
+        </p:spPr>
+        <p:txBody>
+          <a:bodyPr wrap="square" lIns="0" tIns="0" rIns="0" bIns="0" rtlCol="0" anchor="ctr"/>
+          <a:lstStyle/>
+          <a:p>
+            <a:pPr indent="0" marL="0">
+              <a:buNone/>
+            </a:pPr>
+            <a:r>
+              <a:rPr lang="en-US" sz="1450" b="1" dirty="0">
+                <a:solidFill>
+                  <a:srgbClr val="26312A"/>
+                </a:solidFill>
+                <a:latin typeface="Microsoft YaHei" pitchFamily="34" charset="0"/>
+                <a:ea typeface="Microsoft YaHei" pitchFamily="34" charset="-122"/>
+                <a:cs typeface="Microsoft YaHei" pitchFamily="34" charset="-120"/>
+              </a:rPr>
+              <a:t>约 51%</a:t>
+            </a:r>
+            <a:endParaRPr lang="en-US" sz="1450" dirty="0"/>
+          </a:p>
+        </p:txBody>
+      </p:sp>
+      <p:sp>
+        <p:nvSpPr>
+          <p:cNvPr id="10" name="Text 8"/>
+          <p:cNvSpPr/>
+          <p:nvPr/>
+        </p:nvSpPr>
+        <p:spPr>
+          <a:xfrm>
+            <a:off x="3867912" y="1600200"/>
+            <a:ext cx="384048" cy="822960"/>
+          </a:xfrm>
+          <a:prstGeom prst="rect">
+            <a:avLst/>
+          </a:prstGeom>
+          <a:noFill/>
+          <a:ln/>
+        </p:spPr>
+        <p:txBody>
+          <a:bodyPr wrap="square" lIns="0" tIns="0" rIns="0" bIns="0" rtlCol="0" anchor="ctr"/>
+          <a:lstStyle/>
+          <a:p>
+            <a:pPr algn="ctr" indent="0" marL="0">
+              <a:buNone/>
+            </a:pPr>
+            <a:r>
+              <a:rPr lang="en-US" sz="2400" b="1" dirty="0">
+                <a:solidFill>
+                  <a:srgbClr val="6B7A6E"/>
+                </a:solidFill>
+                <a:latin typeface="Microsoft YaHei" pitchFamily="34" charset="0"/>
+                <a:ea typeface="Microsoft YaHei" pitchFamily="34" charset="-122"/>
+                <a:cs typeface="Microsoft YaHei" pitchFamily="34" charset="-120"/>
+              </a:rPr>
+              <a:t>−</a:t>
+            </a:r>
+            <a:endParaRPr lang="en-US" sz="2400" dirty="0"/>
+          </a:p>
+        </p:txBody>
+      </p:sp>
+      <p:sp>
+        <p:nvSpPr>
+          <p:cNvPr id="11" name="Shape 9"/>
+          <p:cNvSpPr/>
+          <p:nvPr/>
+        </p:nvSpPr>
+        <p:spPr>
+          <a:xfrm>
+            <a:off x="4279392" y="1417320"/>
+            <a:ext cx="1325880" cy="1188720"/>
+          </a:xfrm>
+          <a:prstGeom prst="roundRect">
+            <a:avLst>
+              <a:gd name="adj" fmla="val 6154"/>
+            </a:avLst>
+          </a:prstGeom>
+          <a:solidFill>
+            <a:srgbClr val="F5F6F4"/>
+          </a:solidFill>
+          <a:ln/>
+          <a:effectLst>
+            <a:outerShdw sx="100000" sy="100000" kx="0" ky="0" algn="bl" rotWithShape="0" blurRad="88900" dist="25400" dir="2700000">
+              <a:srgbClr val="000000">
+                <a:alpha val="13000"/>
+              </a:srgbClr>
+            </a:outerShdw>
+          </a:effectLst>
+        </p:spPr>
+      </p:sp>
+      <p:sp>
+        <p:nvSpPr>
+          <p:cNvPr id="12" name="Text 10"/>
+          <p:cNvSpPr/>
+          <p:nvPr/>
+        </p:nvSpPr>
+        <p:spPr>
+          <a:xfrm>
+            <a:off x="4389120" y="1572768"/>
+            <a:ext cx="1143000" cy="320040"/>
+          </a:xfrm>
+          <a:prstGeom prst="rect">
+            <a:avLst/>
+          </a:prstGeom>
+          <a:noFill/>
+          <a:ln/>
+        </p:spPr>
+        <p:txBody>
+          <a:bodyPr wrap="square" lIns="0" tIns="0" rIns="0" bIns="0" rtlCol="0" anchor="ctr"/>
+          <a:lstStyle/>
+          <a:p>
+            <a:pPr indent="0" marL="0">
+              <a:buNone/>
+            </a:pPr>
+            <a:r>
+              <a:rPr lang="en-US" sz="1150" dirty="0">
+                <a:solidFill>
+                  <a:srgbClr val="6B7A6E"/>
+                </a:solidFill>
+                <a:latin typeface="Microsoft YaHei" pitchFamily="34" charset="0"/>
+                <a:ea typeface="Microsoft YaHei" pitchFamily="34" charset="-122"/>
+                <a:cs typeface="Microsoft YaHei" pitchFamily="34" charset="-120"/>
+              </a:rPr>
+              <a:t>月费用</a:t>
+            </a:r>
+            <a:endParaRPr lang="en-US" sz="1150" dirty="0"/>
+          </a:p>
+        </p:txBody>
+      </p:sp>
+      <p:sp>
+        <p:nvSpPr>
+          <p:cNvPr id="13" name="Text 11"/>
+          <p:cNvSpPr/>
+          <p:nvPr/>
+        </p:nvSpPr>
+        <p:spPr>
+          <a:xfrm>
+            <a:off x="4389120" y="1901952"/>
+            <a:ext cx="1179576" cy="548640"/>
+          </a:xfrm>
+          <a:prstGeom prst="rect">
+            <a:avLst/>
+          </a:prstGeom>
+          <a:noFill/>
+          <a:ln/>
+        </p:spPr>
+        <p:txBody>
+          <a:bodyPr wrap="square" lIns="0" tIns="0" rIns="0" bIns="0" rtlCol="0" anchor="ctr"/>
+          <a:lstStyle/>
+          <a:p>
+            <a:pPr indent="0" marL="0">
+              <a:buNone/>
+            </a:pPr>
+            <a:r>
+              <a:rPr lang="en-US" sz="1450" b="1" dirty="0">
+                <a:solidFill>
+                  <a:srgbClr val="26312A"/>
+                </a:solidFill>
+                <a:latin typeface="Microsoft YaHei" pitchFamily="34" charset="0"/>
+                <a:ea typeface="Microsoft YaHei" pitchFamily="34" charset="-122"/>
+                <a:cs typeface="Microsoft YaHei" pitchFamily="34" charset="-120"/>
+              </a:rPr>
+              <a:t>RM 220,000</a:t>
+            </a:r>
+            <a:endParaRPr lang="en-US" sz="1450" dirty="0"/>
+          </a:p>
+        </p:txBody>
+      </p:sp>
+      <p:sp>
+        <p:nvSpPr>
+          <p:cNvPr id="14" name="Text 12"/>
+          <p:cNvSpPr/>
+          <p:nvPr/>
+        </p:nvSpPr>
+        <p:spPr>
+          <a:xfrm>
+            <a:off x="5632704" y="1600200"/>
+            <a:ext cx="384048" cy="822960"/>
+          </a:xfrm>
+          <a:prstGeom prst="rect">
+            <a:avLst/>
+          </a:prstGeom>
+          <a:noFill/>
+          <a:ln/>
+        </p:spPr>
+        <p:txBody>
+          <a:bodyPr wrap="square" lIns="0" tIns="0" rIns="0" bIns="0" rtlCol="0" anchor="ctr"/>
+          <a:lstStyle/>
+          <a:p>
+            <a:pPr algn="ctr" indent="0" marL="0">
+              <a:buNone/>
+            </a:pPr>
+            <a:r>
+              <a:rPr lang="en-US" sz="2400" b="1" dirty="0">
+                <a:solidFill>
+                  <a:srgbClr val="6B7A6E"/>
+                </a:solidFill>
+                <a:latin typeface="Microsoft YaHei" pitchFamily="34" charset="0"/>
+                <a:ea typeface="Microsoft YaHei" pitchFamily="34" charset="-122"/>
+                <a:cs typeface="Microsoft YaHei" pitchFamily="34" charset="-120"/>
+              </a:rPr>
+              <a:t>=</a:t>
+            </a:r>
+            <a:endParaRPr lang="en-US" sz="2400" dirty="0"/>
+          </a:p>
+        </p:txBody>
+      </p:sp>
+      <p:sp>
+        <p:nvSpPr>
+          <p:cNvPr id="15" name="Shape 13"/>
+          <p:cNvSpPr/>
+          <p:nvPr/>
+        </p:nvSpPr>
+        <p:spPr>
+          <a:xfrm>
+            <a:off x="6044184" y="1417320"/>
+            <a:ext cx="1572768" cy="1188720"/>
+          </a:xfrm>
+          <a:prstGeom prst="roundRect">
+            <a:avLst>
+              <a:gd name="adj" fmla="val 6154"/>
+            </a:avLst>
           </a:prstGeom>
           <a:solidFill>
             <a:srgbClr val="F1F7EC"/>
           </a:solidFill>
           <a:ln/>
-        </p:spPr>
-      </p:sp>
-      <p:pic>
-        <p:nvPicPr>
-          <p:cNvPr id="4" name="Image 0" descr="preencoded.png">    </p:cNvPr>
-          <p:cNvPicPr>
-            <a:picLocks noChangeAspect="1"/>
-          </p:cNvPicPr>
-          <p:nvPr/>
-        </p:nvPicPr>
-        <p:blipFill>
-          <a:blip r:embed="rId1"/>
-          <a:stretch>
-            <a:fillRect/>
-          </a:stretch>
-        </p:blipFill>
-        <p:spPr>
-          <a:xfrm>
-            <a:off x="667512" y="1261872"/>
-            <a:ext cx="237744" cy="237744"/>
-          </a:xfrm>
-          <a:prstGeom prst="rect">
-            <a:avLst/>
-          </a:prstGeom>
-        </p:spPr>
-      </p:pic>
-      <p:sp>
-        <p:nvSpPr>
-          <p:cNvPr id="5" name="Text 2"/>
-          <p:cNvSpPr/>
-          <p:nvPr/>
-        </p:nvSpPr>
-        <p:spPr>
-          <a:xfrm>
-            <a:off x="1234440" y="1078992"/>
-            <a:ext cx="1600200" cy="603504"/>
-          </a:xfrm>
-          <a:prstGeom prst="rect">
-            <a:avLst/>
-          </a:prstGeom>
-          <a:noFill/>
-          <a:ln/>
-        </p:spPr>
-        <p:txBody>
-          <a:bodyPr wrap="square" lIns="0" tIns="0" rIns="0" bIns="0" rtlCol="0" anchor="ctr"/>
-          <a:lstStyle/>
-          <a:p>
-            <a:pPr indent="0" marL="0">
-              <a:buNone/>
-            </a:pPr>
-            <a:r>
-              <a:rPr lang="en-US" sz="1500" b="1" dirty="0">
+          <a:effectLst>
+            <a:outerShdw sx="100000" sy="100000" kx="0" ky="0" algn="bl" rotWithShape="0" blurRad="88900" dist="25400" dir="2700000">
+              <a:srgbClr val="000000">
+                <a:alpha val="13000"/>
+              </a:srgbClr>
+            </a:outerShdw>
+          </a:effectLst>
+        </p:spPr>
+      </p:sp>
+      <p:sp>
+        <p:nvSpPr>
+          <p:cNvPr id="16" name="Text 14"/>
+          <p:cNvSpPr/>
+          <p:nvPr/>
+        </p:nvSpPr>
+        <p:spPr>
+          <a:xfrm>
+            <a:off x="6153912" y="1572768"/>
+            <a:ext cx="1389888" cy="320040"/>
+          </a:xfrm>
+          <a:prstGeom prst="rect">
+            <a:avLst/>
+          </a:prstGeom>
+          <a:noFill/>
+          <a:ln/>
+        </p:spPr>
+        <p:txBody>
+          <a:bodyPr wrap="square" lIns="0" tIns="0" rIns="0" bIns="0" rtlCol="0" anchor="ctr"/>
+          <a:lstStyle/>
+          <a:p>
+            <a:pPr indent="0" marL="0">
+              <a:buNone/>
+            </a:pPr>
+            <a:r>
+              <a:rPr lang="en-US" sz="1150" dirty="0">
+                <a:solidFill>
+                  <a:srgbClr val="6B7A6E"/>
+                </a:solidFill>
+                <a:latin typeface="Microsoft YaHei" pitchFamily="34" charset="0"/>
+                <a:ea typeface="Microsoft YaHei" pitchFamily="34" charset="-122"/>
+                <a:cs typeface="Microsoft YaHei" pitchFamily="34" charset="-120"/>
+              </a:rPr>
+              <a:t>每月净赚</a:t>
+            </a:r>
+            <a:endParaRPr lang="en-US" sz="1150" dirty="0"/>
+          </a:p>
+        </p:txBody>
+      </p:sp>
+      <p:sp>
+        <p:nvSpPr>
+          <p:cNvPr id="17" name="Text 15"/>
+          <p:cNvSpPr/>
+          <p:nvPr/>
+        </p:nvSpPr>
+        <p:spPr>
+          <a:xfrm>
+            <a:off x="6153912" y="1901952"/>
+            <a:ext cx="1426464" cy="548640"/>
+          </a:xfrm>
+          <a:prstGeom prst="rect">
+            <a:avLst/>
+          </a:prstGeom>
+          <a:noFill/>
+          <a:ln/>
+        </p:spPr>
+        <p:txBody>
+          <a:bodyPr wrap="square" lIns="0" tIns="0" rIns="0" bIns="0" rtlCol="0" anchor="ctr"/>
+          <a:lstStyle/>
+          <a:p>
+            <a:pPr indent="0" marL="0">
+              <a:buNone/>
+            </a:pPr>
+            <a:r>
+              <a:rPr lang="en-US" sz="1450" b="1" dirty="0">
+                <a:solidFill>
+                  <a:srgbClr val="2C6E31"/>
+                </a:solidFill>
+                <a:latin typeface="Microsoft YaHei" pitchFamily="34" charset="0"/>
+                <a:ea typeface="Microsoft YaHei" pitchFamily="34" charset="-122"/>
+                <a:cs typeface="Microsoft YaHei" pitchFamily="34" charset="-120"/>
+              </a:rPr>
+              <a:t>约 RM 63,000</a:t>
+            </a:r>
+            <a:endParaRPr lang="en-US" sz="1450" dirty="0"/>
+          </a:p>
+        </p:txBody>
+      </p:sp>
+      <p:sp>
+        <p:nvSpPr>
+          <p:cNvPr id="18" name="Text 16"/>
+          <p:cNvSpPr/>
+          <p:nvPr/>
+        </p:nvSpPr>
+        <p:spPr>
+          <a:xfrm>
+            <a:off x="457200" y="2880360"/>
+            <a:ext cx="8229600" cy="457200"/>
+          </a:xfrm>
+          <a:prstGeom prst="rect">
+            <a:avLst/>
+          </a:prstGeom>
+          <a:noFill/>
+          <a:ln/>
+        </p:spPr>
+        <p:txBody>
+          <a:bodyPr wrap="square" lIns="0" tIns="0" rIns="0" bIns="0" rtlCol="0" anchor="ctr"/>
+          <a:lstStyle/>
+          <a:p>
+            <a:pPr algn="ctr" indent="0" marL="0">
+              <a:buNone/>
+            </a:pPr>
+            <a:r>
+              <a:rPr lang="en-US" sz="1700" dirty="0">
                 <a:solidFill>
                   <a:srgbClr val="26312A"/>
                 </a:solidFill>
@@ -2439,144 +3511,81 @@
                 <a:ea typeface="Microsoft YaHei" pitchFamily="34" charset="-122"/>
                 <a:cs typeface="Microsoft YaHei" pitchFamily="34" charset="-120"/>
               </a:rPr>
-              <a:t>销售团队</a:t>
-            </a:r>
-            <a:endParaRPr lang="en-US" sz="1500" dirty="0"/>
-          </a:p>
-        </p:txBody>
-      </p:sp>
-      <p:sp>
-        <p:nvSpPr>
-          <p:cNvPr id="6" name="Text 3"/>
-          <p:cNvSpPr/>
-          <p:nvPr/>
-        </p:nvSpPr>
-        <p:spPr>
-          <a:xfrm>
-            <a:off x="2880360" y="1078992"/>
-            <a:ext cx="5760720" cy="603504"/>
-          </a:xfrm>
-          <a:prstGeom prst="rect">
-            <a:avLst/>
-          </a:prstGeom>
-          <a:noFill/>
-          <a:ln/>
-        </p:spPr>
-        <p:txBody>
-          <a:bodyPr wrap="square" lIns="0" tIns="0" rIns="0" bIns="0" rtlCol="0" anchor="ctr"/>
-          <a:lstStyle/>
-          <a:p>
-            <a:pPr indent="0" marL="0">
-              <a:buNone/>
-            </a:pPr>
-            <a:r>
-              <a:rPr lang="en-US" sz="1250" dirty="0">
-                <a:solidFill>
-                  <a:srgbClr val="4A554C"/>
-                </a:solidFill>
-                <a:latin typeface="Microsoft YaHei" pitchFamily="34" charset="0"/>
-                <a:ea typeface="Microsoft YaHei" pitchFamily="34" charset="-122"/>
-                <a:cs typeface="Microsoft YaHei" pitchFamily="34" charset="-120"/>
-              </a:rPr>
-              <a:t>每月 RM 550,000，主推高毛利产品，盯紧每一家门店与渠道</a:t>
-            </a:r>
-            <a:endParaRPr lang="en-US" sz="1250" dirty="0"/>
-          </a:p>
-        </p:txBody>
-      </p:sp>
-      <p:sp>
-        <p:nvSpPr>
-          <p:cNvPr id="7" name="Shape 4"/>
-          <p:cNvSpPr/>
-          <p:nvPr/>
-        </p:nvSpPr>
-        <p:spPr>
-          <a:xfrm>
-            <a:off x="1234440" y="1755648"/>
-            <a:ext cx="7406640" cy="0"/>
-          </a:xfrm>
-          <a:prstGeom prst="line">
-            <a:avLst/>
-          </a:prstGeom>
-          <a:noFill/>
-          <a:ln w="9525">
-            <a:solidFill>
-              <a:srgbClr val="E4EAE2"/>
-            </a:solidFill>
-            <a:prstDash val="solid"/>
-          </a:ln>
-        </p:spPr>
-      </p:sp>
-      <p:sp>
-        <p:nvSpPr>
-          <p:cNvPr id="8" name="Shape 5"/>
-          <p:cNvSpPr/>
-          <p:nvPr/>
-        </p:nvSpPr>
-        <p:spPr>
-          <a:xfrm>
-            <a:off x="548640" y="1892808"/>
-            <a:ext cx="475488" cy="475488"/>
-          </a:xfrm>
-          <a:prstGeom prst="ellipse">
-            <a:avLst/>
+              <a:t>每月约 RM 63,000 × 6 个月 ≈ </a:t>
+            </a:r>
+            <a:pPr algn="ctr" indent="0" marL="0">
+              <a:buNone/>
+            </a:pPr>
+            <a:r>
+              <a:rPr lang="en-US" sz="1700" b="1" dirty="0">
+                <a:solidFill>
+                  <a:srgbClr val="2C6E31"/>
+                </a:solidFill>
+                <a:latin typeface="Microsoft YaHei" pitchFamily="34" charset="0"/>
+                <a:ea typeface="Microsoft YaHei" pitchFamily="34" charset="-122"/>
+                <a:cs typeface="Microsoft YaHei" pitchFamily="34" charset="-120"/>
+              </a:rPr>
+              <a:t>H2 赚回约 RM 380,000</a:t>
+            </a:r>
+            <a:endParaRPr lang="en-US" sz="1700" dirty="0"/>
+          </a:p>
+        </p:txBody>
+      </p:sp>
+      <p:sp>
+        <p:nvSpPr>
+          <p:cNvPr id="19" name="Shape 17"/>
+          <p:cNvSpPr/>
+          <p:nvPr/>
+        </p:nvSpPr>
+        <p:spPr>
+          <a:xfrm>
+            <a:off x="1463040" y="3474720"/>
+            <a:ext cx="6217920" cy="960120"/>
+          </a:xfrm>
+          <a:prstGeom prst="roundRect">
+            <a:avLst>
+              <a:gd name="adj" fmla="val 8571"/>
+            </a:avLst>
           </a:prstGeom>
           <a:solidFill>
             <a:srgbClr val="F1F7EC"/>
           </a:solidFill>
           <a:ln/>
-        </p:spPr>
-      </p:sp>
-      <p:pic>
-        <p:nvPicPr>
-          <p:cNvPr id="9" name="Image 1" descr="preencoded.png">    </p:cNvPr>
-          <p:cNvPicPr>
-            <a:picLocks noChangeAspect="1"/>
-          </p:cNvPicPr>
-          <p:nvPr/>
-        </p:nvPicPr>
-        <p:blipFill>
-          <a:blip r:embed="rId2"/>
-          <a:stretch>
-            <a:fillRect/>
-          </a:stretch>
-        </p:blipFill>
-        <p:spPr>
-          <a:xfrm>
-            <a:off x="667512" y="2011680"/>
-            <a:ext cx="237744" cy="237744"/>
-          </a:xfrm>
-          <a:prstGeom prst="rect">
-            <a:avLst/>
-          </a:prstGeom>
-        </p:spPr>
-      </p:pic>
-      <p:sp>
-        <p:nvSpPr>
-          <p:cNvPr id="10" name="Text 6"/>
-          <p:cNvSpPr/>
-          <p:nvPr/>
-        </p:nvSpPr>
-        <p:spPr>
-          <a:xfrm>
-            <a:off x="1234440" y="1828800"/>
-            <a:ext cx="1600200" cy="603504"/>
-          </a:xfrm>
-          <a:prstGeom prst="rect">
-            <a:avLst/>
-          </a:prstGeom>
-          <a:noFill/>
-          <a:ln/>
-        </p:spPr>
-        <p:txBody>
-          <a:bodyPr wrap="square" lIns="0" tIns="0" rIns="0" bIns="0" rtlCol="0" anchor="ctr"/>
-          <a:lstStyle/>
-          <a:p>
-            <a:pPr indent="0" marL="0">
-              <a:buNone/>
-            </a:pPr>
-            <a:r>
-              <a:rPr lang="en-US" sz="1500" b="1" dirty="0">
+          <a:effectLst>
+            <a:outerShdw sx="100000" sy="100000" kx="0" ky="0" algn="bl" rotWithShape="0" blurRad="88900" dist="25400" dir="2700000">
+              <a:srgbClr val="000000">
+                <a:alpha val="13000"/>
+              </a:srgbClr>
+            </a:outerShdw>
+          </a:effectLst>
+        </p:spPr>
+      </p:sp>
+      <p:sp>
+        <p:nvSpPr>
+          <p:cNvPr id="20" name="Text 18"/>
+          <p:cNvSpPr/>
+          <p:nvPr/>
+        </p:nvSpPr>
+        <p:spPr>
+          <a:xfrm>
+            <a:off x="1463040" y="3474720"/>
+            <a:ext cx="6217920" cy="960120"/>
+          </a:xfrm>
+          <a:prstGeom prst="rect">
+            <a:avLst/>
+          </a:prstGeom>
+          <a:noFill/>
+          <a:ln/>
+        </p:spPr>
+        <p:txBody>
+          <a:bodyPr wrap="square" lIns="0" tIns="0" rIns="0" bIns="0" rtlCol="0" anchor="ctr"/>
+          <a:lstStyle/>
+          <a:p>
+            <a:pPr algn="ctr" indent="0" marL="0">
+              <a:buNone/>
+            </a:pPr>
+            <a:r>
+              <a:rPr lang="en-US" sz="1600" dirty="0">
                 <a:solidFill>
                   <a:srgbClr val="26312A"/>
                 </a:solidFill>
@@ -2584,483 +3593,62 @@
                 <a:ea typeface="Microsoft YaHei" pitchFamily="34" charset="-122"/>
                 <a:cs typeface="Microsoft YaHei" pitchFamily="34" charset="-120"/>
               </a:rPr>
-              <a:t>市场营销</a:t>
-            </a:r>
-            <a:endParaRPr lang="en-US" sz="1500" dirty="0"/>
-          </a:p>
-        </p:txBody>
-      </p:sp>
-      <p:sp>
-        <p:nvSpPr>
-          <p:cNvPr id="11" name="Text 7"/>
-          <p:cNvSpPr/>
-          <p:nvPr/>
-        </p:nvSpPr>
-        <p:spPr>
-          <a:xfrm>
-            <a:off x="2880360" y="1828800"/>
-            <a:ext cx="5760720" cy="603504"/>
-          </a:xfrm>
-          <a:prstGeom prst="rect">
-            <a:avLst/>
-          </a:prstGeom>
-          <a:noFill/>
-          <a:ln/>
-        </p:spPr>
-        <p:txBody>
-          <a:bodyPr wrap="square" lIns="0" tIns="0" rIns="0" bIns="0" rtlCol="0" anchor="ctr"/>
-          <a:lstStyle/>
-          <a:p>
-            <a:pPr indent="0" marL="0">
-              <a:buNone/>
-            </a:pPr>
-            <a:r>
-              <a:rPr lang="en-US" sz="1250" dirty="0">
-                <a:solidFill>
-                  <a:srgbClr val="4A554C"/>
-                </a:solidFill>
-                <a:latin typeface="Microsoft YaHei" pitchFamily="34" charset="0"/>
-                <a:ea typeface="Microsoft YaHei" pitchFamily="34" charset="-122"/>
-                <a:cs typeface="Microsoft YaHei" pitchFamily="34" charset="-120"/>
-              </a:rPr>
-              <a:t>每笔投放先小额测试、算回报 —— 对不上回报的，立刻停</a:t>
-            </a:r>
-            <a:endParaRPr lang="en-US" sz="1250" dirty="0"/>
-          </a:p>
-        </p:txBody>
-      </p:sp>
-      <p:sp>
-        <p:nvSpPr>
-          <p:cNvPr id="12" name="Shape 8"/>
-          <p:cNvSpPr/>
-          <p:nvPr/>
-        </p:nvSpPr>
-        <p:spPr>
-          <a:xfrm>
-            <a:off x="1234440" y="2505456"/>
-            <a:ext cx="7406640" cy="0"/>
-          </a:xfrm>
-          <a:prstGeom prst="line">
-            <a:avLst/>
-          </a:prstGeom>
-          <a:noFill/>
-          <a:ln w="9525">
-            <a:solidFill>
-              <a:srgbClr val="E4EAE2"/>
-            </a:solidFill>
-            <a:prstDash val="solid"/>
-          </a:ln>
-        </p:spPr>
-      </p:sp>
-      <p:sp>
-        <p:nvSpPr>
-          <p:cNvPr id="13" name="Shape 9"/>
-          <p:cNvSpPr/>
-          <p:nvPr/>
-        </p:nvSpPr>
-        <p:spPr>
-          <a:xfrm>
-            <a:off x="548640" y="2642616"/>
-            <a:ext cx="475488" cy="475488"/>
-          </a:xfrm>
-          <a:prstGeom prst="ellipse">
-            <a:avLst/>
-          </a:prstGeom>
-          <a:solidFill>
-            <a:srgbClr val="F1F7EC"/>
-          </a:solidFill>
-          <a:ln/>
-        </p:spPr>
-      </p:sp>
-      <p:pic>
-        <p:nvPicPr>
-          <p:cNvPr id="14" name="Image 2" descr="preencoded.png">    </p:cNvPr>
-          <p:cNvPicPr>
-            <a:picLocks noChangeAspect="1"/>
-          </p:cNvPicPr>
-          <p:nvPr/>
-        </p:nvPicPr>
-        <p:blipFill>
-          <a:blip r:embed="rId3"/>
-          <a:stretch>
-            <a:fillRect/>
-          </a:stretch>
-        </p:blipFill>
-        <p:spPr>
-          <a:xfrm>
-            <a:off x="667512" y="2761488"/>
-            <a:ext cx="237744" cy="237744"/>
-          </a:xfrm>
-          <a:prstGeom prst="rect">
-            <a:avLst/>
-          </a:prstGeom>
-        </p:spPr>
-      </p:pic>
-      <p:sp>
-        <p:nvSpPr>
-          <p:cNvPr id="15" name="Text 10"/>
-          <p:cNvSpPr/>
-          <p:nvPr/>
-        </p:nvSpPr>
-        <p:spPr>
-          <a:xfrm>
-            <a:off x="1234440" y="2578608"/>
-            <a:ext cx="1600200" cy="603504"/>
-          </a:xfrm>
-          <a:prstGeom prst="rect">
-            <a:avLst/>
-          </a:prstGeom>
-          <a:noFill/>
-          <a:ln/>
-        </p:spPr>
-        <p:txBody>
-          <a:bodyPr wrap="square" lIns="0" tIns="0" rIns="0" bIns="0" rtlCol="0" anchor="ctr"/>
-          <a:lstStyle/>
-          <a:p>
-            <a:pPr indent="0" marL="0">
-              <a:buNone/>
-            </a:pPr>
-            <a:r>
-              <a:rPr lang="en-US" sz="1500" b="1" dirty="0">
-                <a:solidFill>
-                  <a:srgbClr val="26312A"/>
-                </a:solidFill>
-                <a:latin typeface="Microsoft YaHei" pitchFamily="34" charset="0"/>
-                <a:ea typeface="Microsoft YaHei" pitchFamily="34" charset="-122"/>
-                <a:cs typeface="Microsoft YaHei" pitchFamily="34" charset="-120"/>
-              </a:rPr>
-              <a:t>运营与采购</a:t>
-            </a:r>
-            <a:endParaRPr lang="en-US" sz="1500" dirty="0"/>
-          </a:p>
-        </p:txBody>
-      </p:sp>
-      <p:sp>
-        <p:nvSpPr>
-          <p:cNvPr id="16" name="Text 11"/>
-          <p:cNvSpPr/>
-          <p:nvPr/>
-        </p:nvSpPr>
-        <p:spPr>
-          <a:xfrm>
-            <a:off x="2880360" y="2578608"/>
-            <a:ext cx="5760720" cy="603504"/>
-          </a:xfrm>
-          <a:prstGeom prst="rect">
-            <a:avLst/>
-          </a:prstGeom>
-          <a:noFill/>
-          <a:ln/>
-        </p:spPr>
-        <p:txBody>
-          <a:bodyPr wrap="square" lIns="0" tIns="0" rIns="0" bIns="0" rtlCol="0" anchor="ctr"/>
-          <a:lstStyle/>
-          <a:p>
-            <a:pPr indent="0" marL="0">
-              <a:buNone/>
-            </a:pPr>
-            <a:r>
-              <a:rPr lang="en-US" sz="1250" dirty="0">
-                <a:solidFill>
-                  <a:srgbClr val="4A554C"/>
-                </a:solidFill>
-                <a:latin typeface="Microsoft YaHei" pitchFamily="34" charset="0"/>
-                <a:ea typeface="Microsoft YaHei" pitchFamily="34" charset="-122"/>
-                <a:cs typeface="Microsoft YaHei" pitchFamily="34" charset="-120"/>
-              </a:rPr>
-              <a:t>库存天数压到 90 天：先卖完现有库存，再谈进货和新品</a:t>
-            </a:r>
-            <a:endParaRPr lang="en-US" sz="1250" dirty="0"/>
-          </a:p>
-        </p:txBody>
-      </p:sp>
-      <p:sp>
-        <p:nvSpPr>
-          <p:cNvPr id="17" name="Shape 12"/>
-          <p:cNvSpPr/>
-          <p:nvPr/>
-        </p:nvSpPr>
-        <p:spPr>
-          <a:xfrm>
-            <a:off x="1234440" y="3255264"/>
-            <a:ext cx="7406640" cy="0"/>
-          </a:xfrm>
-          <a:prstGeom prst="line">
-            <a:avLst/>
-          </a:prstGeom>
-          <a:noFill/>
-          <a:ln w="9525">
-            <a:solidFill>
-              <a:srgbClr val="E4EAE2"/>
-            </a:solidFill>
-            <a:prstDash val="solid"/>
-          </a:ln>
-        </p:spPr>
-      </p:sp>
-      <p:sp>
-        <p:nvSpPr>
-          <p:cNvPr id="18" name="Shape 13"/>
-          <p:cNvSpPr/>
-          <p:nvPr/>
-        </p:nvSpPr>
-        <p:spPr>
-          <a:xfrm>
-            <a:off x="548640" y="3392424"/>
-            <a:ext cx="475488" cy="475488"/>
-          </a:xfrm>
-          <a:prstGeom prst="ellipse">
-            <a:avLst/>
-          </a:prstGeom>
-          <a:solidFill>
-            <a:srgbClr val="F1F7EC"/>
-          </a:solidFill>
-          <a:ln/>
-        </p:spPr>
-      </p:sp>
-      <p:pic>
-        <p:nvPicPr>
-          <p:cNvPr id="19" name="Image 3" descr="preencoded.png">    </p:cNvPr>
-          <p:cNvPicPr>
-            <a:picLocks noChangeAspect="1"/>
-          </p:cNvPicPr>
-          <p:nvPr/>
-        </p:nvPicPr>
-        <p:blipFill>
-          <a:blip r:embed="rId4"/>
-          <a:stretch>
-            <a:fillRect/>
-          </a:stretch>
-        </p:blipFill>
-        <p:spPr>
-          <a:xfrm>
-            <a:off x="667512" y="3511296"/>
-            <a:ext cx="237744" cy="237744"/>
-          </a:xfrm>
-          <a:prstGeom prst="rect">
-            <a:avLst/>
-          </a:prstGeom>
-        </p:spPr>
-      </p:pic>
-      <p:sp>
-        <p:nvSpPr>
-          <p:cNvPr id="20" name="Text 14"/>
-          <p:cNvSpPr/>
-          <p:nvPr/>
-        </p:nvSpPr>
-        <p:spPr>
-          <a:xfrm>
-            <a:off x="1234440" y="3328416"/>
-            <a:ext cx="1600200" cy="603504"/>
-          </a:xfrm>
-          <a:prstGeom prst="rect">
-            <a:avLst/>
-          </a:prstGeom>
-          <a:noFill/>
-          <a:ln/>
-        </p:spPr>
-        <p:txBody>
-          <a:bodyPr wrap="square" lIns="0" tIns="0" rIns="0" bIns="0" rtlCol="0" anchor="ctr"/>
-          <a:lstStyle/>
-          <a:p>
-            <a:pPr indent="0" marL="0">
-              <a:buNone/>
-            </a:pPr>
-            <a:r>
-              <a:rPr lang="en-US" sz="1500" b="1" dirty="0">
-                <a:solidFill>
-                  <a:srgbClr val="26312A"/>
-                </a:solidFill>
-                <a:latin typeface="Microsoft YaHei" pitchFamily="34" charset="0"/>
-                <a:ea typeface="Microsoft YaHei" pitchFamily="34" charset="-122"/>
-                <a:cs typeface="Microsoft YaHei" pitchFamily="34" charset="-120"/>
-              </a:rPr>
-              <a:t>财务</a:t>
-            </a:r>
-            <a:endParaRPr lang="en-US" sz="1500" dirty="0"/>
-          </a:p>
-        </p:txBody>
-      </p:sp>
-      <p:sp>
-        <p:nvSpPr>
-          <p:cNvPr id="21" name="Text 15"/>
-          <p:cNvSpPr/>
-          <p:nvPr/>
-        </p:nvSpPr>
-        <p:spPr>
-          <a:xfrm>
-            <a:off x="2880360" y="3328416"/>
-            <a:ext cx="5760720" cy="603504"/>
-          </a:xfrm>
-          <a:prstGeom prst="rect">
-            <a:avLst/>
-          </a:prstGeom>
-          <a:noFill/>
-          <a:ln/>
-        </p:spPr>
-        <p:txBody>
-          <a:bodyPr wrap="square" lIns="0" tIns="0" rIns="0" bIns="0" rtlCol="0" anchor="ctr"/>
-          <a:lstStyle/>
-          <a:p>
-            <a:pPr indent="0" marL="0">
-              <a:buNone/>
-            </a:pPr>
-            <a:r>
-              <a:rPr lang="en-US" sz="1250" dirty="0">
-                <a:solidFill>
-                  <a:srgbClr val="4A554C"/>
-                </a:solidFill>
-                <a:latin typeface="Microsoft YaHei" pitchFamily="34" charset="0"/>
-                <a:ea typeface="Microsoft YaHei" pitchFamily="34" charset="-122"/>
-                <a:cs typeface="Microsoft YaHei" pitchFamily="34" charset="-120"/>
-              </a:rPr>
-              <a:t>守住每月 RM 220,000 费用红线，三个数字每月向全员公开</a:t>
-            </a:r>
-            <a:endParaRPr lang="en-US" sz="1250" dirty="0"/>
-          </a:p>
-        </p:txBody>
-      </p:sp>
-      <p:sp>
-        <p:nvSpPr>
-          <p:cNvPr id="22" name="Shape 16"/>
-          <p:cNvSpPr/>
-          <p:nvPr/>
-        </p:nvSpPr>
-        <p:spPr>
-          <a:xfrm>
-            <a:off x="1234440" y="4005072"/>
-            <a:ext cx="7406640" cy="0"/>
-          </a:xfrm>
-          <a:prstGeom prst="line">
-            <a:avLst/>
-          </a:prstGeom>
-          <a:noFill/>
-          <a:ln w="9525">
-            <a:solidFill>
-              <a:srgbClr val="E4EAE2"/>
-            </a:solidFill>
-            <a:prstDash val="solid"/>
-          </a:ln>
-        </p:spPr>
-      </p:sp>
-      <p:sp>
-        <p:nvSpPr>
-          <p:cNvPr id="23" name="Shape 17"/>
-          <p:cNvSpPr/>
-          <p:nvPr/>
-        </p:nvSpPr>
-        <p:spPr>
-          <a:xfrm>
-            <a:off x="548640" y="4142232"/>
-            <a:ext cx="475488" cy="475488"/>
-          </a:xfrm>
-          <a:prstGeom prst="ellipse">
-            <a:avLst/>
-          </a:prstGeom>
-          <a:solidFill>
-            <a:srgbClr val="F1F7EC"/>
-          </a:solidFill>
-          <a:ln/>
-        </p:spPr>
-      </p:sp>
-      <p:pic>
-        <p:nvPicPr>
-          <p:cNvPr id="24" name="Image 4" descr="preencoded.png">    </p:cNvPr>
-          <p:cNvPicPr>
-            <a:picLocks noChangeAspect="1"/>
-          </p:cNvPicPr>
-          <p:nvPr/>
-        </p:nvPicPr>
-        <p:blipFill>
-          <a:blip r:embed="rId5"/>
-          <a:stretch>
-            <a:fillRect/>
-          </a:stretch>
-        </p:blipFill>
-        <p:spPr>
-          <a:xfrm>
-            <a:off x="667512" y="4261104"/>
-            <a:ext cx="237744" cy="237744"/>
-          </a:xfrm>
-          <a:prstGeom prst="rect">
-            <a:avLst/>
-          </a:prstGeom>
-        </p:spPr>
-      </p:pic>
-      <p:sp>
-        <p:nvSpPr>
-          <p:cNvPr id="25" name="Text 18"/>
-          <p:cNvSpPr/>
-          <p:nvPr/>
-        </p:nvSpPr>
-        <p:spPr>
-          <a:xfrm>
-            <a:off x="1234440" y="4078224"/>
-            <a:ext cx="1600200" cy="603504"/>
-          </a:xfrm>
-          <a:prstGeom prst="rect">
-            <a:avLst/>
-          </a:prstGeom>
-          <a:noFill/>
-          <a:ln/>
-        </p:spPr>
-        <p:txBody>
-          <a:bodyPr wrap="square" lIns="0" tIns="0" rIns="0" bIns="0" rtlCol="0" anchor="ctr"/>
-          <a:lstStyle/>
-          <a:p>
-            <a:pPr indent="0" marL="0">
-              <a:buNone/>
-            </a:pPr>
-            <a:r>
-              <a:rPr lang="en-US" sz="1500" b="1" dirty="0">
-                <a:solidFill>
-                  <a:srgbClr val="26312A"/>
-                </a:solidFill>
-                <a:latin typeface="Microsoft YaHei" pitchFamily="34" charset="0"/>
-                <a:ea typeface="Microsoft YaHei" pitchFamily="34" charset="-122"/>
-                <a:cs typeface="Microsoft YaHei" pitchFamily="34" charset="-120"/>
-              </a:rPr>
-              <a:t>每一个人</a:t>
-            </a:r>
-            <a:endParaRPr lang="en-US" sz="1500" dirty="0"/>
-          </a:p>
-        </p:txBody>
-      </p:sp>
-      <p:sp>
-        <p:nvSpPr>
-          <p:cNvPr id="26" name="Text 19"/>
-          <p:cNvSpPr/>
-          <p:nvPr/>
-        </p:nvSpPr>
-        <p:spPr>
-          <a:xfrm>
-            <a:off x="2880360" y="4078224"/>
-            <a:ext cx="5760720" cy="603504"/>
-          </a:xfrm>
-          <a:prstGeom prst="rect">
-            <a:avLst/>
-          </a:prstGeom>
-          <a:noFill/>
-          <a:ln/>
-        </p:spPr>
-        <p:txBody>
-          <a:bodyPr wrap="square" lIns="0" tIns="0" rIns="0" bIns="0" rtlCol="0" anchor="ctr"/>
-          <a:lstStyle/>
-          <a:p>
-            <a:pPr indent="0" marL="0">
-              <a:buNone/>
-            </a:pPr>
-            <a:r>
-              <a:rPr lang="en-US" sz="1250" dirty="0">
-                <a:solidFill>
-                  <a:srgbClr val="4A554C"/>
-                </a:solidFill>
-                <a:latin typeface="Microsoft YaHei" pitchFamily="34" charset="0"/>
-                <a:ea typeface="Microsoft YaHei" pitchFamily="34" charset="-122"/>
-                <a:cs typeface="Microsoft YaHei" pitchFamily="34" charset="-120"/>
-              </a:rPr>
-              <a:t>花每一块钱之前先问：这能帮我们多卖多少？</a:t>
-            </a:r>
-            <a:endParaRPr lang="en-US" sz="1250" dirty="0"/>
+              <a:t>上半年 -45 万  +  下半年 +38 万  ≈  </a:t>
+            </a:r>
+            <a:pPr algn="ctr" indent="0" marL="0">
+              <a:buNone/>
+            </a:pPr>
+            <a:r>
+              <a:rPr lang="en-US" sz="1900" b="1" dirty="0">
+                <a:solidFill>
+                  <a:srgbClr val="2C6E31"/>
+                </a:solidFill>
+                <a:latin typeface="Microsoft YaHei" pitchFamily="34" charset="0"/>
+                <a:ea typeface="Microsoft YaHei" pitchFamily="34" charset="-122"/>
+                <a:cs typeface="Microsoft YaHei" pitchFamily="34" charset="-120"/>
+              </a:rPr>
+              <a:t>全年基本打平</a:t>
+            </a:r>
+            <a:endParaRPr lang="en-US" sz="1600" dirty="0"/>
+          </a:p>
+        </p:txBody>
+      </p:sp>
+      <p:sp>
+        <p:nvSpPr>
+          <p:cNvPr id="21" name="Text 19"/>
+          <p:cNvSpPr/>
+          <p:nvPr/>
+        </p:nvSpPr>
+        <p:spPr>
+          <a:xfrm>
+            <a:off x="457200" y="4617720"/>
+            <a:ext cx="8229600" cy="365760"/>
+          </a:xfrm>
+          <a:prstGeom prst="rect">
+            <a:avLst/>
+          </a:prstGeom>
+          <a:noFill/>
+          <a:ln/>
+        </p:spPr>
+        <p:txBody>
+          <a:bodyPr wrap="square" lIns="0" tIns="0" rIns="0" bIns="0" rtlCol="0" anchor="ctr"/>
+          <a:lstStyle/>
+          <a:p>
+            <a:pPr algn="ctr" indent="0" marL="0">
+              <a:buNone/>
+            </a:pPr>
+            <a:r>
+              <a:rPr lang="en-US" sz="1300" i="1" dirty="0">
+                <a:solidFill>
+                  <a:srgbClr val="6B7A6E"/>
+                </a:solidFill>
+                <a:latin typeface="Microsoft YaHei" pitchFamily="34" charset="0"/>
+                <a:ea typeface="Microsoft YaHei" pitchFamily="34" charset="-122"/>
+                <a:cs typeface="Microsoft YaHei" pitchFamily="34" charset="-120"/>
+              </a:rPr>
+              <a:t>不靠奇迹，不靠翻倍 —— 只要把 5 月重复六次。</a:t>
+            </a:r>
+            <a:endParaRPr lang="en-US" sz="1300" dirty="0"/>
           </a:p>
         </p:txBody>
       </p:sp>
@@ -3075,6 +3663,779 @@
 <file path=ppt/slides/slide11.xml><?xml version="1.0" encoding="utf-8"?>
 <p:sld xmlns:a="http://schemas.openxmlformats.org/drawingml/2006/main" xmlns:r="http://schemas.openxmlformats.org/officeDocument/2006/relationships" xmlns:p="http://schemas.openxmlformats.org/presentationml/2006/main">
   <p:cSld name="Slide 11">
+    <p:bg>
+      <p:bgPr>
+        <a:solidFill>
+          <a:srgbClr val="FFFFFF"/>
+        </a:solidFill>
+      </p:bgPr>
+    </p:bg>
+    <p:spTree>
+      <p:nvGrpSpPr>
+        <p:cNvPr id="1" name=""/>
+        <p:cNvGrpSpPr/>
+        <p:nvPr/>
+      </p:nvGrpSpPr>
+      <p:grpSpPr>
+        <a:xfrm>
+          <a:off x="0" y="0"/>
+          <a:ext cx="0" cy="0"/>
+          <a:chOff x="0" y="0"/>
+          <a:chExt cx="0" cy="0"/>
+        </a:xfrm>
+      </p:grpSpPr>
+      <p:sp>
+        <p:nvSpPr>
+          <p:cNvPr id="2" name="Text 0"/>
+          <p:cNvSpPr/>
+          <p:nvPr/>
+        </p:nvSpPr>
+        <p:spPr>
+          <a:xfrm>
+            <a:off x="457200" y="292608"/>
+            <a:ext cx="8229600" cy="640080"/>
+          </a:xfrm>
+          <a:prstGeom prst="rect">
+            <a:avLst/>
+          </a:prstGeom>
+          <a:noFill/>
+          <a:ln/>
+        </p:spPr>
+        <p:txBody>
+          <a:bodyPr wrap="square" lIns="0" tIns="0" rIns="0" bIns="0" rtlCol="0" anchor="ctr"/>
+          <a:lstStyle/>
+          <a:p>
+            <a:pPr indent="0" marL="0">
+              <a:buNone/>
+            </a:pPr>
+            <a:r>
+              <a:rPr lang="en-US" sz="2700" b="1" dirty="0">
+                <a:solidFill>
+                  <a:srgbClr val="26312A"/>
+                </a:solidFill>
+                <a:latin typeface="Microsoft YaHei" pitchFamily="34" charset="0"/>
+                <a:ea typeface="Microsoft YaHei" pitchFamily="34" charset="-122"/>
+                <a:cs typeface="Microsoft YaHei" pitchFamily="34" charset="-120"/>
+              </a:rPr>
+              <a:t>把 5 月变成每一个月：每个团队的任务</a:t>
+            </a:r>
+            <a:endParaRPr lang="en-US" sz="2700" dirty="0"/>
+          </a:p>
+        </p:txBody>
+      </p:sp>
+      <p:sp>
+        <p:nvSpPr>
+          <p:cNvPr id="3" name="Shape 1"/>
+          <p:cNvSpPr/>
+          <p:nvPr/>
+        </p:nvSpPr>
+        <p:spPr>
+          <a:xfrm>
+            <a:off x="548640" y="1143000"/>
+            <a:ext cx="475488" cy="475488"/>
+          </a:xfrm>
+          <a:prstGeom prst="ellipse">
+            <a:avLst/>
+          </a:prstGeom>
+          <a:solidFill>
+            <a:srgbClr val="F1F7EC"/>
+          </a:solidFill>
+          <a:ln/>
+        </p:spPr>
+      </p:sp>
+      <p:pic>
+        <p:nvPicPr>
+          <p:cNvPr id="4" name="Image 0" descr="preencoded.png">    </p:cNvPr>
+          <p:cNvPicPr>
+            <a:picLocks noChangeAspect="1"/>
+          </p:cNvPicPr>
+          <p:nvPr/>
+        </p:nvPicPr>
+        <p:blipFill>
+          <a:blip r:embed="rId1"/>
+          <a:stretch>
+            <a:fillRect/>
+          </a:stretch>
+        </p:blipFill>
+        <p:spPr>
+          <a:xfrm>
+            <a:off x="667512" y="1261872"/>
+            <a:ext cx="237744" cy="237744"/>
+          </a:xfrm>
+          <a:prstGeom prst="rect">
+            <a:avLst/>
+          </a:prstGeom>
+        </p:spPr>
+      </p:pic>
+      <p:sp>
+        <p:nvSpPr>
+          <p:cNvPr id="5" name="Text 2"/>
+          <p:cNvSpPr/>
+          <p:nvPr/>
+        </p:nvSpPr>
+        <p:spPr>
+          <a:xfrm>
+            <a:off x="1234440" y="1078992"/>
+            <a:ext cx="1600200" cy="603504"/>
+          </a:xfrm>
+          <a:prstGeom prst="rect">
+            <a:avLst/>
+          </a:prstGeom>
+          <a:noFill/>
+          <a:ln/>
+        </p:spPr>
+        <p:txBody>
+          <a:bodyPr wrap="square" lIns="0" tIns="0" rIns="0" bIns="0" rtlCol="0" anchor="ctr"/>
+          <a:lstStyle/>
+          <a:p>
+            <a:pPr indent="0" marL="0">
+              <a:buNone/>
+            </a:pPr>
+            <a:r>
+              <a:rPr lang="en-US" sz="1500" b="1" dirty="0">
+                <a:solidFill>
+                  <a:srgbClr val="26312A"/>
+                </a:solidFill>
+                <a:latin typeface="Microsoft YaHei" pitchFamily="34" charset="0"/>
+                <a:ea typeface="Microsoft YaHei" pitchFamily="34" charset="-122"/>
+                <a:cs typeface="Microsoft YaHei" pitchFamily="34" charset="-120"/>
+              </a:rPr>
+              <a:t>销售团队</a:t>
+            </a:r>
+            <a:endParaRPr lang="en-US" sz="1500" dirty="0"/>
+          </a:p>
+        </p:txBody>
+      </p:sp>
+      <p:sp>
+        <p:nvSpPr>
+          <p:cNvPr id="6" name="Text 3"/>
+          <p:cNvSpPr/>
+          <p:nvPr/>
+        </p:nvSpPr>
+        <p:spPr>
+          <a:xfrm>
+            <a:off x="2880360" y="1078992"/>
+            <a:ext cx="5760720" cy="603504"/>
+          </a:xfrm>
+          <a:prstGeom prst="rect">
+            <a:avLst/>
+          </a:prstGeom>
+          <a:noFill/>
+          <a:ln/>
+        </p:spPr>
+        <p:txBody>
+          <a:bodyPr wrap="square" lIns="0" tIns="0" rIns="0" bIns="0" rtlCol="0" anchor="ctr"/>
+          <a:lstStyle/>
+          <a:p>
+            <a:pPr indent="0" marL="0">
+              <a:buNone/>
+            </a:pPr>
+            <a:r>
+              <a:rPr lang="en-US" sz="1250" dirty="0">
+                <a:solidFill>
+                  <a:srgbClr val="4A554C"/>
+                </a:solidFill>
+                <a:latin typeface="Microsoft YaHei" pitchFamily="34" charset="0"/>
+                <a:ea typeface="Microsoft YaHei" pitchFamily="34" charset="-122"/>
+                <a:cs typeface="Microsoft YaHei" pitchFamily="34" charset="-120"/>
+              </a:rPr>
+              <a:t>每月 RM 550,000，主推高毛利产品，盯紧每一家门店与渠道</a:t>
+            </a:r>
+            <a:endParaRPr lang="en-US" sz="1250" dirty="0"/>
+          </a:p>
+        </p:txBody>
+      </p:sp>
+      <p:sp>
+        <p:nvSpPr>
+          <p:cNvPr id="7" name="Shape 4"/>
+          <p:cNvSpPr/>
+          <p:nvPr/>
+        </p:nvSpPr>
+        <p:spPr>
+          <a:xfrm>
+            <a:off x="1234440" y="1755648"/>
+            <a:ext cx="7406640" cy="0"/>
+          </a:xfrm>
+          <a:prstGeom prst="line">
+            <a:avLst/>
+          </a:prstGeom>
+          <a:noFill/>
+          <a:ln w="9525">
+            <a:solidFill>
+              <a:srgbClr val="E4EAE2"/>
+            </a:solidFill>
+            <a:prstDash val="solid"/>
+          </a:ln>
+        </p:spPr>
+      </p:sp>
+      <p:sp>
+        <p:nvSpPr>
+          <p:cNvPr id="8" name="Shape 5"/>
+          <p:cNvSpPr/>
+          <p:nvPr/>
+        </p:nvSpPr>
+        <p:spPr>
+          <a:xfrm>
+            <a:off x="548640" y="1892808"/>
+            <a:ext cx="475488" cy="475488"/>
+          </a:xfrm>
+          <a:prstGeom prst="ellipse">
+            <a:avLst/>
+          </a:prstGeom>
+          <a:solidFill>
+            <a:srgbClr val="F1F7EC"/>
+          </a:solidFill>
+          <a:ln/>
+        </p:spPr>
+      </p:sp>
+      <p:pic>
+        <p:nvPicPr>
+          <p:cNvPr id="9" name="Image 1" descr="preencoded.png">    </p:cNvPr>
+          <p:cNvPicPr>
+            <a:picLocks noChangeAspect="1"/>
+          </p:cNvPicPr>
+          <p:nvPr/>
+        </p:nvPicPr>
+        <p:blipFill>
+          <a:blip r:embed="rId2"/>
+          <a:stretch>
+            <a:fillRect/>
+          </a:stretch>
+        </p:blipFill>
+        <p:spPr>
+          <a:xfrm>
+            <a:off x="667512" y="2011680"/>
+            <a:ext cx="237744" cy="237744"/>
+          </a:xfrm>
+          <a:prstGeom prst="rect">
+            <a:avLst/>
+          </a:prstGeom>
+        </p:spPr>
+      </p:pic>
+      <p:sp>
+        <p:nvSpPr>
+          <p:cNvPr id="10" name="Text 6"/>
+          <p:cNvSpPr/>
+          <p:nvPr/>
+        </p:nvSpPr>
+        <p:spPr>
+          <a:xfrm>
+            <a:off x="1234440" y="1828800"/>
+            <a:ext cx="1600200" cy="603504"/>
+          </a:xfrm>
+          <a:prstGeom prst="rect">
+            <a:avLst/>
+          </a:prstGeom>
+          <a:noFill/>
+          <a:ln/>
+        </p:spPr>
+        <p:txBody>
+          <a:bodyPr wrap="square" lIns="0" tIns="0" rIns="0" bIns="0" rtlCol="0" anchor="ctr"/>
+          <a:lstStyle/>
+          <a:p>
+            <a:pPr indent="0" marL="0">
+              <a:buNone/>
+            </a:pPr>
+            <a:r>
+              <a:rPr lang="en-US" sz="1500" b="1" dirty="0">
+                <a:solidFill>
+                  <a:srgbClr val="26312A"/>
+                </a:solidFill>
+                <a:latin typeface="Microsoft YaHei" pitchFamily="34" charset="0"/>
+                <a:ea typeface="Microsoft YaHei" pitchFamily="34" charset="-122"/>
+                <a:cs typeface="Microsoft YaHei" pitchFamily="34" charset="-120"/>
+              </a:rPr>
+              <a:t>市场营销</a:t>
+            </a:r>
+            <a:endParaRPr lang="en-US" sz="1500" dirty="0"/>
+          </a:p>
+        </p:txBody>
+      </p:sp>
+      <p:sp>
+        <p:nvSpPr>
+          <p:cNvPr id="11" name="Text 7"/>
+          <p:cNvSpPr/>
+          <p:nvPr/>
+        </p:nvSpPr>
+        <p:spPr>
+          <a:xfrm>
+            <a:off x="2880360" y="1828800"/>
+            <a:ext cx="5760720" cy="603504"/>
+          </a:xfrm>
+          <a:prstGeom prst="rect">
+            <a:avLst/>
+          </a:prstGeom>
+          <a:noFill/>
+          <a:ln/>
+        </p:spPr>
+        <p:txBody>
+          <a:bodyPr wrap="square" lIns="0" tIns="0" rIns="0" bIns="0" rtlCol="0" anchor="ctr"/>
+          <a:lstStyle/>
+          <a:p>
+            <a:pPr indent="0" marL="0">
+              <a:buNone/>
+            </a:pPr>
+            <a:r>
+              <a:rPr lang="en-US" sz="1250" dirty="0">
+                <a:solidFill>
+                  <a:srgbClr val="4A554C"/>
+                </a:solidFill>
+                <a:latin typeface="Microsoft YaHei" pitchFamily="34" charset="0"/>
+                <a:ea typeface="Microsoft YaHei" pitchFamily="34" charset="-122"/>
+                <a:cs typeface="Microsoft YaHei" pitchFamily="34" charset="-120"/>
+              </a:rPr>
+              <a:t>每笔投放先小额测试、算回报 —— 对不上回报的，立刻停</a:t>
+            </a:r>
+            <a:endParaRPr lang="en-US" sz="1250" dirty="0"/>
+          </a:p>
+        </p:txBody>
+      </p:sp>
+      <p:sp>
+        <p:nvSpPr>
+          <p:cNvPr id="12" name="Shape 8"/>
+          <p:cNvSpPr/>
+          <p:nvPr/>
+        </p:nvSpPr>
+        <p:spPr>
+          <a:xfrm>
+            <a:off x="1234440" y="2505456"/>
+            <a:ext cx="7406640" cy="0"/>
+          </a:xfrm>
+          <a:prstGeom prst="line">
+            <a:avLst/>
+          </a:prstGeom>
+          <a:noFill/>
+          <a:ln w="9525">
+            <a:solidFill>
+              <a:srgbClr val="E4EAE2"/>
+            </a:solidFill>
+            <a:prstDash val="solid"/>
+          </a:ln>
+        </p:spPr>
+      </p:sp>
+      <p:sp>
+        <p:nvSpPr>
+          <p:cNvPr id="13" name="Shape 9"/>
+          <p:cNvSpPr/>
+          <p:nvPr/>
+        </p:nvSpPr>
+        <p:spPr>
+          <a:xfrm>
+            <a:off x="548640" y="2642616"/>
+            <a:ext cx="475488" cy="475488"/>
+          </a:xfrm>
+          <a:prstGeom prst="ellipse">
+            <a:avLst/>
+          </a:prstGeom>
+          <a:solidFill>
+            <a:srgbClr val="F1F7EC"/>
+          </a:solidFill>
+          <a:ln/>
+        </p:spPr>
+      </p:sp>
+      <p:pic>
+        <p:nvPicPr>
+          <p:cNvPr id="14" name="Image 2" descr="preencoded.png">    </p:cNvPr>
+          <p:cNvPicPr>
+            <a:picLocks noChangeAspect="1"/>
+          </p:cNvPicPr>
+          <p:nvPr/>
+        </p:nvPicPr>
+        <p:blipFill>
+          <a:blip r:embed="rId3"/>
+          <a:stretch>
+            <a:fillRect/>
+          </a:stretch>
+        </p:blipFill>
+        <p:spPr>
+          <a:xfrm>
+            <a:off x="667512" y="2761488"/>
+            <a:ext cx="237744" cy="237744"/>
+          </a:xfrm>
+          <a:prstGeom prst="rect">
+            <a:avLst/>
+          </a:prstGeom>
+        </p:spPr>
+      </p:pic>
+      <p:sp>
+        <p:nvSpPr>
+          <p:cNvPr id="15" name="Text 10"/>
+          <p:cNvSpPr/>
+          <p:nvPr/>
+        </p:nvSpPr>
+        <p:spPr>
+          <a:xfrm>
+            <a:off x="1234440" y="2578608"/>
+            <a:ext cx="1600200" cy="603504"/>
+          </a:xfrm>
+          <a:prstGeom prst="rect">
+            <a:avLst/>
+          </a:prstGeom>
+          <a:noFill/>
+          <a:ln/>
+        </p:spPr>
+        <p:txBody>
+          <a:bodyPr wrap="square" lIns="0" tIns="0" rIns="0" bIns="0" rtlCol="0" anchor="ctr"/>
+          <a:lstStyle/>
+          <a:p>
+            <a:pPr indent="0" marL="0">
+              <a:buNone/>
+            </a:pPr>
+            <a:r>
+              <a:rPr lang="en-US" sz="1500" b="1" dirty="0">
+                <a:solidFill>
+                  <a:srgbClr val="26312A"/>
+                </a:solidFill>
+                <a:latin typeface="Microsoft YaHei" pitchFamily="34" charset="0"/>
+                <a:ea typeface="Microsoft YaHei" pitchFamily="34" charset="-122"/>
+                <a:cs typeface="Microsoft YaHei" pitchFamily="34" charset="-120"/>
+              </a:rPr>
+              <a:t>运营与采购</a:t>
+            </a:r>
+            <a:endParaRPr lang="en-US" sz="1500" dirty="0"/>
+          </a:p>
+        </p:txBody>
+      </p:sp>
+      <p:sp>
+        <p:nvSpPr>
+          <p:cNvPr id="16" name="Text 11"/>
+          <p:cNvSpPr/>
+          <p:nvPr/>
+        </p:nvSpPr>
+        <p:spPr>
+          <a:xfrm>
+            <a:off x="2880360" y="2578608"/>
+            <a:ext cx="5760720" cy="603504"/>
+          </a:xfrm>
+          <a:prstGeom prst="rect">
+            <a:avLst/>
+          </a:prstGeom>
+          <a:noFill/>
+          <a:ln/>
+        </p:spPr>
+        <p:txBody>
+          <a:bodyPr wrap="square" lIns="0" tIns="0" rIns="0" bIns="0" rtlCol="0" anchor="ctr"/>
+          <a:lstStyle/>
+          <a:p>
+            <a:pPr indent="0" marL="0">
+              <a:buNone/>
+            </a:pPr>
+            <a:r>
+              <a:rPr lang="en-US" sz="1250" dirty="0">
+                <a:solidFill>
+                  <a:srgbClr val="4A554C"/>
+                </a:solidFill>
+                <a:latin typeface="Microsoft YaHei" pitchFamily="34" charset="0"/>
+                <a:ea typeface="Microsoft YaHei" pitchFamily="34" charset="-122"/>
+                <a:cs typeface="Microsoft YaHei" pitchFamily="34" charset="-120"/>
+              </a:rPr>
+              <a:t>库存天数压到 90 天：先卖完现有库存，再谈进货和新品</a:t>
+            </a:r>
+            <a:endParaRPr lang="en-US" sz="1250" dirty="0"/>
+          </a:p>
+        </p:txBody>
+      </p:sp>
+      <p:sp>
+        <p:nvSpPr>
+          <p:cNvPr id="17" name="Shape 12"/>
+          <p:cNvSpPr/>
+          <p:nvPr/>
+        </p:nvSpPr>
+        <p:spPr>
+          <a:xfrm>
+            <a:off x="1234440" y="3255264"/>
+            <a:ext cx="7406640" cy="0"/>
+          </a:xfrm>
+          <a:prstGeom prst="line">
+            <a:avLst/>
+          </a:prstGeom>
+          <a:noFill/>
+          <a:ln w="9525">
+            <a:solidFill>
+              <a:srgbClr val="E4EAE2"/>
+            </a:solidFill>
+            <a:prstDash val="solid"/>
+          </a:ln>
+        </p:spPr>
+      </p:sp>
+      <p:sp>
+        <p:nvSpPr>
+          <p:cNvPr id="18" name="Shape 13"/>
+          <p:cNvSpPr/>
+          <p:nvPr/>
+        </p:nvSpPr>
+        <p:spPr>
+          <a:xfrm>
+            <a:off x="548640" y="3392424"/>
+            <a:ext cx="475488" cy="475488"/>
+          </a:xfrm>
+          <a:prstGeom prst="ellipse">
+            <a:avLst/>
+          </a:prstGeom>
+          <a:solidFill>
+            <a:srgbClr val="F1F7EC"/>
+          </a:solidFill>
+          <a:ln/>
+        </p:spPr>
+      </p:sp>
+      <p:pic>
+        <p:nvPicPr>
+          <p:cNvPr id="19" name="Image 3" descr="preencoded.png">    </p:cNvPr>
+          <p:cNvPicPr>
+            <a:picLocks noChangeAspect="1"/>
+          </p:cNvPicPr>
+          <p:nvPr/>
+        </p:nvPicPr>
+        <p:blipFill>
+          <a:blip r:embed="rId4"/>
+          <a:stretch>
+            <a:fillRect/>
+          </a:stretch>
+        </p:blipFill>
+        <p:spPr>
+          <a:xfrm>
+            <a:off x="667512" y="3511296"/>
+            <a:ext cx="237744" cy="237744"/>
+          </a:xfrm>
+          <a:prstGeom prst="rect">
+            <a:avLst/>
+          </a:prstGeom>
+        </p:spPr>
+      </p:pic>
+      <p:sp>
+        <p:nvSpPr>
+          <p:cNvPr id="20" name="Text 14"/>
+          <p:cNvSpPr/>
+          <p:nvPr/>
+        </p:nvSpPr>
+        <p:spPr>
+          <a:xfrm>
+            <a:off x="1234440" y="3328416"/>
+            <a:ext cx="1600200" cy="603504"/>
+          </a:xfrm>
+          <a:prstGeom prst="rect">
+            <a:avLst/>
+          </a:prstGeom>
+          <a:noFill/>
+          <a:ln/>
+        </p:spPr>
+        <p:txBody>
+          <a:bodyPr wrap="square" lIns="0" tIns="0" rIns="0" bIns="0" rtlCol="0" anchor="ctr"/>
+          <a:lstStyle/>
+          <a:p>
+            <a:pPr indent="0" marL="0">
+              <a:buNone/>
+            </a:pPr>
+            <a:r>
+              <a:rPr lang="en-US" sz="1500" b="1" dirty="0">
+                <a:solidFill>
+                  <a:srgbClr val="26312A"/>
+                </a:solidFill>
+                <a:latin typeface="Microsoft YaHei" pitchFamily="34" charset="0"/>
+                <a:ea typeface="Microsoft YaHei" pitchFamily="34" charset="-122"/>
+                <a:cs typeface="Microsoft YaHei" pitchFamily="34" charset="-120"/>
+              </a:rPr>
+              <a:t>财务</a:t>
+            </a:r>
+            <a:endParaRPr lang="en-US" sz="1500" dirty="0"/>
+          </a:p>
+        </p:txBody>
+      </p:sp>
+      <p:sp>
+        <p:nvSpPr>
+          <p:cNvPr id="21" name="Text 15"/>
+          <p:cNvSpPr/>
+          <p:nvPr/>
+        </p:nvSpPr>
+        <p:spPr>
+          <a:xfrm>
+            <a:off x="2880360" y="3328416"/>
+            <a:ext cx="5760720" cy="603504"/>
+          </a:xfrm>
+          <a:prstGeom prst="rect">
+            <a:avLst/>
+          </a:prstGeom>
+          <a:noFill/>
+          <a:ln/>
+        </p:spPr>
+        <p:txBody>
+          <a:bodyPr wrap="square" lIns="0" tIns="0" rIns="0" bIns="0" rtlCol="0" anchor="ctr"/>
+          <a:lstStyle/>
+          <a:p>
+            <a:pPr indent="0" marL="0">
+              <a:buNone/>
+            </a:pPr>
+            <a:r>
+              <a:rPr lang="en-US" sz="1250" dirty="0">
+                <a:solidFill>
+                  <a:srgbClr val="4A554C"/>
+                </a:solidFill>
+                <a:latin typeface="Microsoft YaHei" pitchFamily="34" charset="0"/>
+                <a:ea typeface="Microsoft YaHei" pitchFamily="34" charset="-122"/>
+                <a:cs typeface="Microsoft YaHei" pitchFamily="34" charset="-120"/>
+              </a:rPr>
+              <a:t>守住每月 RM 220,000 费用红线，三个数字每月向全员公开</a:t>
+            </a:r>
+            <a:endParaRPr lang="en-US" sz="1250" dirty="0"/>
+          </a:p>
+        </p:txBody>
+      </p:sp>
+      <p:sp>
+        <p:nvSpPr>
+          <p:cNvPr id="22" name="Shape 16"/>
+          <p:cNvSpPr/>
+          <p:nvPr/>
+        </p:nvSpPr>
+        <p:spPr>
+          <a:xfrm>
+            <a:off x="1234440" y="4005072"/>
+            <a:ext cx="7406640" cy="0"/>
+          </a:xfrm>
+          <a:prstGeom prst="line">
+            <a:avLst/>
+          </a:prstGeom>
+          <a:noFill/>
+          <a:ln w="9525">
+            <a:solidFill>
+              <a:srgbClr val="E4EAE2"/>
+            </a:solidFill>
+            <a:prstDash val="solid"/>
+          </a:ln>
+        </p:spPr>
+      </p:sp>
+      <p:sp>
+        <p:nvSpPr>
+          <p:cNvPr id="23" name="Shape 17"/>
+          <p:cNvSpPr/>
+          <p:nvPr/>
+        </p:nvSpPr>
+        <p:spPr>
+          <a:xfrm>
+            <a:off x="548640" y="4142232"/>
+            <a:ext cx="475488" cy="475488"/>
+          </a:xfrm>
+          <a:prstGeom prst="ellipse">
+            <a:avLst/>
+          </a:prstGeom>
+          <a:solidFill>
+            <a:srgbClr val="F1F7EC"/>
+          </a:solidFill>
+          <a:ln/>
+        </p:spPr>
+      </p:sp>
+      <p:pic>
+        <p:nvPicPr>
+          <p:cNvPr id="24" name="Image 4" descr="preencoded.png">    </p:cNvPr>
+          <p:cNvPicPr>
+            <a:picLocks noChangeAspect="1"/>
+          </p:cNvPicPr>
+          <p:nvPr/>
+        </p:nvPicPr>
+        <p:blipFill>
+          <a:blip r:embed="rId5"/>
+          <a:stretch>
+            <a:fillRect/>
+          </a:stretch>
+        </p:blipFill>
+        <p:spPr>
+          <a:xfrm>
+            <a:off x="667512" y="4261104"/>
+            <a:ext cx="237744" cy="237744"/>
+          </a:xfrm>
+          <a:prstGeom prst="rect">
+            <a:avLst/>
+          </a:prstGeom>
+        </p:spPr>
+      </p:pic>
+      <p:sp>
+        <p:nvSpPr>
+          <p:cNvPr id="25" name="Text 18"/>
+          <p:cNvSpPr/>
+          <p:nvPr/>
+        </p:nvSpPr>
+        <p:spPr>
+          <a:xfrm>
+            <a:off x="1234440" y="4078224"/>
+            <a:ext cx="1600200" cy="603504"/>
+          </a:xfrm>
+          <a:prstGeom prst="rect">
+            <a:avLst/>
+          </a:prstGeom>
+          <a:noFill/>
+          <a:ln/>
+        </p:spPr>
+        <p:txBody>
+          <a:bodyPr wrap="square" lIns="0" tIns="0" rIns="0" bIns="0" rtlCol="0" anchor="ctr"/>
+          <a:lstStyle/>
+          <a:p>
+            <a:pPr indent="0" marL="0">
+              <a:buNone/>
+            </a:pPr>
+            <a:r>
+              <a:rPr lang="en-US" sz="1500" b="1" dirty="0">
+                <a:solidFill>
+                  <a:srgbClr val="26312A"/>
+                </a:solidFill>
+                <a:latin typeface="Microsoft YaHei" pitchFamily="34" charset="0"/>
+                <a:ea typeface="Microsoft YaHei" pitchFamily="34" charset="-122"/>
+                <a:cs typeface="Microsoft YaHei" pitchFamily="34" charset="-120"/>
+              </a:rPr>
+              <a:t>每一个人</a:t>
+            </a:r>
+            <a:endParaRPr lang="en-US" sz="1500" dirty="0"/>
+          </a:p>
+        </p:txBody>
+      </p:sp>
+      <p:sp>
+        <p:nvSpPr>
+          <p:cNvPr id="26" name="Text 19"/>
+          <p:cNvSpPr/>
+          <p:nvPr/>
+        </p:nvSpPr>
+        <p:spPr>
+          <a:xfrm>
+            <a:off x="2880360" y="4078224"/>
+            <a:ext cx="5760720" cy="603504"/>
+          </a:xfrm>
+          <a:prstGeom prst="rect">
+            <a:avLst/>
+          </a:prstGeom>
+          <a:noFill/>
+          <a:ln/>
+        </p:spPr>
+        <p:txBody>
+          <a:bodyPr wrap="square" lIns="0" tIns="0" rIns="0" bIns="0" rtlCol="0" anchor="ctr"/>
+          <a:lstStyle/>
+          <a:p>
+            <a:pPr indent="0" marL="0">
+              <a:buNone/>
+            </a:pPr>
+            <a:r>
+              <a:rPr lang="en-US" sz="1250" dirty="0">
+                <a:solidFill>
+                  <a:srgbClr val="4A554C"/>
+                </a:solidFill>
+                <a:latin typeface="Microsoft YaHei" pitchFamily="34" charset="0"/>
+                <a:ea typeface="Microsoft YaHei" pitchFamily="34" charset="-122"/>
+                <a:cs typeface="Microsoft YaHei" pitchFamily="34" charset="-120"/>
+              </a:rPr>
+              <a:t>花每一块钱之前先问：这能帮我们多卖多少？</a:t>
+            </a:r>
+            <a:endParaRPr lang="en-US" sz="1250" dirty="0"/>
+          </a:p>
+        </p:txBody>
+      </p:sp>
+    </p:spTree>
+  </p:cSld>
+  <p:clrMapOvr>
+    <a:masterClrMapping/>
+  </p:clrMapOvr>
+</p:sld>
+</file>
+
+<file path=ppt/slides/slide12.xml><?xml version="1.0" encoding="utf-8"?>
+<p:sld xmlns:a="http://schemas.openxmlformats.org/drawingml/2006/main" xmlns:r="http://schemas.openxmlformats.org/officeDocument/2006/relationships" xmlns:p="http://schemas.openxmlformats.org/presentationml/2006/main">
+  <p:cSld name="Slide 12">
     <p:bg>
       <p:bgPr>
         <a:solidFill>
@@ -4373,7 +5734,7 @@
                 <a:ea typeface="Microsoft YaHei" pitchFamily="34" charset="-122"/>
                 <a:cs typeface="Microsoft YaHei" pitchFamily="34" charset="-120"/>
               </a:rPr>
-              <a:t>RM 450,884 亏在哪里？三个原因</a:t>
+              <a:t>钱从哪里来：三大业务板块（1-6 月）</a:t>
             </a:r>
             <a:endParaRPr lang="en-US" sz="2700" dirty="0"/>
           </a:p>
@@ -4387,16 +5748,16 @@
         </p:nvSpPr>
         <p:spPr>
           <a:xfrm>
-            <a:off x="457200" y="1188720"/>
-            <a:ext cx="8229600" cy="987552"/>
+            <a:off x="457200" y="1143000"/>
+            <a:ext cx="3931920" cy="1024128"/>
           </a:xfrm>
           <a:prstGeom prst="roundRect">
             <a:avLst>
-              <a:gd name="adj" fmla="val 7407"/>
+              <a:gd name="adj" fmla="val 7143"/>
             </a:avLst>
           </a:prstGeom>
           <a:solidFill>
-            <a:srgbClr val="FBEFEE"/>
+            <a:srgbClr val="F1F7EC"/>
           </a:solidFill>
           <a:ln/>
           <a:effectLst>
@@ -4416,110 +5777,8 @@
         </p:nvSpPr>
         <p:spPr>
           <a:xfrm>
-            <a:off x="685800" y="1408176"/>
-            <a:ext cx="548640" cy="548640"/>
-          </a:xfrm>
-          <a:prstGeom prst="rect">
-            <a:avLst/>
-          </a:prstGeom>
-          <a:noFill/>
-          <a:ln/>
-        </p:spPr>
-        <p:txBody>
-          <a:bodyPr wrap="square" lIns="0" tIns="0" rIns="0" bIns="0" rtlCol="0" anchor="ctr"/>
-          <a:lstStyle/>
-          <a:p>
-            <a:pPr algn="ctr" indent="0" marL="0">
-              <a:buNone/>
-            </a:pPr>
-            <a:r>
-              <a:rPr lang="en-US" sz="3000" b="1" dirty="0">
-                <a:solidFill>
-                  <a:srgbClr val="C2453A"/>
-                </a:solidFill>
-                <a:latin typeface="Microsoft YaHei" pitchFamily="34" charset="0"/>
-                <a:ea typeface="Microsoft YaHei" pitchFamily="34" charset="-122"/>
-                <a:cs typeface="Microsoft YaHei" pitchFamily="34" charset="-120"/>
-              </a:rPr>
-              <a:t>1</a:t>
-            </a:r>
-            <a:endParaRPr lang="en-US" sz="3000" dirty="0"/>
-          </a:p>
-        </p:txBody>
-      </p:sp>
-      <p:pic>
-        <p:nvPicPr>
-          <p:cNvPr id="5" name="Image 0" descr="preencoded.png">    </p:cNvPr>
-          <p:cNvPicPr>
-            <a:picLocks noChangeAspect="1"/>
-          </p:cNvPicPr>
-          <p:nvPr/>
-        </p:nvPicPr>
-        <p:blipFill>
-          <a:blip r:embed="rId1"/>
-          <a:stretch>
-            <a:fillRect/>
-          </a:stretch>
-        </p:blipFill>
-        <p:spPr>
-          <a:xfrm>
-            <a:off x="1417320" y="1517904"/>
-            <a:ext cx="329184" cy="329184"/>
-          </a:xfrm>
-          <a:prstGeom prst="rect">
-            <a:avLst/>
-          </a:prstGeom>
-        </p:spPr>
-      </p:pic>
-      <p:sp>
-        <p:nvSpPr>
-          <p:cNvPr id="6" name="Text 3"/>
-          <p:cNvSpPr/>
-          <p:nvPr/>
-        </p:nvSpPr>
-        <p:spPr>
-          <a:xfrm>
-            <a:off x="1965960" y="1298448"/>
-            <a:ext cx="6492240" cy="365760"/>
-          </a:xfrm>
-          <a:prstGeom prst="rect">
-            <a:avLst/>
-          </a:prstGeom>
-          <a:noFill/>
-          <a:ln/>
-        </p:spPr>
-        <p:txBody>
-          <a:bodyPr wrap="square" lIns="0" tIns="0" rIns="0" bIns="0" rtlCol="0" anchor="ctr"/>
-          <a:lstStyle/>
-          <a:p>
-            <a:pPr indent="0" marL="0">
-              <a:buNone/>
-            </a:pPr>
-            <a:r>
-              <a:rPr lang="en-US" sz="1550" b="1" dirty="0">
-                <a:solidFill>
-                  <a:srgbClr val="26312A"/>
-                </a:solidFill>
-                <a:latin typeface="Microsoft YaHei" pitchFamily="34" charset="0"/>
-                <a:ea typeface="Microsoft YaHei" pitchFamily="34" charset="-122"/>
-                <a:cs typeface="Microsoft YaHei" pitchFamily="34" charset="-120"/>
-              </a:rPr>
-              <a:t>营业费用过高</a:t>
-            </a:r>
-            <a:endParaRPr lang="en-US" sz="1550" dirty="0"/>
-          </a:p>
-        </p:txBody>
-      </p:sp>
-      <p:sp>
-        <p:nvSpPr>
-          <p:cNvPr id="7" name="Text 4"/>
-          <p:cNvSpPr/>
-          <p:nvPr/>
-        </p:nvSpPr>
-        <p:spPr>
-          <a:xfrm>
-            <a:off x="1965960" y="1645920"/>
-            <a:ext cx="6492240" cy="475488"/>
+            <a:off x="685800" y="1252728"/>
+            <a:ext cx="3566160" cy="320040"/>
           </a:xfrm>
           <a:prstGeom prst="rect">
             <a:avLst/>
@@ -4537,36 +5796,89 @@
             <a:r>
               <a:rPr lang="en-US" sz="1150" dirty="0">
                 <a:solidFill>
+                  <a:srgbClr val="6B7A6E"/>
+                </a:solidFill>
+                <a:latin typeface="Microsoft YaHei" pitchFamily="34" charset="0"/>
+                <a:ea typeface="Microsoft YaHei" pitchFamily="34" charset="-122"/>
+                <a:cs typeface="Microsoft YaHei" pitchFamily="34" charset="-120"/>
+              </a:rPr>
+              <a:t>马来西亚线下（MT + GT）</a:t>
+            </a:r>
+            <a:endParaRPr lang="en-US" sz="1150" dirty="0"/>
+          </a:p>
+        </p:txBody>
+      </p:sp>
+      <p:sp>
+        <p:nvSpPr>
+          <p:cNvPr id="5" name="Text 3"/>
+          <p:cNvSpPr/>
+          <p:nvPr/>
+        </p:nvSpPr>
+        <p:spPr>
+          <a:xfrm>
+            <a:off x="685800" y="1572768"/>
+            <a:ext cx="3566160" cy="502920"/>
+          </a:xfrm>
+          <a:prstGeom prst="rect">
+            <a:avLst/>
+          </a:prstGeom>
+          <a:noFill/>
+          <a:ln/>
+        </p:spPr>
+        <p:txBody>
+          <a:bodyPr wrap="square" lIns="0" tIns="0" rIns="0" bIns="0" rtlCol="0" anchor="ctr"/>
+          <a:lstStyle/>
+          <a:p>
+            <a:pPr indent="0" marL="0">
+              <a:buNone/>
+            </a:pPr>
+            <a:r>
+              <a:rPr lang="en-US" sz="2000" b="1" dirty="0">
+                <a:solidFill>
+                  <a:srgbClr val="2C6E31"/>
+                </a:solidFill>
+                <a:latin typeface="Microsoft YaHei" pitchFamily="34" charset="0"/>
+                <a:ea typeface="Microsoft YaHei" pitchFamily="34" charset="-122"/>
+                <a:cs typeface="Microsoft YaHei" pitchFamily="34" charset="-120"/>
+              </a:rPr>
+              <a:t>RM 2,163,152  </a:t>
+            </a:r>
+            <a:pPr indent="0" marL="0">
+              <a:buNone/>
+            </a:pPr>
+            <a:r>
+              <a:rPr lang="en-US" sz="1050" dirty="0">
+                <a:solidFill>
                   <a:srgbClr val="4A554C"/>
                 </a:solidFill>
                 <a:latin typeface="Microsoft YaHei" pitchFamily="34" charset="0"/>
                 <a:ea typeface="Microsoft YaHei" pitchFamily="34" charset="-122"/>
                 <a:cs typeface="Microsoft YaHei" pitchFamily="34" charset="-120"/>
               </a:rPr>
-              <a:t>月均费用约 RM 261,000，月均毛利只有约 RM 187,000 —— 毛利养不起费用，先天就亏。</a:t>
-            </a:r>
-            <a:endParaRPr lang="en-US" sz="1150" dirty="0"/>
-          </a:p>
-        </p:txBody>
-      </p:sp>
-      <p:sp>
-        <p:nvSpPr>
-          <p:cNvPr id="8" name="Shape 5"/>
-          <p:cNvSpPr/>
-          <p:nvPr/>
-        </p:nvSpPr>
-        <p:spPr>
-          <a:xfrm>
-            <a:off x="457200" y="2359152"/>
-            <a:ext cx="8229600" cy="987552"/>
+              <a:t>约占 72% —— 基本盘</a:t>
+            </a:r>
+            <a:endParaRPr lang="en-US" sz="2000" dirty="0"/>
+          </a:p>
+        </p:txBody>
+      </p:sp>
+      <p:sp>
+        <p:nvSpPr>
+          <p:cNvPr id="6" name="Shape 4"/>
+          <p:cNvSpPr/>
+          <p:nvPr/>
+        </p:nvSpPr>
+        <p:spPr>
+          <a:xfrm>
+            <a:off x="457200" y="2350008"/>
+            <a:ext cx="3931920" cy="1024128"/>
           </a:xfrm>
           <a:prstGeom prst="roundRect">
             <a:avLst>
-              <a:gd name="adj" fmla="val 7407"/>
+              <a:gd name="adj" fmla="val 7143"/>
             </a:avLst>
           </a:prstGeom>
           <a:solidFill>
-            <a:srgbClr val="FBEFEE"/>
+            <a:srgbClr val="F1F7EC"/>
           </a:solidFill>
           <a:ln/>
           <a:effectLst>
@@ -4580,116 +5892,14 @@
       </p:sp>
       <p:sp>
         <p:nvSpPr>
-          <p:cNvPr id="9" name="Text 6"/>
-          <p:cNvSpPr/>
-          <p:nvPr/>
-        </p:nvSpPr>
-        <p:spPr>
-          <a:xfrm>
-            <a:off x="685800" y="2578608"/>
-            <a:ext cx="548640" cy="548640"/>
-          </a:xfrm>
-          <a:prstGeom prst="rect">
-            <a:avLst/>
-          </a:prstGeom>
-          <a:noFill/>
-          <a:ln/>
-        </p:spPr>
-        <p:txBody>
-          <a:bodyPr wrap="square" lIns="0" tIns="0" rIns="0" bIns="0" rtlCol="0" anchor="ctr"/>
-          <a:lstStyle/>
-          <a:p>
-            <a:pPr algn="ctr" indent="0" marL="0">
-              <a:buNone/>
-            </a:pPr>
-            <a:r>
-              <a:rPr lang="en-US" sz="3000" b="1" dirty="0">
-                <a:solidFill>
-                  <a:srgbClr val="C2453A"/>
-                </a:solidFill>
-                <a:latin typeface="Microsoft YaHei" pitchFamily="34" charset="0"/>
-                <a:ea typeface="Microsoft YaHei" pitchFamily="34" charset="-122"/>
-                <a:cs typeface="Microsoft YaHei" pitchFamily="34" charset="-120"/>
-              </a:rPr>
-              <a:t>2</a:t>
-            </a:r>
-            <a:endParaRPr lang="en-US" sz="3000" dirty="0"/>
-          </a:p>
-        </p:txBody>
-      </p:sp>
-      <p:pic>
-        <p:nvPicPr>
-          <p:cNvPr id="10" name="Image 1" descr="preencoded.png">    </p:cNvPr>
-          <p:cNvPicPr>
-            <a:picLocks noChangeAspect="1"/>
-          </p:cNvPicPr>
-          <p:nvPr/>
-        </p:nvPicPr>
-        <p:blipFill>
-          <a:blip r:embed="rId2"/>
-          <a:stretch>
-            <a:fillRect/>
-          </a:stretch>
-        </p:blipFill>
-        <p:spPr>
-          <a:xfrm>
-            <a:off x="1417320" y="2688336"/>
-            <a:ext cx="329184" cy="329184"/>
-          </a:xfrm>
-          <a:prstGeom prst="rect">
-            <a:avLst/>
-          </a:prstGeom>
-        </p:spPr>
-      </p:pic>
-      <p:sp>
-        <p:nvSpPr>
-          <p:cNvPr id="11" name="Text 7"/>
-          <p:cNvSpPr/>
-          <p:nvPr/>
-        </p:nvSpPr>
-        <p:spPr>
-          <a:xfrm>
-            <a:off x="1965960" y="2468880"/>
-            <a:ext cx="6492240" cy="365760"/>
-          </a:xfrm>
-          <a:prstGeom prst="rect">
-            <a:avLst/>
-          </a:prstGeom>
-          <a:noFill/>
-          <a:ln/>
-        </p:spPr>
-        <p:txBody>
-          <a:bodyPr wrap="square" lIns="0" tIns="0" rIns="0" bIns="0" rtlCol="0" anchor="ctr"/>
-          <a:lstStyle/>
-          <a:p>
-            <a:pPr indent="0" marL="0">
-              <a:buNone/>
-            </a:pPr>
-            <a:r>
-              <a:rPr lang="en-US" sz="1550" b="1" dirty="0">
-                <a:solidFill>
-                  <a:srgbClr val="26312A"/>
-                </a:solidFill>
-                <a:latin typeface="Microsoft YaHei" pitchFamily="34" charset="0"/>
-                <a:ea typeface="Microsoft YaHei" pitchFamily="34" charset="-122"/>
-                <a:cs typeface="Microsoft YaHei" pitchFamily="34" charset="-120"/>
-              </a:rPr>
-              <a:t>营销花费没对准回报</a:t>
-            </a:r>
-            <a:endParaRPr lang="en-US" sz="1550" dirty="0"/>
-          </a:p>
-        </p:txBody>
-      </p:sp>
-      <p:sp>
-        <p:nvSpPr>
-          <p:cNvPr id="12" name="Text 8"/>
-          <p:cNvSpPr/>
-          <p:nvPr/>
-        </p:nvSpPr>
-        <p:spPr>
-          <a:xfrm>
-            <a:off x="1965960" y="2816352"/>
-            <a:ext cx="6492240" cy="475488"/>
+          <p:cNvPr id="7" name="Text 5"/>
+          <p:cNvSpPr/>
+          <p:nvPr/>
+        </p:nvSpPr>
+        <p:spPr>
+          <a:xfrm>
+            <a:off x="685800" y="2459736"/>
+            <a:ext cx="3566160" cy="320040"/>
           </a:xfrm>
           <a:prstGeom prst="rect">
             <a:avLst/>
@@ -4707,36 +5917,89 @@
             <a:r>
               <a:rPr lang="en-US" sz="1150" dirty="0">
                 <a:solidFill>
+                  <a:srgbClr val="6B7A6E"/>
+                </a:solidFill>
+                <a:latin typeface="Microsoft YaHei" pitchFamily="34" charset="0"/>
+                <a:ea typeface="Microsoft YaHei" pitchFamily="34" charset="-122"/>
+                <a:cs typeface="Microsoft YaHei" pitchFamily="34" charset="-120"/>
+              </a:rPr>
+              <a:t>线上电商（Shopee / TikTok / Lazada / 自建）</a:t>
+            </a:r>
+            <a:endParaRPr lang="en-US" sz="1150" dirty="0"/>
+          </a:p>
+        </p:txBody>
+      </p:sp>
+      <p:sp>
+        <p:nvSpPr>
+          <p:cNvPr id="8" name="Text 6"/>
+          <p:cNvSpPr/>
+          <p:nvPr/>
+        </p:nvSpPr>
+        <p:spPr>
+          <a:xfrm>
+            <a:off x="685800" y="2779776"/>
+            <a:ext cx="3566160" cy="502920"/>
+          </a:xfrm>
+          <a:prstGeom prst="rect">
+            <a:avLst/>
+          </a:prstGeom>
+          <a:noFill/>
+          <a:ln/>
+        </p:spPr>
+        <p:txBody>
+          <a:bodyPr wrap="square" lIns="0" tIns="0" rIns="0" bIns="0" rtlCol="0" anchor="ctr"/>
+          <a:lstStyle/>
+          <a:p>
+            <a:pPr indent="0" marL="0">
+              <a:buNone/>
+            </a:pPr>
+            <a:r>
+              <a:rPr lang="en-US" sz="2000" b="1" dirty="0">
+                <a:solidFill>
+                  <a:srgbClr val="6B8F3C"/>
+                </a:solidFill>
+                <a:latin typeface="Microsoft YaHei" pitchFamily="34" charset="0"/>
+                <a:ea typeface="Microsoft YaHei" pitchFamily="34" charset="-122"/>
+                <a:cs typeface="Microsoft YaHei" pitchFamily="34" charset="-120"/>
+              </a:rPr>
+              <a:t>RM 741,416  </a:t>
+            </a:r>
+            <a:pPr indent="0" marL="0">
+              <a:buNone/>
+            </a:pPr>
+            <a:r>
+              <a:rPr lang="en-US" sz="1050" dirty="0">
+                <a:solidFill>
                   <a:srgbClr val="4A554C"/>
                 </a:solidFill>
                 <a:latin typeface="Microsoft YaHei" pitchFamily="34" charset="0"/>
                 <a:ea typeface="Microsoft YaHei" pitchFamily="34" charset="-122"/>
                 <a:cs typeface="Microsoft YaHei" pitchFamily="34" charset="-120"/>
               </a:rPr>
-              <a:t>投放分散、凭感觉加码，花出去的钱没有算清楚带回多少销售 —— 钱花了，销量没跟上。</a:t>
-            </a:r>
-            <a:endParaRPr lang="en-US" sz="1150" dirty="0"/>
-          </a:p>
-        </p:txBody>
-      </p:sp>
-      <p:sp>
-        <p:nvSpPr>
-          <p:cNvPr id="13" name="Shape 9"/>
-          <p:cNvSpPr/>
-          <p:nvPr/>
-        </p:nvSpPr>
-        <p:spPr>
-          <a:xfrm>
-            <a:off x="457200" y="3529584"/>
-            <a:ext cx="8229600" cy="987552"/>
+              <a:t>约占 25% —— 第二增长引擎</a:t>
+            </a:r>
+            <a:endParaRPr lang="en-US" sz="2000" dirty="0"/>
+          </a:p>
+        </p:txBody>
+      </p:sp>
+      <p:sp>
+        <p:nvSpPr>
+          <p:cNvPr id="9" name="Shape 7"/>
+          <p:cNvSpPr/>
+          <p:nvPr/>
+        </p:nvSpPr>
+        <p:spPr>
+          <a:xfrm>
+            <a:off x="457200" y="3557016"/>
+            <a:ext cx="3931920" cy="1024128"/>
           </a:xfrm>
           <a:prstGeom prst="roundRect">
             <a:avLst>
-              <a:gd name="adj" fmla="val 7407"/>
+              <a:gd name="adj" fmla="val 7143"/>
             </a:avLst>
           </a:prstGeom>
           <a:solidFill>
-            <a:srgbClr val="FBEFEE"/>
+            <a:srgbClr val="F1F7EC"/>
           </a:solidFill>
           <a:ln/>
           <a:effectLst>
@@ -4750,93 +6013,122 @@
       </p:sp>
       <p:sp>
         <p:nvSpPr>
-          <p:cNvPr id="14" name="Text 10"/>
-          <p:cNvSpPr/>
-          <p:nvPr/>
-        </p:nvSpPr>
-        <p:spPr>
-          <a:xfrm>
-            <a:off x="685800" y="3749040"/>
-            <a:ext cx="548640" cy="548640"/>
-          </a:xfrm>
-          <a:prstGeom prst="rect">
-            <a:avLst/>
-          </a:prstGeom>
-          <a:noFill/>
-          <a:ln/>
-        </p:spPr>
-        <p:txBody>
-          <a:bodyPr wrap="square" lIns="0" tIns="0" rIns="0" bIns="0" rtlCol="0" anchor="ctr"/>
-          <a:lstStyle/>
-          <a:p>
-            <a:pPr algn="ctr" indent="0" marL="0">
-              <a:buNone/>
-            </a:pPr>
-            <a:r>
-              <a:rPr lang="en-US" sz="3000" b="1" dirty="0">
-                <a:solidFill>
-                  <a:srgbClr val="C2453A"/>
-                </a:solidFill>
-                <a:latin typeface="Microsoft YaHei" pitchFamily="34" charset="0"/>
-                <a:ea typeface="Microsoft YaHei" pitchFamily="34" charset="-122"/>
-                <a:cs typeface="Microsoft YaHei" pitchFamily="34" charset="-120"/>
-              </a:rPr>
-              <a:t>3</a:t>
-            </a:r>
-            <a:endParaRPr lang="en-US" sz="3000" dirty="0"/>
-          </a:p>
-        </p:txBody>
-      </p:sp>
-      <p:pic>
-        <p:nvPicPr>
-          <p:cNvPr id="15" name="Image 2" descr="preencoded.png">    </p:cNvPr>
-          <p:cNvPicPr>
-            <a:picLocks noChangeAspect="1"/>
-          </p:cNvPicPr>
-          <p:nvPr/>
-        </p:nvPicPr>
-        <p:blipFill>
-          <a:blip r:embed="rId3"/>
-          <a:stretch>
-            <a:fillRect/>
-          </a:stretch>
-        </p:blipFill>
-        <p:spPr>
-          <a:xfrm>
-            <a:off x="1417320" y="3858768"/>
-            <a:ext cx="329184" cy="329184"/>
-          </a:xfrm>
-          <a:prstGeom prst="rect">
-            <a:avLst/>
-          </a:prstGeom>
-        </p:spPr>
-      </p:pic>
-      <p:sp>
-        <p:nvSpPr>
-          <p:cNvPr id="16" name="Text 11"/>
-          <p:cNvSpPr/>
-          <p:nvPr/>
-        </p:nvSpPr>
-        <p:spPr>
-          <a:xfrm>
-            <a:off x="1965960" y="3639312"/>
-            <a:ext cx="6492240" cy="365760"/>
-          </a:xfrm>
-          <a:prstGeom prst="rect">
-            <a:avLst/>
-          </a:prstGeom>
-          <a:noFill/>
-          <a:ln/>
-        </p:spPr>
-        <p:txBody>
-          <a:bodyPr wrap="square" lIns="0" tIns="0" rIns="0" bIns="0" rtlCol="0" anchor="ctr"/>
-          <a:lstStyle/>
-          <a:p>
-            <a:pPr indent="0" marL="0">
-              <a:buNone/>
-            </a:pPr>
-            <a:r>
-              <a:rPr lang="en-US" sz="1550" b="1" dirty="0">
+          <p:cNvPr id="10" name="Text 8"/>
+          <p:cNvSpPr/>
+          <p:nvPr/>
+        </p:nvSpPr>
+        <p:spPr>
+          <a:xfrm>
+            <a:off x="685800" y="3666744"/>
+            <a:ext cx="3566160" cy="320040"/>
+          </a:xfrm>
+          <a:prstGeom prst="rect">
+            <a:avLst/>
+          </a:prstGeom>
+          <a:noFill/>
+          <a:ln/>
+        </p:spPr>
+        <p:txBody>
+          <a:bodyPr wrap="square" lIns="0" tIns="0" rIns="0" bIns="0" rtlCol="0" anchor="ctr"/>
+          <a:lstStyle/>
+          <a:p>
+            <a:pPr indent="0" marL="0">
+              <a:buNone/>
+            </a:pPr>
+            <a:r>
+              <a:rPr lang="en-US" sz="1150" dirty="0">
+                <a:solidFill>
+                  <a:srgbClr val="6B7A6E"/>
+                </a:solidFill>
+                <a:latin typeface="Microsoft YaHei" pitchFamily="34" charset="0"/>
+                <a:ea typeface="Microsoft YaHei" pitchFamily="34" charset="-122"/>
+                <a:cs typeface="Microsoft YaHei" pitchFamily="34" charset="-120"/>
+              </a:rPr>
+              <a:t>国际业务（IB）</a:t>
+            </a:r>
+            <a:endParaRPr lang="en-US" sz="1150" dirty="0"/>
+          </a:p>
+        </p:txBody>
+      </p:sp>
+      <p:sp>
+        <p:nvSpPr>
+          <p:cNvPr id="11" name="Text 9"/>
+          <p:cNvSpPr/>
+          <p:nvPr/>
+        </p:nvSpPr>
+        <p:spPr>
+          <a:xfrm>
+            <a:off x="685800" y="3986784"/>
+            <a:ext cx="3566160" cy="502920"/>
+          </a:xfrm>
+          <a:prstGeom prst="rect">
+            <a:avLst/>
+          </a:prstGeom>
+          <a:noFill/>
+          <a:ln/>
+        </p:spPr>
+        <p:txBody>
+          <a:bodyPr wrap="square" lIns="0" tIns="0" rIns="0" bIns="0" rtlCol="0" anchor="ctr"/>
+          <a:lstStyle/>
+          <a:p>
+            <a:pPr indent="0" marL="0">
+              <a:buNone/>
+            </a:pPr>
+            <a:r>
+              <a:rPr lang="en-US" sz="2000" b="1" dirty="0">
+                <a:solidFill>
+                  <a:srgbClr val="E0A93E"/>
+                </a:solidFill>
+                <a:latin typeface="Microsoft YaHei" pitchFamily="34" charset="0"/>
+                <a:ea typeface="Microsoft YaHei" pitchFamily="34" charset="-122"/>
+                <a:cs typeface="Microsoft YaHei" pitchFamily="34" charset="-120"/>
+              </a:rPr>
+              <a:t>RM 101,768  </a:t>
+            </a:r>
+            <a:pPr indent="0" marL="0">
+              <a:buNone/>
+            </a:pPr>
+            <a:r>
+              <a:rPr lang="en-US" sz="1050" dirty="0">
+                <a:solidFill>
+                  <a:srgbClr val="4A554C"/>
+                </a:solidFill>
+                <a:latin typeface="Microsoft YaHei" pitchFamily="34" charset="0"/>
+                <a:ea typeface="Microsoft YaHei" pitchFamily="34" charset="-122"/>
+                <a:cs typeface="Microsoft YaHei" pitchFamily="34" charset="-120"/>
+              </a:rPr>
+              <a:t>约占 3% —— 4 月刚起步</a:t>
+            </a:r>
+            <a:endParaRPr lang="en-US" sz="2000" dirty="0"/>
+          </a:p>
+        </p:txBody>
+      </p:sp>
+      <p:sp>
+        <p:nvSpPr>
+          <p:cNvPr id="12" name="Text 10"/>
+          <p:cNvSpPr/>
+          <p:nvPr/>
+        </p:nvSpPr>
+        <p:spPr>
+          <a:xfrm>
+            <a:off x="4754880" y="1097280"/>
+            <a:ext cx="3931920" cy="320040"/>
+          </a:xfrm>
+          <a:prstGeom prst="rect">
+            <a:avLst/>
+          </a:prstGeom>
+          <a:noFill/>
+          <a:ln/>
+        </p:spPr>
+        <p:txBody>
+          <a:bodyPr wrap="square" lIns="0" tIns="0" rIns="0" bIns="0" rtlCol="0" anchor="ctr"/>
+          <a:lstStyle/>
+          <a:p>
+            <a:pPr indent="0" marL="0">
+              <a:buNone/>
+            </a:pPr>
+            <a:r>
+              <a:rPr lang="en-US" sz="1300" b="1" dirty="0">
                 <a:solidFill>
                   <a:srgbClr val="26312A"/>
                 </a:solidFill>
@@ -4844,77 +6136,54 @@
                 <a:ea typeface="Microsoft YaHei" pitchFamily="34" charset="-122"/>
                 <a:cs typeface="Microsoft YaHei" pitchFamily="34" charset="-120"/>
               </a:rPr>
-              <a:t>库存压住太多现金</a:t>
-            </a:r>
-            <a:endParaRPr lang="en-US" sz="1550" dirty="0"/>
-          </a:p>
-        </p:txBody>
-      </p:sp>
-      <p:sp>
-        <p:nvSpPr>
-          <p:cNvPr id="17" name="Text 12"/>
-          <p:cNvSpPr/>
-          <p:nvPr/>
-        </p:nvSpPr>
-        <p:spPr>
-          <a:xfrm>
-            <a:off x="1965960" y="3986784"/>
-            <a:ext cx="6492240" cy="475488"/>
-          </a:xfrm>
-          <a:prstGeom prst="rect">
-            <a:avLst/>
-          </a:prstGeom>
-          <a:noFill/>
-          <a:ln/>
-        </p:spPr>
-        <p:txBody>
-          <a:bodyPr wrap="square" lIns="0" tIns="0" rIns="0" bIns="0" rtlCol="0" anchor="ctr"/>
-          <a:lstStyle/>
-          <a:p>
-            <a:pPr indent="0" marL="0">
-              <a:buNone/>
-            </a:pPr>
-            <a:r>
-              <a:rPr lang="en-US" sz="1150" dirty="0">
-                <a:solidFill>
-                  <a:srgbClr val="4A554C"/>
-                </a:solidFill>
-                <a:latin typeface="Microsoft YaHei" pitchFamily="34" charset="0"/>
-                <a:ea typeface="Microsoft YaHei" pitchFamily="34" charset="-122"/>
-                <a:cs typeface="Microsoft YaHei" pitchFamily="34" charset="-120"/>
-              </a:rPr>
-              <a:t>约 RM 1,065,000 的货躺在仓库，132 天才转一圈 —— 现金被冻结，公司越转越紧。</a:t>
-            </a:r>
-            <a:endParaRPr lang="en-US" sz="1150" dirty="0"/>
-          </a:p>
-        </p:txBody>
-      </p:sp>
-      <p:sp>
-        <p:nvSpPr>
-          <p:cNvPr id="18" name="Text 13"/>
+              <a:t>各板块月度销售（RM）</a:t>
+            </a:r>
+            <a:endParaRPr lang="en-US" sz="1300" dirty="0"/>
+          </a:p>
+        </p:txBody>
+      </p:sp>
+      <p:graphicFrame>
+        <p:nvGraphicFramePr>
+          <p:cNvPr id="13" name="Chart 0" descr=""/>
+          <p:cNvGraphicFramePr/>
+          <p:nvPr/>
+        </p:nvGraphicFramePr>
+        <p:xfrm>
+          <a:off x="4754880" y="1417320"/>
+          <a:ext cx="3931920" cy="3063240"/>
+        </p:xfrm>
+        <a:graphic xmlns:a="http://schemas.openxmlformats.org/drawingml/2006/main">
+          <a:graphicData uri="http://schemas.openxmlformats.org/drawingml/2006/chart">
+            <c:chart xmlns:c="http://schemas.openxmlformats.org/drawingml/2006/chart" r:id="rId1"/>
+          </a:graphicData>
+        </a:graphic>
+      </p:graphicFrame>
+      <p:sp>
+        <p:nvSpPr>
+          <p:cNvPr id="14" name="Text 11"/>
           <p:cNvSpPr/>
           <p:nvPr/>
         </p:nvSpPr>
         <p:spPr>
           <a:xfrm>
             <a:off x="457200" y="4681728"/>
-            <a:ext cx="8229600" cy="320040"/>
-          </a:xfrm>
-          <a:prstGeom prst="rect">
-            <a:avLst/>
-          </a:prstGeom>
-          <a:noFill/>
-          <a:ln/>
-        </p:spPr>
-        <p:txBody>
-          <a:bodyPr wrap="square" lIns="0" tIns="0" rIns="0" bIns="0" rtlCol="0" anchor="ctr"/>
-          <a:lstStyle/>
-          <a:p>
-            <a:pPr indent="0" marL="0">
-              <a:buNone/>
-            </a:pPr>
-            <a:r>
-              <a:rPr lang="en-US" sz="1250" i="1" dirty="0">
+            <a:ext cx="8229600" cy="365760"/>
+          </a:xfrm>
+          <a:prstGeom prst="rect">
+            <a:avLst/>
+          </a:prstGeom>
+          <a:noFill/>
+          <a:ln/>
+        </p:spPr>
+        <p:txBody>
+          <a:bodyPr wrap="square" lIns="0" tIns="0" rIns="0" bIns="0" rtlCol="0" anchor="ctr"/>
+          <a:lstStyle/>
+          <a:p>
+            <a:pPr indent="0" marL="0">
+              <a:buNone/>
+            </a:pPr>
+            <a:r>
+              <a:rPr lang="en-US" sz="1000" i="1" dirty="0">
                 <a:solidFill>
                   <a:srgbClr val="6B7A6E"/>
                 </a:solidFill>
@@ -4922,9 +6191,9 @@
                 <a:ea typeface="Microsoft YaHei" pitchFamily="34" charset="-122"/>
                 <a:cs typeface="Microsoft YaHei" pitchFamily="34" charset="-120"/>
               </a:rPr>
-              <a:t>三个原因，H2 一个一个拆掉。</a:t>
-            </a:r>
-            <a:endParaRPr lang="en-US" sz="1250" dirty="0"/>
+              <a:t>口径说明：以上为渠道运营数据（线下按 PO、线上按平台成交、国际按 IB 订单），与财务报表口径存在差异。</a:t>
+            </a:r>
+            <a:endParaRPr lang="en-US" sz="1000" dirty="0"/>
           </a:p>
         </p:txBody>
       </p:sp>
@@ -4993,7 +6262,7 @@
                 <a:ea typeface="Microsoft YaHei" pitchFamily="34" charset="-122"/>
                 <a:cs typeface="Microsoft YaHei" pitchFamily="34" charset="-120"/>
               </a:rPr>
-              <a:t>原因一：费用是能降的 —— 5 月已经证明</a:t>
+              <a:t>RM 450,884 亏在哪里？三个原因</a:t>
             </a:r>
             <a:endParaRPr lang="en-US" sz="2700" dirty="0"/>
           </a:p>
@@ -5007,12 +6276,12 @@
         </p:nvSpPr>
         <p:spPr>
           <a:xfrm>
-            <a:off x="640080" y="1280160"/>
-            <a:ext cx="3291840" cy="2286000"/>
+            <a:off x="457200" y="1188720"/>
+            <a:ext cx="8229600" cy="987552"/>
           </a:xfrm>
           <a:prstGeom prst="roundRect">
             <a:avLst>
-              <a:gd name="adj" fmla="val 3600"/>
+              <a:gd name="adj" fmla="val 7407"/>
             </a:avLst>
           </a:prstGeom>
           <a:solidFill>
@@ -5036,63 +6305,24 @@
         </p:nvSpPr>
         <p:spPr>
           <a:xfrm>
-            <a:off x="914400" y="1600200"/>
-            <a:ext cx="2743200" cy="365760"/>
-          </a:xfrm>
-          <a:prstGeom prst="rect">
-            <a:avLst/>
-          </a:prstGeom>
-          <a:noFill/>
-          <a:ln/>
-        </p:spPr>
-        <p:txBody>
-          <a:bodyPr wrap="square" lIns="0" tIns="0" rIns="0" bIns="0" rtlCol="0" anchor="ctr"/>
-          <a:lstStyle/>
-          <a:p>
-            <a:pPr indent="0" marL="0">
-              <a:buNone/>
-            </a:pPr>
-            <a:r>
-              <a:rPr lang="en-US" sz="1400" dirty="0">
-                <a:solidFill>
-                  <a:srgbClr val="6B7A6E"/>
-                </a:solidFill>
-                <a:latin typeface="Microsoft YaHei" pitchFamily="34" charset="0"/>
-                <a:ea typeface="Microsoft YaHei" pitchFamily="34" charset="-122"/>
-                <a:cs typeface="Microsoft YaHei" pitchFamily="34" charset="-120"/>
-              </a:rPr>
-              <a:t>上半年月均营业费用</a:t>
-            </a:r>
-            <a:endParaRPr lang="en-US" sz="1400" dirty="0"/>
-          </a:p>
-        </p:txBody>
-      </p:sp>
-      <p:sp>
-        <p:nvSpPr>
-          <p:cNvPr id="5" name="Text 3"/>
-          <p:cNvSpPr/>
-          <p:nvPr/>
-        </p:nvSpPr>
-        <p:spPr>
-          <a:xfrm>
-            <a:off x="914400" y="2011680"/>
-            <a:ext cx="2834640" cy="685800"/>
-          </a:xfrm>
-          <a:prstGeom prst="rect">
-            <a:avLst/>
-          </a:prstGeom>
-          <a:noFill/>
-          <a:ln/>
-        </p:spPr>
-        <p:txBody>
-          <a:bodyPr wrap="square" lIns="0" tIns="0" rIns="0" bIns="0" rtlCol="0" anchor="ctr"/>
-          <a:lstStyle/>
-          <a:p>
-            <a:pPr indent="0" marL="0">
-              <a:buNone/>
-            </a:pPr>
-            <a:r>
-              <a:rPr lang="en-US" sz="3300" b="1" dirty="0">
+            <a:off x="685800" y="1408176"/>
+            <a:ext cx="548640" cy="548640"/>
+          </a:xfrm>
+          <a:prstGeom prst="rect">
+            <a:avLst/>
+          </a:prstGeom>
+          <a:noFill/>
+          <a:ln/>
+        </p:spPr>
+        <p:txBody>
+          <a:bodyPr wrap="square" lIns="0" tIns="0" rIns="0" bIns="0" rtlCol="0" anchor="ctr"/>
+          <a:lstStyle/>
+          <a:p>
+            <a:pPr algn="ctr" indent="0" marL="0">
+              <a:buNone/>
+            </a:pPr>
+            <a:r>
+              <a:rPr lang="en-US" sz="3000" b="1" dirty="0">
                 <a:solidFill>
                   <a:srgbClr val="C2453A"/>
                 </a:solidFill>
@@ -5100,38 +6330,62 @@
                 <a:ea typeface="Microsoft YaHei" pitchFamily="34" charset="-122"/>
                 <a:cs typeface="Microsoft YaHei" pitchFamily="34" charset="-120"/>
               </a:rPr>
-              <a:t>RM 261,000</a:t>
-            </a:r>
-            <a:endParaRPr lang="en-US" sz="3300" dirty="0"/>
-          </a:p>
-        </p:txBody>
-      </p:sp>
-      <p:sp>
-        <p:nvSpPr>
-          <p:cNvPr id="6" name="Text 4"/>
-          <p:cNvSpPr/>
-          <p:nvPr/>
-        </p:nvSpPr>
-        <p:spPr>
-          <a:xfrm>
-            <a:off x="914400" y="2834640"/>
-            <a:ext cx="2834640" cy="365760"/>
-          </a:xfrm>
-          <a:prstGeom prst="rect">
-            <a:avLst/>
-          </a:prstGeom>
-          <a:noFill/>
-          <a:ln/>
-        </p:spPr>
-        <p:txBody>
-          <a:bodyPr wrap="square" lIns="0" tIns="0" rIns="0" bIns="0" rtlCol="0" anchor="ctr"/>
-          <a:lstStyle/>
-          <a:p>
-            <a:pPr indent="0" marL="0">
-              <a:buNone/>
-            </a:pPr>
-            <a:r>
-              <a:rPr lang="en-US" sz="1200" dirty="0">
+              <a:t>1</a:t>
+            </a:r>
+            <a:endParaRPr lang="en-US" sz="3000" dirty="0"/>
+          </a:p>
+        </p:txBody>
+      </p:sp>
+      <p:pic>
+        <p:nvPicPr>
+          <p:cNvPr id="5" name="Image 0" descr="preencoded.png">    </p:cNvPr>
+          <p:cNvPicPr>
+            <a:picLocks noChangeAspect="1"/>
+          </p:cNvPicPr>
+          <p:nvPr/>
+        </p:nvPicPr>
+        <p:blipFill>
+          <a:blip r:embed="rId1"/>
+          <a:stretch>
+            <a:fillRect/>
+          </a:stretch>
+        </p:blipFill>
+        <p:spPr>
+          <a:xfrm>
+            <a:off x="1417320" y="1517904"/>
+            <a:ext cx="329184" cy="329184"/>
+          </a:xfrm>
+          <a:prstGeom prst="rect">
+            <a:avLst/>
+          </a:prstGeom>
+        </p:spPr>
+      </p:pic>
+      <p:sp>
+        <p:nvSpPr>
+          <p:cNvPr id="6" name="Text 3"/>
+          <p:cNvSpPr/>
+          <p:nvPr/>
+        </p:nvSpPr>
+        <p:spPr>
+          <a:xfrm>
+            <a:off x="1965960" y="1298448"/>
+            <a:ext cx="6492240" cy="365760"/>
+          </a:xfrm>
+          <a:prstGeom prst="rect">
+            <a:avLst/>
+          </a:prstGeom>
+          <a:noFill/>
+          <a:ln/>
+        </p:spPr>
+        <p:txBody>
+          <a:bodyPr wrap="square" lIns="0" tIns="0" rIns="0" bIns="0" rtlCol="0" anchor="ctr"/>
+          <a:lstStyle/>
+          <a:p>
+            <a:pPr indent="0" marL="0">
+              <a:buNone/>
+            </a:pPr>
+            <a:r>
+              <a:rPr lang="en-US" sz="1550" b="1" dirty="0">
                 <a:solidFill>
                   <a:srgbClr val="26312A"/>
                 </a:solidFill>
@@ -5139,69 +6393,69 @@
                 <a:ea typeface="Microsoft YaHei" pitchFamily="34" charset="-122"/>
                 <a:cs typeface="Microsoft YaHei" pitchFamily="34" charset="-120"/>
               </a:rPr>
-              <a:t>超过月均毛利，做多少亏多少</a:t>
-            </a:r>
-            <a:endParaRPr lang="en-US" sz="1200" dirty="0"/>
-          </a:p>
-        </p:txBody>
-      </p:sp>
-      <p:sp>
-        <p:nvSpPr>
-          <p:cNvPr id="7" name="Text 5"/>
-          <p:cNvSpPr/>
-          <p:nvPr/>
-        </p:nvSpPr>
-        <p:spPr>
-          <a:xfrm>
-            <a:off x="3977640" y="2057400"/>
-            <a:ext cx="914400" cy="731520"/>
-          </a:xfrm>
-          <a:prstGeom prst="rect">
-            <a:avLst/>
-          </a:prstGeom>
-          <a:noFill/>
-          <a:ln/>
-        </p:spPr>
-        <p:txBody>
-          <a:bodyPr wrap="square" lIns="0" tIns="0" rIns="0" bIns="0" rtlCol="0" anchor="ctr"/>
-          <a:lstStyle/>
-          <a:p>
-            <a:pPr algn="ctr" indent="0" marL="0">
-              <a:buNone/>
-            </a:pPr>
-            <a:r>
-              <a:rPr lang="en-US" sz="4000" b="1" dirty="0">
-                <a:solidFill>
-                  <a:srgbClr val="6B7A6E"/>
-                </a:solidFill>
-                <a:latin typeface="Microsoft YaHei" pitchFamily="34" charset="0"/>
-                <a:ea typeface="Microsoft YaHei" pitchFamily="34" charset="-122"/>
-                <a:cs typeface="Microsoft YaHei" pitchFamily="34" charset="-120"/>
-              </a:rPr>
-              <a:t>→</a:t>
-            </a:r>
-            <a:endParaRPr lang="en-US" sz="4000" dirty="0"/>
-          </a:p>
-        </p:txBody>
-      </p:sp>
-      <p:sp>
-        <p:nvSpPr>
-          <p:cNvPr id="8" name="Shape 6"/>
-          <p:cNvSpPr/>
-          <p:nvPr/>
-        </p:nvSpPr>
-        <p:spPr>
-          <a:xfrm>
-            <a:off x="5029200" y="1280160"/>
-            <a:ext cx="3291840" cy="2286000"/>
+              <a:t>营业费用过高</a:t>
+            </a:r>
+            <a:endParaRPr lang="en-US" sz="1550" dirty="0"/>
+          </a:p>
+        </p:txBody>
+      </p:sp>
+      <p:sp>
+        <p:nvSpPr>
+          <p:cNvPr id="7" name="Text 4"/>
+          <p:cNvSpPr/>
+          <p:nvPr/>
+        </p:nvSpPr>
+        <p:spPr>
+          <a:xfrm>
+            <a:off x="1965960" y="1645920"/>
+            <a:ext cx="6492240" cy="475488"/>
+          </a:xfrm>
+          <a:prstGeom prst="rect">
+            <a:avLst/>
+          </a:prstGeom>
+          <a:noFill/>
+          <a:ln/>
+        </p:spPr>
+        <p:txBody>
+          <a:bodyPr wrap="square" lIns="0" tIns="0" rIns="0" bIns="0" rtlCol="0" anchor="ctr"/>
+          <a:lstStyle/>
+          <a:p>
+            <a:pPr indent="0" marL="0">
+              <a:buNone/>
+            </a:pPr>
+            <a:r>
+              <a:rPr lang="en-US" sz="1150" dirty="0">
+                <a:solidFill>
+                  <a:srgbClr val="4A554C"/>
+                </a:solidFill>
+                <a:latin typeface="Microsoft YaHei" pitchFamily="34" charset="0"/>
+                <a:ea typeface="Microsoft YaHei" pitchFamily="34" charset="-122"/>
+                <a:cs typeface="Microsoft YaHei" pitchFamily="34" charset="-120"/>
+              </a:rPr>
+              <a:t>月均费用约 RM 261,000，月均毛利只有约 RM 187,000 —— 毛利养不起费用，先天就亏。</a:t>
+            </a:r>
+            <a:endParaRPr lang="en-US" sz="1150" dirty="0"/>
+          </a:p>
+        </p:txBody>
+      </p:sp>
+      <p:sp>
+        <p:nvSpPr>
+          <p:cNvPr id="8" name="Shape 5"/>
+          <p:cNvSpPr/>
+          <p:nvPr/>
+        </p:nvSpPr>
+        <p:spPr>
+          <a:xfrm>
+            <a:off x="457200" y="2359152"/>
+            <a:ext cx="8229600" cy="987552"/>
           </a:xfrm>
           <a:prstGeom prst="roundRect">
             <a:avLst>
-              <a:gd name="adj" fmla="val 3600"/>
+              <a:gd name="adj" fmla="val 7407"/>
             </a:avLst>
           </a:prstGeom>
           <a:solidFill>
-            <a:srgbClr val="F1F7EC"/>
+            <a:srgbClr val="FBEFEE"/>
           </a:solidFill>
           <a:ln/>
           <a:effectLst>
@@ -5215,30 +6469,341 @@
       </p:sp>
       <p:sp>
         <p:nvSpPr>
-          <p:cNvPr id="9" name="Text 7"/>
-          <p:cNvSpPr/>
-          <p:nvPr/>
-        </p:nvSpPr>
-        <p:spPr>
-          <a:xfrm>
-            <a:off x="5303520" y="1600200"/>
-            <a:ext cx="2743200" cy="365760"/>
-          </a:xfrm>
-          <a:prstGeom prst="rect">
-            <a:avLst/>
-          </a:prstGeom>
-          <a:noFill/>
-          <a:ln/>
-        </p:spPr>
-        <p:txBody>
-          <a:bodyPr wrap="square" lIns="0" tIns="0" rIns="0" bIns="0" rtlCol="0" anchor="ctr"/>
-          <a:lstStyle/>
-          <a:p>
-            <a:pPr indent="0" marL="0">
-              <a:buNone/>
-            </a:pPr>
-            <a:r>
-              <a:rPr lang="en-US" sz="1400" dirty="0">
+          <p:cNvPr id="9" name="Text 6"/>
+          <p:cNvSpPr/>
+          <p:nvPr/>
+        </p:nvSpPr>
+        <p:spPr>
+          <a:xfrm>
+            <a:off x="685800" y="2578608"/>
+            <a:ext cx="548640" cy="548640"/>
+          </a:xfrm>
+          <a:prstGeom prst="rect">
+            <a:avLst/>
+          </a:prstGeom>
+          <a:noFill/>
+          <a:ln/>
+        </p:spPr>
+        <p:txBody>
+          <a:bodyPr wrap="square" lIns="0" tIns="0" rIns="0" bIns="0" rtlCol="0" anchor="ctr"/>
+          <a:lstStyle/>
+          <a:p>
+            <a:pPr algn="ctr" indent="0" marL="0">
+              <a:buNone/>
+            </a:pPr>
+            <a:r>
+              <a:rPr lang="en-US" sz="3000" b="1" dirty="0">
+                <a:solidFill>
+                  <a:srgbClr val="C2453A"/>
+                </a:solidFill>
+                <a:latin typeface="Microsoft YaHei" pitchFamily="34" charset="0"/>
+                <a:ea typeface="Microsoft YaHei" pitchFamily="34" charset="-122"/>
+                <a:cs typeface="Microsoft YaHei" pitchFamily="34" charset="-120"/>
+              </a:rPr>
+              <a:t>2</a:t>
+            </a:r>
+            <a:endParaRPr lang="en-US" sz="3000" dirty="0"/>
+          </a:p>
+        </p:txBody>
+      </p:sp>
+      <p:pic>
+        <p:nvPicPr>
+          <p:cNvPr id="10" name="Image 1" descr="preencoded.png">    </p:cNvPr>
+          <p:cNvPicPr>
+            <a:picLocks noChangeAspect="1"/>
+          </p:cNvPicPr>
+          <p:nvPr/>
+        </p:nvPicPr>
+        <p:blipFill>
+          <a:blip r:embed="rId2"/>
+          <a:stretch>
+            <a:fillRect/>
+          </a:stretch>
+        </p:blipFill>
+        <p:spPr>
+          <a:xfrm>
+            <a:off x="1417320" y="2688336"/>
+            <a:ext cx="329184" cy="329184"/>
+          </a:xfrm>
+          <a:prstGeom prst="rect">
+            <a:avLst/>
+          </a:prstGeom>
+        </p:spPr>
+      </p:pic>
+      <p:sp>
+        <p:nvSpPr>
+          <p:cNvPr id="11" name="Text 7"/>
+          <p:cNvSpPr/>
+          <p:nvPr/>
+        </p:nvSpPr>
+        <p:spPr>
+          <a:xfrm>
+            <a:off x="1965960" y="2468880"/>
+            <a:ext cx="6492240" cy="365760"/>
+          </a:xfrm>
+          <a:prstGeom prst="rect">
+            <a:avLst/>
+          </a:prstGeom>
+          <a:noFill/>
+          <a:ln/>
+        </p:spPr>
+        <p:txBody>
+          <a:bodyPr wrap="square" lIns="0" tIns="0" rIns="0" bIns="0" rtlCol="0" anchor="ctr"/>
+          <a:lstStyle/>
+          <a:p>
+            <a:pPr indent="0" marL="0">
+              <a:buNone/>
+            </a:pPr>
+            <a:r>
+              <a:rPr lang="en-US" sz="1550" b="1" dirty="0">
+                <a:solidFill>
+                  <a:srgbClr val="26312A"/>
+                </a:solidFill>
+                <a:latin typeface="Microsoft YaHei" pitchFamily="34" charset="0"/>
+                <a:ea typeface="Microsoft YaHei" pitchFamily="34" charset="-122"/>
+                <a:cs typeface="Microsoft YaHei" pitchFamily="34" charset="-120"/>
+              </a:rPr>
+              <a:t>营销花费没对准回报</a:t>
+            </a:r>
+            <a:endParaRPr lang="en-US" sz="1550" dirty="0"/>
+          </a:p>
+        </p:txBody>
+      </p:sp>
+      <p:sp>
+        <p:nvSpPr>
+          <p:cNvPr id="12" name="Text 8"/>
+          <p:cNvSpPr/>
+          <p:nvPr/>
+        </p:nvSpPr>
+        <p:spPr>
+          <a:xfrm>
+            <a:off x="1965960" y="2816352"/>
+            <a:ext cx="6492240" cy="475488"/>
+          </a:xfrm>
+          <a:prstGeom prst="rect">
+            <a:avLst/>
+          </a:prstGeom>
+          <a:noFill/>
+          <a:ln/>
+        </p:spPr>
+        <p:txBody>
+          <a:bodyPr wrap="square" lIns="0" tIns="0" rIns="0" bIns="0" rtlCol="0" anchor="ctr"/>
+          <a:lstStyle/>
+          <a:p>
+            <a:pPr indent="0" marL="0">
+              <a:buNone/>
+            </a:pPr>
+            <a:r>
+              <a:rPr lang="en-US" sz="1150" dirty="0">
+                <a:solidFill>
+                  <a:srgbClr val="4A554C"/>
+                </a:solidFill>
+                <a:latin typeface="Microsoft YaHei" pitchFamily="34" charset="0"/>
+                <a:ea typeface="Microsoft YaHei" pitchFamily="34" charset="-122"/>
+                <a:cs typeface="Microsoft YaHei" pitchFamily="34" charset="-120"/>
+              </a:rPr>
+              <a:t>投放分散、凭感觉加码，花出去的钱没有算清楚带回多少销售 —— 钱花了，销量没跟上。</a:t>
+            </a:r>
+            <a:endParaRPr lang="en-US" sz="1150" dirty="0"/>
+          </a:p>
+        </p:txBody>
+      </p:sp>
+      <p:sp>
+        <p:nvSpPr>
+          <p:cNvPr id="13" name="Shape 9"/>
+          <p:cNvSpPr/>
+          <p:nvPr/>
+        </p:nvSpPr>
+        <p:spPr>
+          <a:xfrm>
+            <a:off x="457200" y="3529584"/>
+            <a:ext cx="8229600" cy="987552"/>
+          </a:xfrm>
+          <a:prstGeom prst="roundRect">
+            <a:avLst>
+              <a:gd name="adj" fmla="val 7407"/>
+            </a:avLst>
+          </a:prstGeom>
+          <a:solidFill>
+            <a:srgbClr val="FBEFEE"/>
+          </a:solidFill>
+          <a:ln/>
+          <a:effectLst>
+            <a:outerShdw sx="100000" sy="100000" kx="0" ky="0" algn="bl" rotWithShape="0" blurRad="88900" dist="25400" dir="2700000">
+              <a:srgbClr val="000000">
+                <a:alpha val="13000"/>
+              </a:srgbClr>
+            </a:outerShdw>
+          </a:effectLst>
+        </p:spPr>
+      </p:sp>
+      <p:sp>
+        <p:nvSpPr>
+          <p:cNvPr id="14" name="Text 10"/>
+          <p:cNvSpPr/>
+          <p:nvPr/>
+        </p:nvSpPr>
+        <p:spPr>
+          <a:xfrm>
+            <a:off x="685800" y="3749040"/>
+            <a:ext cx="548640" cy="548640"/>
+          </a:xfrm>
+          <a:prstGeom prst="rect">
+            <a:avLst/>
+          </a:prstGeom>
+          <a:noFill/>
+          <a:ln/>
+        </p:spPr>
+        <p:txBody>
+          <a:bodyPr wrap="square" lIns="0" tIns="0" rIns="0" bIns="0" rtlCol="0" anchor="ctr"/>
+          <a:lstStyle/>
+          <a:p>
+            <a:pPr algn="ctr" indent="0" marL="0">
+              <a:buNone/>
+            </a:pPr>
+            <a:r>
+              <a:rPr lang="en-US" sz="3000" b="1" dirty="0">
+                <a:solidFill>
+                  <a:srgbClr val="C2453A"/>
+                </a:solidFill>
+                <a:latin typeface="Microsoft YaHei" pitchFamily="34" charset="0"/>
+                <a:ea typeface="Microsoft YaHei" pitchFamily="34" charset="-122"/>
+                <a:cs typeface="Microsoft YaHei" pitchFamily="34" charset="-120"/>
+              </a:rPr>
+              <a:t>3</a:t>
+            </a:r>
+            <a:endParaRPr lang="en-US" sz="3000" dirty="0"/>
+          </a:p>
+        </p:txBody>
+      </p:sp>
+      <p:pic>
+        <p:nvPicPr>
+          <p:cNvPr id="15" name="Image 2" descr="preencoded.png">    </p:cNvPr>
+          <p:cNvPicPr>
+            <a:picLocks noChangeAspect="1"/>
+          </p:cNvPicPr>
+          <p:nvPr/>
+        </p:nvPicPr>
+        <p:blipFill>
+          <a:blip r:embed="rId3"/>
+          <a:stretch>
+            <a:fillRect/>
+          </a:stretch>
+        </p:blipFill>
+        <p:spPr>
+          <a:xfrm>
+            <a:off x="1417320" y="3858768"/>
+            <a:ext cx="329184" cy="329184"/>
+          </a:xfrm>
+          <a:prstGeom prst="rect">
+            <a:avLst/>
+          </a:prstGeom>
+        </p:spPr>
+      </p:pic>
+      <p:sp>
+        <p:nvSpPr>
+          <p:cNvPr id="16" name="Text 11"/>
+          <p:cNvSpPr/>
+          <p:nvPr/>
+        </p:nvSpPr>
+        <p:spPr>
+          <a:xfrm>
+            <a:off x="1965960" y="3639312"/>
+            <a:ext cx="6492240" cy="365760"/>
+          </a:xfrm>
+          <a:prstGeom prst="rect">
+            <a:avLst/>
+          </a:prstGeom>
+          <a:noFill/>
+          <a:ln/>
+        </p:spPr>
+        <p:txBody>
+          <a:bodyPr wrap="square" lIns="0" tIns="0" rIns="0" bIns="0" rtlCol="0" anchor="ctr"/>
+          <a:lstStyle/>
+          <a:p>
+            <a:pPr indent="0" marL="0">
+              <a:buNone/>
+            </a:pPr>
+            <a:r>
+              <a:rPr lang="en-US" sz="1550" b="1" dirty="0">
+                <a:solidFill>
+                  <a:srgbClr val="26312A"/>
+                </a:solidFill>
+                <a:latin typeface="Microsoft YaHei" pitchFamily="34" charset="0"/>
+                <a:ea typeface="Microsoft YaHei" pitchFamily="34" charset="-122"/>
+                <a:cs typeface="Microsoft YaHei" pitchFamily="34" charset="-120"/>
+              </a:rPr>
+              <a:t>库存压住太多现金</a:t>
+            </a:r>
+            <a:endParaRPr lang="en-US" sz="1550" dirty="0"/>
+          </a:p>
+        </p:txBody>
+      </p:sp>
+      <p:sp>
+        <p:nvSpPr>
+          <p:cNvPr id="17" name="Text 12"/>
+          <p:cNvSpPr/>
+          <p:nvPr/>
+        </p:nvSpPr>
+        <p:spPr>
+          <a:xfrm>
+            <a:off x="1965960" y="3986784"/>
+            <a:ext cx="6492240" cy="475488"/>
+          </a:xfrm>
+          <a:prstGeom prst="rect">
+            <a:avLst/>
+          </a:prstGeom>
+          <a:noFill/>
+          <a:ln/>
+        </p:spPr>
+        <p:txBody>
+          <a:bodyPr wrap="square" lIns="0" tIns="0" rIns="0" bIns="0" rtlCol="0" anchor="ctr"/>
+          <a:lstStyle/>
+          <a:p>
+            <a:pPr indent="0" marL="0">
+              <a:buNone/>
+            </a:pPr>
+            <a:r>
+              <a:rPr lang="en-US" sz="1150" dirty="0">
+                <a:solidFill>
+                  <a:srgbClr val="4A554C"/>
+                </a:solidFill>
+                <a:latin typeface="Microsoft YaHei" pitchFamily="34" charset="0"/>
+                <a:ea typeface="Microsoft YaHei" pitchFamily="34" charset="-122"/>
+                <a:cs typeface="Microsoft YaHei" pitchFamily="34" charset="-120"/>
+              </a:rPr>
+              <a:t>约 RM 1,065,000 的货躺在仓库，132 天才转一圈 —— 现金被冻结，公司越转越紧。</a:t>
+            </a:r>
+            <a:endParaRPr lang="en-US" sz="1150" dirty="0"/>
+          </a:p>
+        </p:txBody>
+      </p:sp>
+      <p:sp>
+        <p:nvSpPr>
+          <p:cNvPr id="18" name="Text 13"/>
+          <p:cNvSpPr/>
+          <p:nvPr/>
+        </p:nvSpPr>
+        <p:spPr>
+          <a:xfrm>
+            <a:off x="457200" y="4681728"/>
+            <a:ext cx="8229600" cy="320040"/>
+          </a:xfrm>
+          <a:prstGeom prst="rect">
+            <a:avLst/>
+          </a:prstGeom>
+          <a:noFill/>
+          <a:ln/>
+        </p:spPr>
+        <p:txBody>
+          <a:bodyPr wrap="square" lIns="0" tIns="0" rIns="0" bIns="0" rtlCol="0" anchor="ctr"/>
+          <a:lstStyle/>
+          <a:p>
+            <a:pPr indent="0" marL="0">
+              <a:buNone/>
+            </a:pPr>
+            <a:r>
+              <a:rPr lang="en-US" sz="1250" i="1" dirty="0">
                 <a:solidFill>
                   <a:srgbClr val="6B7A6E"/>
                 </a:solidFill>
@@ -5246,143 +6811,9 @@
                 <a:ea typeface="Microsoft YaHei" pitchFamily="34" charset="-122"/>
                 <a:cs typeface="Microsoft YaHei" pitchFamily="34" charset="-120"/>
               </a:rPr>
-              <a:t>5 月实际营业费用</a:t>
-            </a:r>
-            <a:endParaRPr lang="en-US" sz="1400" dirty="0"/>
-          </a:p>
-        </p:txBody>
-      </p:sp>
-      <p:sp>
-        <p:nvSpPr>
-          <p:cNvPr id="10" name="Text 8"/>
-          <p:cNvSpPr/>
-          <p:nvPr/>
-        </p:nvSpPr>
-        <p:spPr>
-          <a:xfrm>
-            <a:off x="5303520" y="2011680"/>
-            <a:ext cx="2834640" cy="685800"/>
-          </a:xfrm>
-          <a:prstGeom prst="rect">
-            <a:avLst/>
-          </a:prstGeom>
-          <a:noFill/>
-          <a:ln/>
-        </p:spPr>
-        <p:txBody>
-          <a:bodyPr wrap="square" lIns="0" tIns="0" rIns="0" bIns="0" rtlCol="0" anchor="ctr"/>
-          <a:lstStyle/>
-          <a:p>
-            <a:pPr indent="0" marL="0">
-              <a:buNone/>
-            </a:pPr>
-            <a:r>
-              <a:rPr lang="en-US" sz="3300" b="1" dirty="0">
-                <a:solidFill>
-                  <a:srgbClr val="2C6E31"/>
-                </a:solidFill>
-                <a:latin typeface="Microsoft YaHei" pitchFamily="34" charset="0"/>
-                <a:ea typeface="Microsoft YaHei" pitchFamily="34" charset="-122"/>
-                <a:cs typeface="Microsoft YaHei" pitchFamily="34" charset="-120"/>
-              </a:rPr>
-              <a:t>RM 204,000</a:t>
-            </a:r>
-            <a:endParaRPr lang="en-US" sz="3300" dirty="0"/>
-          </a:p>
-        </p:txBody>
-      </p:sp>
-      <p:sp>
-        <p:nvSpPr>
-          <p:cNvPr id="11" name="Text 9"/>
-          <p:cNvSpPr/>
-          <p:nvPr/>
-        </p:nvSpPr>
-        <p:spPr>
-          <a:xfrm>
-            <a:off x="5303520" y="2834640"/>
-            <a:ext cx="2834640" cy="365760"/>
-          </a:xfrm>
-          <a:prstGeom prst="rect">
-            <a:avLst/>
-          </a:prstGeom>
-          <a:noFill/>
-          <a:ln/>
-        </p:spPr>
-        <p:txBody>
-          <a:bodyPr wrap="square" lIns="0" tIns="0" rIns="0" bIns="0" rtlCol="0" anchor="ctr"/>
-          <a:lstStyle/>
-          <a:p>
-            <a:pPr indent="0" marL="0">
-              <a:buNone/>
-            </a:pPr>
-            <a:r>
-              <a:rPr lang="en-US" sz="1200" dirty="0">
-                <a:solidFill>
-                  <a:srgbClr val="26312A"/>
-                </a:solidFill>
-                <a:latin typeface="Microsoft YaHei" pitchFamily="34" charset="0"/>
-                <a:ea typeface="Microsoft YaHei" pitchFamily="34" charset="-122"/>
-                <a:cs typeface="Microsoft YaHei" pitchFamily="34" charset="-120"/>
-              </a:rPr>
-              <a:t>同样的团队、同样的生意，照样运转</a:t>
-            </a:r>
-            <a:endParaRPr lang="en-US" sz="1200" dirty="0"/>
-          </a:p>
-        </p:txBody>
-      </p:sp>
-      <p:sp>
-        <p:nvSpPr>
-          <p:cNvPr id="12" name="Text 10"/>
-          <p:cNvSpPr/>
-          <p:nvPr/>
-        </p:nvSpPr>
-        <p:spPr>
-          <a:xfrm>
-            <a:off x="640080" y="3886200"/>
-            <a:ext cx="7863840" cy="822960"/>
-          </a:xfrm>
-          <a:prstGeom prst="rect">
-            <a:avLst/>
-          </a:prstGeom>
-          <a:noFill/>
-          <a:ln/>
-        </p:spPr>
-        <p:txBody>
-          <a:bodyPr wrap="square" lIns="0" tIns="0" rIns="0" bIns="0" rtlCol="0" anchor="ctr"/>
-          <a:lstStyle/>
-          <a:p>
-            <a:pPr indent="0" marL="0">
-              <a:buNone/>
-            </a:pPr>
-            <a:r>
-              <a:rPr lang="en-US" sz="1400" b="1" dirty="0">
-                <a:solidFill>
-                  <a:srgbClr val="26312A"/>
-                </a:solidFill>
-                <a:latin typeface="Microsoft YaHei" pitchFamily="34" charset="0"/>
-                <a:ea typeface="Microsoft YaHei" pitchFamily="34" charset="-122"/>
-                <a:cs typeface="Microsoft YaHei" pitchFamily="34" charset="-120"/>
-              </a:rPr>
-              <a:t>费用最低的 5 月，恰好是利润最高的月份 —— 这不是巧合。</a:t>
-            </a:r>
-            <a:endParaRPr lang="en-US" sz="1400" dirty="0"/>
-          </a:p>
-          <a:p>
-            <a:pPr indent="0" marL="0">
-              <a:buNone/>
-            </a:pPr>
-            <a:r>
-              <a:rPr lang="en-US" sz="1400" dirty="0">
-                <a:solidFill>
-                  <a:srgbClr val="4A554C"/>
-                </a:solidFill>
-                <a:latin typeface="Microsoft YaHei" pitchFamily="34" charset="0"/>
-                <a:ea typeface="Microsoft YaHei" pitchFamily="34" charset="-122"/>
-                <a:cs typeface="Microsoft YaHei" pitchFamily="34" charset="-120"/>
-              </a:rPr>
-              <a:t>每月省下约 RM 57,000，一年就是接近 RM 700,000 的利润空间。</a:t>
-            </a:r>
-            <a:endParaRPr lang="en-US" sz="1400" dirty="0"/>
+              <a:t>三个原因，H2 一个一个拆掉。</a:t>
+            </a:r>
+            <a:endParaRPr lang="en-US" sz="1250" dirty="0"/>
           </a:p>
         </p:txBody>
       </p:sp>
@@ -5451,7 +6882,7 @@
                 <a:ea typeface="Microsoft YaHei" pitchFamily="34" charset="-122"/>
                 <a:cs typeface="Microsoft YaHei" pitchFamily="34" charset="-120"/>
               </a:rPr>
-              <a:t>原因二：营销的钱，要花在看得见回报的地方</a:t>
+              <a:t>原因一：费用是能降的 —— 5 月已经证明</a:t>
             </a:r>
             <a:endParaRPr lang="en-US" sz="2700" dirty="0"/>
           </a:p>
@@ -5459,61 +6890,22 @@
       </p:sp>
       <p:sp>
         <p:nvSpPr>
-          <p:cNvPr id="3" name="Text 1"/>
-          <p:cNvSpPr/>
-          <p:nvPr/>
-        </p:nvSpPr>
-        <p:spPr>
-          <a:xfrm>
-            <a:off x="457200" y="1051560"/>
-            <a:ext cx="8229600" cy="411480"/>
-          </a:xfrm>
-          <a:prstGeom prst="rect">
-            <a:avLst/>
-          </a:prstGeom>
-          <a:noFill/>
-          <a:ln/>
-        </p:spPr>
-        <p:txBody>
-          <a:bodyPr wrap="square" lIns="0" tIns="0" rIns="0" bIns="0" rtlCol="0" anchor="ctr"/>
-          <a:lstStyle/>
-          <a:p>
-            <a:pPr indent="0" marL="0">
-              <a:buNone/>
-            </a:pPr>
-            <a:r>
-              <a:rPr lang="en-US" sz="1450" dirty="0">
-                <a:solidFill>
-                  <a:srgbClr val="26312A"/>
-                </a:solidFill>
-                <a:latin typeface="Microsoft YaHei" pitchFamily="34" charset="0"/>
-                <a:ea typeface="Microsoft YaHei" pitchFamily="34" charset="-122"/>
-                <a:cs typeface="Microsoft YaHei" pitchFamily="34" charset="-120"/>
-              </a:rPr>
-              <a:t>上半年的问题：投放分散、凭感觉加码，没有用回报来决定花多少。</a:t>
-            </a:r>
-            <a:endParaRPr lang="en-US" sz="1450" dirty="0"/>
-          </a:p>
-        </p:txBody>
-      </p:sp>
-      <p:sp>
-        <p:nvSpPr>
-          <p:cNvPr id="4" name="Shape 2"/>
-          <p:cNvSpPr/>
-          <p:nvPr/>
-        </p:nvSpPr>
-        <p:spPr>
-          <a:xfrm>
-            <a:off x="548640" y="1691640"/>
-            <a:ext cx="2514600" cy="1965960"/>
+          <p:cNvPr id="3" name="Shape 1"/>
+          <p:cNvSpPr/>
+          <p:nvPr/>
+        </p:nvSpPr>
+        <p:spPr>
+          <a:xfrm>
+            <a:off x="640080" y="1280160"/>
+            <a:ext cx="3291840" cy="2286000"/>
           </a:xfrm>
           <a:prstGeom prst="roundRect">
             <a:avLst>
-              <a:gd name="adj" fmla="val 4186"/>
+              <a:gd name="adj" fmla="val 3600"/>
             </a:avLst>
           </a:prstGeom>
           <a:solidFill>
-            <a:srgbClr val="F1F7EC"/>
+            <a:srgbClr val="FBEFEE"/>
           </a:solidFill>
           <a:ln/>
           <a:effectLst>
@@ -5527,23 +6919,81 @@
       </p:sp>
       <p:sp>
         <p:nvSpPr>
-          <p:cNvPr id="5" name="Shape 3"/>
-          <p:cNvSpPr/>
-          <p:nvPr/>
-        </p:nvSpPr>
-        <p:spPr>
-          <a:xfrm>
-            <a:off x="777240" y="1920240"/>
-            <a:ext cx="502920" cy="502920"/>
-          </a:xfrm>
-          <a:prstGeom prst="ellipse">
-            <a:avLst/>
-          </a:prstGeom>
-          <a:solidFill>
-            <a:srgbClr val="2C6E31"/>
-          </a:solidFill>
-          <a:ln/>
-        </p:spPr>
+          <p:cNvPr id="4" name="Text 2"/>
+          <p:cNvSpPr/>
+          <p:nvPr/>
+        </p:nvSpPr>
+        <p:spPr>
+          <a:xfrm>
+            <a:off x="914400" y="1600200"/>
+            <a:ext cx="2743200" cy="365760"/>
+          </a:xfrm>
+          <a:prstGeom prst="rect">
+            <a:avLst/>
+          </a:prstGeom>
+          <a:noFill/>
+          <a:ln/>
+        </p:spPr>
+        <p:txBody>
+          <a:bodyPr wrap="square" lIns="0" tIns="0" rIns="0" bIns="0" rtlCol="0" anchor="ctr"/>
+          <a:lstStyle/>
+          <a:p>
+            <a:pPr indent="0" marL="0">
+              <a:buNone/>
+            </a:pPr>
+            <a:r>
+              <a:rPr lang="en-US" sz="1400" dirty="0">
+                <a:solidFill>
+                  <a:srgbClr val="6B7A6E"/>
+                </a:solidFill>
+                <a:latin typeface="Microsoft YaHei" pitchFamily="34" charset="0"/>
+                <a:ea typeface="Microsoft YaHei" pitchFamily="34" charset="-122"/>
+                <a:cs typeface="Microsoft YaHei" pitchFamily="34" charset="-120"/>
+              </a:rPr>
+              <a:t>上半年月均营业费用</a:t>
+            </a:r>
+            <a:endParaRPr lang="en-US" sz="1400" dirty="0"/>
+          </a:p>
+        </p:txBody>
+      </p:sp>
+      <p:sp>
+        <p:nvSpPr>
+          <p:cNvPr id="5" name="Text 3"/>
+          <p:cNvSpPr/>
+          <p:nvPr/>
+        </p:nvSpPr>
+        <p:spPr>
+          <a:xfrm>
+            <a:off x="914400" y="2011680"/>
+            <a:ext cx="2834640" cy="685800"/>
+          </a:xfrm>
+          <a:prstGeom prst="rect">
+            <a:avLst/>
+          </a:prstGeom>
+          <a:noFill/>
+          <a:ln/>
+        </p:spPr>
+        <p:txBody>
+          <a:bodyPr wrap="square" lIns="0" tIns="0" rIns="0" bIns="0" rtlCol="0" anchor="ctr"/>
+          <a:lstStyle/>
+          <a:p>
+            <a:pPr indent="0" marL="0">
+              <a:buNone/>
+            </a:pPr>
+            <a:r>
+              <a:rPr lang="en-US" sz="3300" b="1" dirty="0">
+                <a:solidFill>
+                  <a:srgbClr val="C2453A"/>
+                </a:solidFill>
+                <a:latin typeface="Microsoft YaHei" pitchFamily="34" charset="0"/>
+                <a:ea typeface="Microsoft YaHei" pitchFamily="34" charset="-122"/>
+                <a:cs typeface="Microsoft YaHei" pitchFamily="34" charset="-120"/>
+              </a:rPr>
+              <a:t>RM 261,000</a:t>
+            </a:r>
+            <a:endParaRPr lang="en-US" sz="3300" dirty="0"/>
+          </a:p>
+        </p:txBody>
       </p:sp>
       <p:sp>
         <p:nvSpPr>
@@ -5553,8 +7003,47 @@
         </p:nvSpPr>
         <p:spPr>
           <a:xfrm>
-            <a:off x="777240" y="1920240"/>
-            <a:ext cx="502920" cy="502920"/>
+            <a:off x="914400" y="2834640"/>
+            <a:ext cx="2834640" cy="365760"/>
+          </a:xfrm>
+          <a:prstGeom prst="rect">
+            <a:avLst/>
+          </a:prstGeom>
+          <a:noFill/>
+          <a:ln/>
+        </p:spPr>
+        <p:txBody>
+          <a:bodyPr wrap="square" lIns="0" tIns="0" rIns="0" bIns="0" rtlCol="0" anchor="ctr"/>
+          <a:lstStyle/>
+          <a:p>
+            <a:pPr indent="0" marL="0">
+              <a:buNone/>
+            </a:pPr>
+            <a:r>
+              <a:rPr lang="en-US" sz="1200" dirty="0">
+                <a:solidFill>
+                  <a:srgbClr val="26312A"/>
+                </a:solidFill>
+                <a:latin typeface="Microsoft YaHei" pitchFamily="34" charset="0"/>
+                <a:ea typeface="Microsoft YaHei" pitchFamily="34" charset="-122"/>
+                <a:cs typeface="Microsoft YaHei" pitchFamily="34" charset="-120"/>
+              </a:rPr>
+              <a:t>超过月均毛利，做多少亏多少</a:t>
+            </a:r>
+            <a:endParaRPr lang="en-US" sz="1200" dirty="0"/>
+          </a:p>
+        </p:txBody>
+      </p:sp>
+      <p:sp>
+        <p:nvSpPr>
+          <p:cNvPr id="7" name="Text 5"/>
+          <p:cNvSpPr/>
+          <p:nvPr/>
+        </p:nvSpPr>
+        <p:spPr>
+          <a:xfrm>
+            <a:off x="3977640" y="2057400"/>
+            <a:ext cx="914400" cy="731520"/>
           </a:xfrm>
           <a:prstGeom prst="rect">
             <a:avLst/>
@@ -5570,124 +7059,7 @@
               <a:buNone/>
             </a:pPr>
             <a:r>
-              <a:rPr lang="en-US" sz="2000" b="1" dirty="0">
-                <a:solidFill>
-                  <a:srgbClr val="FFFFFF"/>
-                </a:solidFill>
-                <a:latin typeface="Microsoft YaHei" pitchFamily="34" charset="0"/>
-                <a:ea typeface="Microsoft YaHei" pitchFamily="34" charset="-122"/>
-                <a:cs typeface="Microsoft YaHei" pitchFamily="34" charset="-120"/>
-              </a:rPr>
-              <a:t>1</a:t>
-            </a:r>
-            <a:endParaRPr lang="en-US" sz="2000" dirty="0"/>
-          </a:p>
-        </p:txBody>
-      </p:sp>
-      <p:sp>
-        <p:nvSpPr>
-          <p:cNvPr id="7" name="Text 5"/>
-          <p:cNvSpPr/>
-          <p:nvPr/>
-        </p:nvSpPr>
-        <p:spPr>
-          <a:xfrm>
-            <a:off x="777240" y="2606040"/>
-            <a:ext cx="2103120" cy="365760"/>
-          </a:xfrm>
-          <a:prstGeom prst="rect">
-            <a:avLst/>
-          </a:prstGeom>
-          <a:noFill/>
-          <a:ln/>
-        </p:spPr>
-        <p:txBody>
-          <a:bodyPr wrap="square" lIns="0" tIns="0" rIns="0" bIns="0" rtlCol="0" anchor="ctr"/>
-          <a:lstStyle/>
-          <a:p>
-            <a:pPr indent="0" marL="0">
-              <a:buNone/>
-            </a:pPr>
-            <a:r>
-              <a:rPr lang="en-US" sz="1600" b="1" dirty="0">
-                <a:solidFill>
-                  <a:srgbClr val="26312A"/>
-                </a:solidFill>
-                <a:latin typeface="Microsoft YaHei" pitchFamily="34" charset="0"/>
-                <a:ea typeface="Microsoft YaHei" pitchFamily="34" charset="-122"/>
-                <a:cs typeface="Microsoft YaHei" pitchFamily="34" charset="-120"/>
-              </a:rPr>
-              <a:t>小额测试</a:t>
-            </a:r>
-            <a:endParaRPr lang="en-US" sz="1600" dirty="0"/>
-          </a:p>
-        </p:txBody>
-      </p:sp>
-      <p:sp>
-        <p:nvSpPr>
-          <p:cNvPr id="8" name="Text 6"/>
-          <p:cNvSpPr/>
-          <p:nvPr/>
-        </p:nvSpPr>
-        <p:spPr>
-          <a:xfrm>
-            <a:off x="777240" y="2971800"/>
-            <a:ext cx="2103120" cy="594360"/>
-          </a:xfrm>
-          <a:prstGeom prst="rect">
-            <a:avLst/>
-          </a:prstGeom>
-          <a:noFill/>
-          <a:ln/>
-        </p:spPr>
-        <p:txBody>
-          <a:bodyPr wrap="square" lIns="0" tIns="0" rIns="0" bIns="0" rtlCol="0" anchor="ctr"/>
-          <a:lstStyle/>
-          <a:p>
-            <a:pPr indent="0" marL="0">
-              <a:buNone/>
-            </a:pPr>
-            <a:r>
-              <a:rPr lang="en-US" sz="1150" dirty="0">
-                <a:solidFill>
-                  <a:srgbClr val="4A554C"/>
-                </a:solidFill>
-                <a:latin typeface="Microsoft YaHei" pitchFamily="34" charset="0"/>
-                <a:ea typeface="Microsoft YaHei" pitchFamily="34" charset="-122"/>
-                <a:cs typeface="Microsoft YaHei" pitchFamily="34" charset="-120"/>
-              </a:rPr>
-              <a:t>每个渠道、每档活动，先用小预算试跑</a:t>
-            </a:r>
-            <a:endParaRPr lang="en-US" sz="1150" dirty="0"/>
-          </a:p>
-        </p:txBody>
-      </p:sp>
-      <p:sp>
-        <p:nvSpPr>
-          <p:cNvPr id="9" name="Text 7"/>
-          <p:cNvSpPr/>
-          <p:nvPr/>
-        </p:nvSpPr>
-        <p:spPr>
-          <a:xfrm>
-            <a:off x="3035808" y="2377440"/>
-            <a:ext cx="457200" cy="548640"/>
-          </a:xfrm>
-          <a:prstGeom prst="rect">
-            <a:avLst/>
-          </a:prstGeom>
-          <a:noFill/>
-          <a:ln/>
-        </p:spPr>
-        <p:txBody>
-          <a:bodyPr wrap="square" lIns="0" tIns="0" rIns="0" bIns="0" rtlCol="0" anchor="ctr"/>
-          <a:lstStyle/>
-          <a:p>
-            <a:pPr algn="ctr" indent="0" marL="0">
-              <a:buNone/>
-            </a:pPr>
-            <a:r>
-              <a:rPr lang="en-US" sz="2400" b="1" dirty="0">
+              <a:rPr lang="en-US" sz="4000" b="1" dirty="0">
                 <a:solidFill>
                   <a:srgbClr val="6B7A6E"/>
                 </a:solidFill>
@@ -5697,24 +7069,24 @@
               </a:rPr>
               <a:t>→</a:t>
             </a:r>
-            <a:endParaRPr lang="en-US" sz="2400" dirty="0"/>
-          </a:p>
-        </p:txBody>
-      </p:sp>
-      <p:sp>
-        <p:nvSpPr>
-          <p:cNvPr id="10" name="Shape 8"/>
-          <p:cNvSpPr/>
-          <p:nvPr/>
-        </p:nvSpPr>
-        <p:spPr>
-          <a:xfrm>
-            <a:off x="3429000" y="1691640"/>
-            <a:ext cx="2514600" cy="1965960"/>
+            <a:endParaRPr lang="en-US" sz="4000" dirty="0"/>
+          </a:p>
+        </p:txBody>
+      </p:sp>
+      <p:sp>
+        <p:nvSpPr>
+          <p:cNvPr id="8" name="Shape 6"/>
+          <p:cNvSpPr/>
+          <p:nvPr/>
+        </p:nvSpPr>
+        <p:spPr>
+          <a:xfrm>
+            <a:off x="5029200" y="1280160"/>
+            <a:ext cx="3291840" cy="2286000"/>
           </a:xfrm>
           <a:prstGeom prst="roundRect">
             <a:avLst>
-              <a:gd name="adj" fmla="val 4186"/>
+              <a:gd name="adj" fmla="val 3600"/>
             </a:avLst>
           </a:prstGeom>
           <a:solidFill>
@@ -5732,23 +7104,120 @@
       </p:sp>
       <p:sp>
         <p:nvSpPr>
-          <p:cNvPr id="11" name="Shape 9"/>
-          <p:cNvSpPr/>
-          <p:nvPr/>
-        </p:nvSpPr>
-        <p:spPr>
-          <a:xfrm>
-            <a:off x="3657600" y="1920240"/>
-            <a:ext cx="502920" cy="502920"/>
-          </a:xfrm>
-          <a:prstGeom prst="ellipse">
-            <a:avLst/>
-          </a:prstGeom>
-          <a:solidFill>
-            <a:srgbClr val="2C6E31"/>
-          </a:solidFill>
-          <a:ln/>
-        </p:spPr>
+          <p:cNvPr id="9" name="Text 7"/>
+          <p:cNvSpPr/>
+          <p:nvPr/>
+        </p:nvSpPr>
+        <p:spPr>
+          <a:xfrm>
+            <a:off x="5303520" y="1600200"/>
+            <a:ext cx="2743200" cy="365760"/>
+          </a:xfrm>
+          <a:prstGeom prst="rect">
+            <a:avLst/>
+          </a:prstGeom>
+          <a:noFill/>
+          <a:ln/>
+        </p:spPr>
+        <p:txBody>
+          <a:bodyPr wrap="square" lIns="0" tIns="0" rIns="0" bIns="0" rtlCol="0" anchor="ctr"/>
+          <a:lstStyle/>
+          <a:p>
+            <a:pPr indent="0" marL="0">
+              <a:buNone/>
+            </a:pPr>
+            <a:r>
+              <a:rPr lang="en-US" sz="1400" dirty="0">
+                <a:solidFill>
+                  <a:srgbClr val="6B7A6E"/>
+                </a:solidFill>
+                <a:latin typeface="Microsoft YaHei" pitchFamily="34" charset="0"/>
+                <a:ea typeface="Microsoft YaHei" pitchFamily="34" charset="-122"/>
+                <a:cs typeface="Microsoft YaHei" pitchFamily="34" charset="-120"/>
+              </a:rPr>
+              <a:t>5 月实际营业费用</a:t>
+            </a:r>
+            <a:endParaRPr lang="en-US" sz="1400" dirty="0"/>
+          </a:p>
+        </p:txBody>
+      </p:sp>
+      <p:sp>
+        <p:nvSpPr>
+          <p:cNvPr id="10" name="Text 8"/>
+          <p:cNvSpPr/>
+          <p:nvPr/>
+        </p:nvSpPr>
+        <p:spPr>
+          <a:xfrm>
+            <a:off x="5303520" y="2011680"/>
+            <a:ext cx="2834640" cy="685800"/>
+          </a:xfrm>
+          <a:prstGeom prst="rect">
+            <a:avLst/>
+          </a:prstGeom>
+          <a:noFill/>
+          <a:ln/>
+        </p:spPr>
+        <p:txBody>
+          <a:bodyPr wrap="square" lIns="0" tIns="0" rIns="0" bIns="0" rtlCol="0" anchor="ctr"/>
+          <a:lstStyle/>
+          <a:p>
+            <a:pPr indent="0" marL="0">
+              <a:buNone/>
+            </a:pPr>
+            <a:r>
+              <a:rPr lang="en-US" sz="3300" b="1" dirty="0">
+                <a:solidFill>
+                  <a:srgbClr val="2C6E31"/>
+                </a:solidFill>
+                <a:latin typeface="Microsoft YaHei" pitchFamily="34" charset="0"/>
+                <a:ea typeface="Microsoft YaHei" pitchFamily="34" charset="-122"/>
+                <a:cs typeface="Microsoft YaHei" pitchFamily="34" charset="-120"/>
+              </a:rPr>
+              <a:t>RM 204,000</a:t>
+            </a:r>
+            <a:endParaRPr lang="en-US" sz="3300" dirty="0"/>
+          </a:p>
+        </p:txBody>
+      </p:sp>
+      <p:sp>
+        <p:nvSpPr>
+          <p:cNvPr id="11" name="Text 9"/>
+          <p:cNvSpPr/>
+          <p:nvPr/>
+        </p:nvSpPr>
+        <p:spPr>
+          <a:xfrm>
+            <a:off x="5303520" y="2834640"/>
+            <a:ext cx="2834640" cy="365760"/>
+          </a:xfrm>
+          <a:prstGeom prst="rect">
+            <a:avLst/>
+          </a:prstGeom>
+          <a:noFill/>
+          <a:ln/>
+        </p:spPr>
+        <p:txBody>
+          <a:bodyPr wrap="square" lIns="0" tIns="0" rIns="0" bIns="0" rtlCol="0" anchor="ctr"/>
+          <a:lstStyle/>
+          <a:p>
+            <a:pPr indent="0" marL="0">
+              <a:buNone/>
+            </a:pPr>
+            <a:r>
+              <a:rPr lang="en-US" sz="1200" dirty="0">
+                <a:solidFill>
+                  <a:srgbClr val="26312A"/>
+                </a:solidFill>
+                <a:latin typeface="Microsoft YaHei" pitchFamily="34" charset="0"/>
+                <a:ea typeface="Microsoft YaHei" pitchFamily="34" charset="-122"/>
+                <a:cs typeface="Microsoft YaHei" pitchFamily="34" charset="-120"/>
+              </a:rPr>
+              <a:t>同样的团队、同样的生意，照样运转</a:t>
+            </a:r>
+            <a:endParaRPr lang="en-US" sz="1200" dirty="0"/>
+          </a:p>
+        </p:txBody>
       </p:sp>
       <p:sp>
         <p:nvSpPr>
@@ -5758,63 +7227,24 @@
         </p:nvSpPr>
         <p:spPr>
           <a:xfrm>
-            <a:off x="3657600" y="1920240"/>
-            <a:ext cx="502920" cy="502920"/>
-          </a:xfrm>
-          <a:prstGeom prst="rect">
-            <a:avLst/>
-          </a:prstGeom>
-          <a:noFill/>
-          <a:ln/>
-        </p:spPr>
-        <p:txBody>
-          <a:bodyPr wrap="square" lIns="0" tIns="0" rIns="0" bIns="0" rtlCol="0" anchor="ctr"/>
-          <a:lstStyle/>
-          <a:p>
-            <a:pPr algn="ctr" indent="0" marL="0">
-              <a:buNone/>
-            </a:pPr>
-            <a:r>
-              <a:rPr lang="en-US" sz="2000" b="1" dirty="0">
-                <a:solidFill>
-                  <a:srgbClr val="FFFFFF"/>
-                </a:solidFill>
-                <a:latin typeface="Microsoft YaHei" pitchFamily="34" charset="0"/>
-                <a:ea typeface="Microsoft YaHei" pitchFamily="34" charset="-122"/>
-                <a:cs typeface="Microsoft YaHei" pitchFamily="34" charset="-120"/>
-              </a:rPr>
-              <a:t>2</a:t>
-            </a:r>
-            <a:endParaRPr lang="en-US" sz="2000" dirty="0"/>
-          </a:p>
-        </p:txBody>
-      </p:sp>
-      <p:sp>
-        <p:nvSpPr>
-          <p:cNvPr id="13" name="Text 11"/>
-          <p:cNvSpPr/>
-          <p:nvPr/>
-        </p:nvSpPr>
-        <p:spPr>
-          <a:xfrm>
-            <a:off x="3657600" y="2606040"/>
-            <a:ext cx="2103120" cy="365760"/>
-          </a:xfrm>
-          <a:prstGeom prst="rect">
-            <a:avLst/>
-          </a:prstGeom>
-          <a:noFill/>
-          <a:ln/>
-        </p:spPr>
-        <p:txBody>
-          <a:bodyPr wrap="square" lIns="0" tIns="0" rIns="0" bIns="0" rtlCol="0" anchor="ctr"/>
-          <a:lstStyle/>
-          <a:p>
-            <a:pPr indent="0" marL="0">
-              <a:buNone/>
-            </a:pPr>
-            <a:r>
-              <a:rPr lang="en-US" sz="1600" b="1" dirty="0">
+            <a:off x="640080" y="3886200"/>
+            <a:ext cx="7863840" cy="822960"/>
+          </a:xfrm>
+          <a:prstGeom prst="rect">
+            <a:avLst/>
+          </a:prstGeom>
+          <a:noFill/>
+          <a:ln/>
+        </p:spPr>
+        <p:txBody>
+          <a:bodyPr wrap="square" lIns="0" tIns="0" rIns="0" bIns="0" rtlCol="0" anchor="ctr"/>
+          <a:lstStyle/>
+          <a:p>
+            <a:pPr indent="0" marL="0">
+              <a:buNone/>
+            </a:pPr>
+            <a:r>
+              <a:rPr lang="en-US" sz="1400" b="1" dirty="0">
                 <a:solidFill>
                   <a:srgbClr val="26312A"/>
                 </a:solidFill>
@@ -5822,38 +7252,16 @@
                 <a:ea typeface="Microsoft YaHei" pitchFamily="34" charset="-122"/>
                 <a:cs typeface="Microsoft YaHei" pitchFamily="34" charset="-120"/>
               </a:rPr>
-              <a:t>看回报数据</a:t>
-            </a:r>
-            <a:endParaRPr lang="en-US" sz="1600" dirty="0"/>
-          </a:p>
-        </p:txBody>
-      </p:sp>
-      <p:sp>
-        <p:nvSpPr>
-          <p:cNvPr id="14" name="Text 12"/>
-          <p:cNvSpPr/>
-          <p:nvPr/>
-        </p:nvSpPr>
-        <p:spPr>
-          <a:xfrm>
-            <a:off x="3657600" y="2971800"/>
-            <a:ext cx="2103120" cy="594360"/>
-          </a:xfrm>
-          <a:prstGeom prst="rect">
-            <a:avLst/>
-          </a:prstGeom>
-          <a:noFill/>
-          <a:ln/>
-        </p:spPr>
-        <p:txBody>
-          <a:bodyPr wrap="square" lIns="0" tIns="0" rIns="0" bIns="0" rtlCol="0" anchor="ctr"/>
-          <a:lstStyle/>
-          <a:p>
-            <a:pPr indent="0" marL="0">
-              <a:buNone/>
-            </a:pPr>
-            <a:r>
-              <a:rPr lang="en-US" sz="1150" dirty="0">
+              <a:t>费用最低的 5 月，恰好是利润最高的月份 —— 这不是巧合。</a:t>
+            </a:r>
+            <a:endParaRPr lang="en-US" sz="1400" dirty="0"/>
+          </a:p>
+          <a:p>
+            <a:pPr indent="0" marL="0">
+              <a:buNone/>
+            </a:pPr>
+            <a:r>
+              <a:rPr lang="en-US" sz="1400" dirty="0">
                 <a:solidFill>
                   <a:srgbClr val="4A554C"/>
                 </a:solidFill>
@@ -5861,267 +7269,9 @@
                 <a:ea typeface="Microsoft YaHei" pitchFamily="34" charset="-122"/>
                 <a:cs typeface="Microsoft YaHei" pitchFamily="34" charset="-120"/>
               </a:rPr>
-              <a:t>算清楚：这笔钱带回多少销售</a:t>
-            </a:r>
-            <a:endParaRPr lang="en-US" sz="1150" dirty="0"/>
-          </a:p>
-        </p:txBody>
-      </p:sp>
-      <p:sp>
-        <p:nvSpPr>
-          <p:cNvPr id="15" name="Text 13"/>
-          <p:cNvSpPr/>
-          <p:nvPr/>
-        </p:nvSpPr>
-        <p:spPr>
-          <a:xfrm>
-            <a:off x="5916168" y="2377440"/>
-            <a:ext cx="457200" cy="548640"/>
-          </a:xfrm>
-          <a:prstGeom prst="rect">
-            <a:avLst/>
-          </a:prstGeom>
-          <a:noFill/>
-          <a:ln/>
-        </p:spPr>
-        <p:txBody>
-          <a:bodyPr wrap="square" lIns="0" tIns="0" rIns="0" bIns="0" rtlCol="0" anchor="ctr"/>
-          <a:lstStyle/>
-          <a:p>
-            <a:pPr algn="ctr" indent="0" marL="0">
-              <a:buNone/>
-            </a:pPr>
-            <a:r>
-              <a:rPr lang="en-US" sz="2400" b="1" dirty="0">
-                <a:solidFill>
-                  <a:srgbClr val="6B7A6E"/>
-                </a:solidFill>
-                <a:latin typeface="Microsoft YaHei" pitchFamily="34" charset="0"/>
-                <a:ea typeface="Microsoft YaHei" pitchFamily="34" charset="-122"/>
-                <a:cs typeface="Microsoft YaHei" pitchFamily="34" charset="-120"/>
-              </a:rPr>
-              <a:t>→</a:t>
-            </a:r>
-            <a:endParaRPr lang="en-US" sz="2400" dirty="0"/>
-          </a:p>
-        </p:txBody>
-      </p:sp>
-      <p:sp>
-        <p:nvSpPr>
-          <p:cNvPr id="16" name="Shape 14"/>
-          <p:cNvSpPr/>
-          <p:nvPr/>
-        </p:nvSpPr>
-        <p:spPr>
-          <a:xfrm>
-            <a:off x="6309360" y="1691640"/>
-            <a:ext cx="2514600" cy="1965960"/>
-          </a:xfrm>
-          <a:prstGeom prst="roundRect">
-            <a:avLst>
-              <a:gd name="adj" fmla="val 4186"/>
-            </a:avLst>
-          </a:prstGeom>
-          <a:solidFill>
-            <a:srgbClr val="F1F7EC"/>
-          </a:solidFill>
-          <a:ln/>
-          <a:effectLst>
-            <a:outerShdw sx="100000" sy="100000" kx="0" ky="0" algn="bl" rotWithShape="0" blurRad="88900" dist="25400" dir="2700000">
-              <a:srgbClr val="000000">
-                <a:alpha val="13000"/>
-              </a:srgbClr>
-            </a:outerShdw>
-          </a:effectLst>
-        </p:spPr>
-      </p:sp>
-      <p:sp>
-        <p:nvSpPr>
-          <p:cNvPr id="17" name="Shape 15"/>
-          <p:cNvSpPr/>
-          <p:nvPr/>
-        </p:nvSpPr>
-        <p:spPr>
-          <a:xfrm>
-            <a:off x="6537960" y="1920240"/>
-            <a:ext cx="502920" cy="502920"/>
-          </a:xfrm>
-          <a:prstGeom prst="ellipse">
-            <a:avLst/>
-          </a:prstGeom>
-          <a:solidFill>
-            <a:srgbClr val="2C6E31"/>
-          </a:solidFill>
-          <a:ln/>
-        </p:spPr>
-      </p:sp>
-      <p:sp>
-        <p:nvSpPr>
-          <p:cNvPr id="18" name="Text 16"/>
-          <p:cNvSpPr/>
-          <p:nvPr/>
-        </p:nvSpPr>
-        <p:spPr>
-          <a:xfrm>
-            <a:off x="6537960" y="1920240"/>
-            <a:ext cx="502920" cy="502920"/>
-          </a:xfrm>
-          <a:prstGeom prst="rect">
-            <a:avLst/>
-          </a:prstGeom>
-          <a:noFill/>
-          <a:ln/>
-        </p:spPr>
-        <p:txBody>
-          <a:bodyPr wrap="square" lIns="0" tIns="0" rIns="0" bIns="0" rtlCol="0" anchor="ctr"/>
-          <a:lstStyle/>
-          <a:p>
-            <a:pPr algn="ctr" indent="0" marL="0">
-              <a:buNone/>
-            </a:pPr>
-            <a:r>
-              <a:rPr lang="en-US" sz="2000" b="1" dirty="0">
-                <a:solidFill>
-                  <a:srgbClr val="FFFFFF"/>
-                </a:solidFill>
-                <a:latin typeface="Microsoft YaHei" pitchFamily="34" charset="0"/>
-                <a:ea typeface="Microsoft YaHei" pitchFamily="34" charset="-122"/>
-                <a:cs typeface="Microsoft YaHei" pitchFamily="34" charset="-120"/>
-              </a:rPr>
-              <a:t>3</a:t>
-            </a:r>
-            <a:endParaRPr lang="en-US" sz="2000" dirty="0"/>
-          </a:p>
-        </p:txBody>
-      </p:sp>
-      <p:sp>
-        <p:nvSpPr>
-          <p:cNvPr id="19" name="Text 17"/>
-          <p:cNvSpPr/>
-          <p:nvPr/>
-        </p:nvSpPr>
-        <p:spPr>
-          <a:xfrm>
-            <a:off x="6537960" y="2606040"/>
-            <a:ext cx="2103120" cy="365760"/>
-          </a:xfrm>
-          <a:prstGeom prst="rect">
-            <a:avLst/>
-          </a:prstGeom>
-          <a:noFill/>
-          <a:ln/>
-        </p:spPr>
-        <p:txBody>
-          <a:bodyPr wrap="square" lIns="0" tIns="0" rIns="0" bIns="0" rtlCol="0" anchor="ctr"/>
-          <a:lstStyle/>
-          <a:p>
-            <a:pPr indent="0" marL="0">
-              <a:buNone/>
-            </a:pPr>
-            <a:r>
-              <a:rPr lang="en-US" sz="1600" b="1" dirty="0">
-                <a:solidFill>
-                  <a:srgbClr val="26312A"/>
-                </a:solidFill>
-                <a:latin typeface="Microsoft YaHei" pitchFamily="34" charset="0"/>
-                <a:ea typeface="Microsoft YaHei" pitchFamily="34" charset="-122"/>
-                <a:cs typeface="Microsoft YaHei" pitchFamily="34" charset="-120"/>
-              </a:rPr>
-              <a:t>有效才加码</a:t>
-            </a:r>
-            <a:endParaRPr lang="en-US" sz="1600" dirty="0"/>
-          </a:p>
-        </p:txBody>
-      </p:sp>
-      <p:sp>
-        <p:nvSpPr>
-          <p:cNvPr id="20" name="Text 18"/>
-          <p:cNvSpPr/>
-          <p:nvPr/>
-        </p:nvSpPr>
-        <p:spPr>
-          <a:xfrm>
-            <a:off x="6537960" y="2971800"/>
-            <a:ext cx="2103120" cy="594360"/>
-          </a:xfrm>
-          <a:prstGeom prst="rect">
-            <a:avLst/>
-          </a:prstGeom>
-          <a:noFill/>
-          <a:ln/>
-        </p:spPr>
-        <p:txBody>
-          <a:bodyPr wrap="square" lIns="0" tIns="0" rIns="0" bIns="0" rtlCol="0" anchor="ctr"/>
-          <a:lstStyle/>
-          <a:p>
-            <a:pPr indent="0" marL="0">
-              <a:buNone/>
-            </a:pPr>
-            <a:r>
-              <a:rPr lang="en-US" sz="1150" dirty="0">
-                <a:solidFill>
-                  <a:srgbClr val="4A554C"/>
-                </a:solidFill>
-                <a:latin typeface="Microsoft YaHei" pitchFamily="34" charset="0"/>
-                <a:ea typeface="Microsoft YaHei" pitchFamily="34" charset="-122"/>
-                <a:cs typeface="Microsoft YaHei" pitchFamily="34" charset="-120"/>
-              </a:rPr>
-              <a:t>回报达标就放大，不达标立刻停掉</a:t>
-            </a:r>
-            <a:endParaRPr lang="en-US" sz="1150" dirty="0"/>
-          </a:p>
-        </p:txBody>
-      </p:sp>
-      <p:sp>
-        <p:nvSpPr>
-          <p:cNvPr id="21" name="Text 19"/>
-          <p:cNvSpPr/>
-          <p:nvPr/>
-        </p:nvSpPr>
-        <p:spPr>
-          <a:xfrm>
-            <a:off x="548640" y="4023360"/>
-            <a:ext cx="8046720" cy="548640"/>
-          </a:xfrm>
-          <a:prstGeom prst="rect">
-            <a:avLst/>
-          </a:prstGeom>
-          <a:noFill/>
-          <a:ln/>
-        </p:spPr>
-        <p:txBody>
-          <a:bodyPr wrap="square" lIns="0" tIns="0" rIns="0" bIns="0" rtlCol="0" anchor="ctr"/>
-          <a:lstStyle/>
-          <a:p>
-            <a:pPr indent="0" marL="0">
-              <a:buNone/>
-            </a:pPr>
-            <a:r>
-              <a:rPr lang="en-US" sz="1500" b="1" dirty="0">
-                <a:solidFill>
-                  <a:srgbClr val="2C6E31"/>
-                </a:solidFill>
-                <a:latin typeface="Microsoft YaHei" pitchFamily="34" charset="0"/>
-                <a:ea typeface="Microsoft YaHei" pitchFamily="34" charset="-122"/>
-                <a:cs typeface="Microsoft YaHei" pitchFamily="34" charset="-120"/>
-              </a:rPr>
-              <a:t>H2 只有一条营销纪律：</a:t>
-            </a:r>
-            <a:pPr indent="0" marL="0">
-              <a:buNone/>
-            </a:pPr>
-            <a:r>
-              <a:rPr lang="en-US" sz="1500" dirty="0">
-                <a:solidFill>
-                  <a:srgbClr val="26312A"/>
-                </a:solidFill>
-                <a:latin typeface="Microsoft YaHei" pitchFamily="34" charset="0"/>
-                <a:ea typeface="Microsoft YaHei" pitchFamily="34" charset="-122"/>
-                <a:cs typeface="Microsoft YaHei" pitchFamily="34" charset="-120"/>
-              </a:rPr>
-              <a:t>每一笔投放，都必须回答 “带回了多少销售”。回答不了，就不花。</a:t>
-            </a:r>
-            <a:endParaRPr lang="en-US" sz="1500" dirty="0"/>
+              <a:t>每月省下约 RM 57,000，一年就是接近 RM 700,000 的利润空间。</a:t>
+            </a:r>
+            <a:endParaRPr lang="en-US" sz="1400" dirty="0"/>
           </a:p>
         </p:txBody>
       </p:sp>
@@ -6190,7 +7340,7 @@
                 <a:ea typeface="Microsoft YaHei" pitchFamily="34" charset="-122"/>
                 <a:cs typeface="Microsoft YaHei" pitchFamily="34" charset="-120"/>
               </a:rPr>
-              <a:t>原因三：货压在仓库里，现金就不能动</a:t>
+              <a:t>原因二：营销的钱，要花在看得见回报的地方</a:t>
             </a:r>
             <a:endParaRPr lang="en-US" sz="2700" dirty="0"/>
           </a:p>
@@ -6198,22 +7348,61 @@
       </p:sp>
       <p:sp>
         <p:nvSpPr>
-          <p:cNvPr id="3" name="Shape 1"/>
-          <p:cNvSpPr/>
-          <p:nvPr/>
-        </p:nvSpPr>
-        <p:spPr>
-          <a:xfrm>
-            <a:off x="640080" y="1234440"/>
-            <a:ext cx="3749040" cy="1371600"/>
+          <p:cNvPr id="3" name="Text 1"/>
+          <p:cNvSpPr/>
+          <p:nvPr/>
+        </p:nvSpPr>
+        <p:spPr>
+          <a:xfrm>
+            <a:off x="457200" y="1051560"/>
+            <a:ext cx="8229600" cy="411480"/>
+          </a:xfrm>
+          <a:prstGeom prst="rect">
+            <a:avLst/>
+          </a:prstGeom>
+          <a:noFill/>
+          <a:ln/>
+        </p:spPr>
+        <p:txBody>
+          <a:bodyPr wrap="square" lIns="0" tIns="0" rIns="0" bIns="0" rtlCol="0" anchor="ctr"/>
+          <a:lstStyle/>
+          <a:p>
+            <a:pPr indent="0" marL="0">
+              <a:buNone/>
+            </a:pPr>
+            <a:r>
+              <a:rPr lang="en-US" sz="1450" dirty="0">
+                <a:solidFill>
+                  <a:srgbClr val="26312A"/>
+                </a:solidFill>
+                <a:latin typeface="Microsoft YaHei" pitchFamily="34" charset="0"/>
+                <a:ea typeface="Microsoft YaHei" pitchFamily="34" charset="-122"/>
+                <a:cs typeface="Microsoft YaHei" pitchFamily="34" charset="-120"/>
+              </a:rPr>
+              <a:t>上半年的问题：投放分散、凭感觉加码，没有用回报来决定花多少。</a:t>
+            </a:r>
+            <a:endParaRPr lang="en-US" sz="1450" dirty="0"/>
+          </a:p>
+        </p:txBody>
+      </p:sp>
+      <p:sp>
+        <p:nvSpPr>
+          <p:cNvPr id="4" name="Shape 2"/>
+          <p:cNvSpPr/>
+          <p:nvPr/>
+        </p:nvSpPr>
+        <p:spPr>
+          <a:xfrm>
+            <a:off x="548640" y="1691640"/>
+            <a:ext cx="2514600" cy="1965960"/>
           </a:xfrm>
           <a:prstGeom prst="roundRect">
             <a:avLst>
-              <a:gd name="adj" fmla="val 6000"/>
+              <a:gd name="adj" fmla="val 4186"/>
             </a:avLst>
           </a:prstGeom>
           <a:solidFill>
-            <a:srgbClr val="FBEFEE"/>
+            <a:srgbClr val="F1F7EC"/>
           </a:solidFill>
           <a:ln/>
           <a:effectLst>
@@ -6225,56 +7414,169 @@
           </a:effectLst>
         </p:spPr>
       </p:sp>
-      <p:pic>
-        <p:nvPicPr>
-          <p:cNvPr id="4" name="Image 0" descr="preencoded.png">    </p:cNvPr>
-          <p:cNvPicPr>
-            <a:picLocks noChangeAspect="1"/>
-          </p:cNvPicPr>
-          <p:nvPr/>
-        </p:nvPicPr>
-        <p:blipFill>
-          <a:blip r:embed="rId1"/>
-          <a:stretch>
-            <a:fillRect/>
-          </a:stretch>
-        </p:blipFill>
-        <p:spPr>
-          <a:xfrm>
-            <a:off x="914400" y="1508760"/>
-            <a:ext cx="411480" cy="411480"/>
-          </a:xfrm>
-          <a:prstGeom prst="rect">
-            <a:avLst/>
-          </a:prstGeom>
-        </p:spPr>
-      </p:pic>
-      <p:sp>
-        <p:nvSpPr>
-          <p:cNvPr id="5" name="Text 2"/>
-          <p:cNvSpPr/>
-          <p:nvPr/>
-        </p:nvSpPr>
-        <p:spPr>
-          <a:xfrm>
-            <a:off x="1508760" y="1417320"/>
-            <a:ext cx="2651760" cy="320040"/>
-          </a:xfrm>
-          <a:prstGeom prst="rect">
-            <a:avLst/>
-          </a:prstGeom>
-          <a:noFill/>
-          <a:ln/>
-        </p:spPr>
-        <p:txBody>
-          <a:bodyPr wrap="square" lIns="0" tIns="0" rIns="0" bIns="0" rtlCol="0" anchor="ctr"/>
-          <a:lstStyle/>
-          <a:p>
-            <a:pPr indent="0" marL="0">
-              <a:buNone/>
-            </a:pPr>
-            <a:r>
-              <a:rPr lang="en-US" sz="1300" dirty="0">
+      <p:sp>
+        <p:nvSpPr>
+          <p:cNvPr id="5" name="Shape 3"/>
+          <p:cNvSpPr/>
+          <p:nvPr/>
+        </p:nvSpPr>
+        <p:spPr>
+          <a:xfrm>
+            <a:off x="777240" y="1920240"/>
+            <a:ext cx="502920" cy="502920"/>
+          </a:xfrm>
+          <a:prstGeom prst="ellipse">
+            <a:avLst/>
+          </a:prstGeom>
+          <a:solidFill>
+            <a:srgbClr val="2C6E31"/>
+          </a:solidFill>
+          <a:ln/>
+        </p:spPr>
+      </p:sp>
+      <p:sp>
+        <p:nvSpPr>
+          <p:cNvPr id="6" name="Text 4"/>
+          <p:cNvSpPr/>
+          <p:nvPr/>
+        </p:nvSpPr>
+        <p:spPr>
+          <a:xfrm>
+            <a:off x="777240" y="1920240"/>
+            <a:ext cx="502920" cy="502920"/>
+          </a:xfrm>
+          <a:prstGeom prst="rect">
+            <a:avLst/>
+          </a:prstGeom>
+          <a:noFill/>
+          <a:ln/>
+        </p:spPr>
+        <p:txBody>
+          <a:bodyPr wrap="square" lIns="0" tIns="0" rIns="0" bIns="0" rtlCol="0" anchor="ctr"/>
+          <a:lstStyle/>
+          <a:p>
+            <a:pPr algn="ctr" indent="0" marL="0">
+              <a:buNone/>
+            </a:pPr>
+            <a:r>
+              <a:rPr lang="en-US" sz="2000" b="1" dirty="0">
+                <a:solidFill>
+                  <a:srgbClr val="FFFFFF"/>
+                </a:solidFill>
+                <a:latin typeface="Microsoft YaHei" pitchFamily="34" charset="0"/>
+                <a:ea typeface="Microsoft YaHei" pitchFamily="34" charset="-122"/>
+                <a:cs typeface="Microsoft YaHei" pitchFamily="34" charset="-120"/>
+              </a:rPr>
+              <a:t>1</a:t>
+            </a:r>
+            <a:endParaRPr lang="en-US" sz="2000" dirty="0"/>
+          </a:p>
+        </p:txBody>
+      </p:sp>
+      <p:sp>
+        <p:nvSpPr>
+          <p:cNvPr id="7" name="Text 5"/>
+          <p:cNvSpPr/>
+          <p:nvPr/>
+        </p:nvSpPr>
+        <p:spPr>
+          <a:xfrm>
+            <a:off x="777240" y="2606040"/>
+            <a:ext cx="2103120" cy="365760"/>
+          </a:xfrm>
+          <a:prstGeom prst="rect">
+            <a:avLst/>
+          </a:prstGeom>
+          <a:noFill/>
+          <a:ln/>
+        </p:spPr>
+        <p:txBody>
+          <a:bodyPr wrap="square" lIns="0" tIns="0" rIns="0" bIns="0" rtlCol="0" anchor="ctr"/>
+          <a:lstStyle/>
+          <a:p>
+            <a:pPr indent="0" marL="0">
+              <a:buNone/>
+            </a:pPr>
+            <a:r>
+              <a:rPr lang="en-US" sz="1600" b="1" dirty="0">
+                <a:solidFill>
+                  <a:srgbClr val="26312A"/>
+                </a:solidFill>
+                <a:latin typeface="Microsoft YaHei" pitchFamily="34" charset="0"/>
+                <a:ea typeface="Microsoft YaHei" pitchFamily="34" charset="-122"/>
+                <a:cs typeface="Microsoft YaHei" pitchFamily="34" charset="-120"/>
+              </a:rPr>
+              <a:t>小额测试</a:t>
+            </a:r>
+            <a:endParaRPr lang="en-US" sz="1600" dirty="0"/>
+          </a:p>
+        </p:txBody>
+      </p:sp>
+      <p:sp>
+        <p:nvSpPr>
+          <p:cNvPr id="8" name="Text 6"/>
+          <p:cNvSpPr/>
+          <p:nvPr/>
+        </p:nvSpPr>
+        <p:spPr>
+          <a:xfrm>
+            <a:off x="777240" y="2971800"/>
+            <a:ext cx="2103120" cy="594360"/>
+          </a:xfrm>
+          <a:prstGeom prst="rect">
+            <a:avLst/>
+          </a:prstGeom>
+          <a:noFill/>
+          <a:ln/>
+        </p:spPr>
+        <p:txBody>
+          <a:bodyPr wrap="square" lIns="0" tIns="0" rIns="0" bIns="0" rtlCol="0" anchor="ctr"/>
+          <a:lstStyle/>
+          <a:p>
+            <a:pPr indent="0" marL="0">
+              <a:buNone/>
+            </a:pPr>
+            <a:r>
+              <a:rPr lang="en-US" sz="1150" dirty="0">
+                <a:solidFill>
+                  <a:srgbClr val="4A554C"/>
+                </a:solidFill>
+                <a:latin typeface="Microsoft YaHei" pitchFamily="34" charset="0"/>
+                <a:ea typeface="Microsoft YaHei" pitchFamily="34" charset="-122"/>
+                <a:cs typeface="Microsoft YaHei" pitchFamily="34" charset="-120"/>
+              </a:rPr>
+              <a:t>每个渠道、每档活动，先用小预算试跑</a:t>
+            </a:r>
+            <a:endParaRPr lang="en-US" sz="1150" dirty="0"/>
+          </a:p>
+        </p:txBody>
+      </p:sp>
+      <p:sp>
+        <p:nvSpPr>
+          <p:cNvPr id="9" name="Text 7"/>
+          <p:cNvSpPr/>
+          <p:nvPr/>
+        </p:nvSpPr>
+        <p:spPr>
+          <a:xfrm>
+            <a:off x="3035808" y="2377440"/>
+            <a:ext cx="457200" cy="548640"/>
+          </a:xfrm>
+          <a:prstGeom prst="rect">
+            <a:avLst/>
+          </a:prstGeom>
+          <a:noFill/>
+          <a:ln/>
+        </p:spPr>
+        <p:txBody>
+          <a:bodyPr wrap="square" lIns="0" tIns="0" rIns="0" bIns="0" rtlCol="0" anchor="ctr"/>
+          <a:lstStyle/>
+          <a:p>
+            <a:pPr algn="ctr" indent="0" marL="0">
+              <a:buNone/>
+            </a:pPr>
+            <a:r>
+              <a:rPr lang="en-US" sz="2400" b="1" dirty="0">
                 <a:solidFill>
                   <a:srgbClr val="6B7A6E"/>
                 </a:solidFill>
@@ -6282,69 +7584,30 @@
                 <a:ea typeface="Microsoft YaHei" pitchFamily="34" charset="-122"/>
                 <a:cs typeface="Microsoft YaHei" pitchFamily="34" charset="-120"/>
               </a:rPr>
-              <a:t>目前库存金额</a:t>
-            </a:r>
-            <a:endParaRPr lang="en-US" sz="1300" dirty="0"/>
-          </a:p>
-        </p:txBody>
-      </p:sp>
-      <p:sp>
-        <p:nvSpPr>
-          <p:cNvPr id="6" name="Text 3"/>
-          <p:cNvSpPr/>
-          <p:nvPr/>
-        </p:nvSpPr>
-        <p:spPr>
-          <a:xfrm>
-            <a:off x="1508760" y="1737360"/>
-            <a:ext cx="2743200" cy="548640"/>
-          </a:xfrm>
-          <a:prstGeom prst="rect">
-            <a:avLst/>
-          </a:prstGeom>
-          <a:noFill/>
-          <a:ln/>
-        </p:spPr>
-        <p:txBody>
-          <a:bodyPr wrap="square" lIns="0" tIns="0" rIns="0" bIns="0" rtlCol="0" anchor="ctr"/>
-          <a:lstStyle/>
-          <a:p>
-            <a:pPr indent="0" marL="0">
-              <a:buNone/>
-            </a:pPr>
-            <a:r>
-              <a:rPr lang="en-US" sz="2600" b="1" dirty="0">
-                <a:solidFill>
-                  <a:srgbClr val="C2453A"/>
-                </a:solidFill>
-                <a:latin typeface="Microsoft YaHei" pitchFamily="34" charset="0"/>
-                <a:ea typeface="Microsoft YaHei" pitchFamily="34" charset="-122"/>
-                <a:cs typeface="Microsoft YaHei" pitchFamily="34" charset="-120"/>
-              </a:rPr>
-              <a:t>RM 1,065,000</a:t>
-            </a:r>
-            <a:endParaRPr lang="en-US" sz="2600" dirty="0"/>
-          </a:p>
-        </p:txBody>
-      </p:sp>
-      <p:sp>
-        <p:nvSpPr>
-          <p:cNvPr id="7" name="Shape 4"/>
-          <p:cNvSpPr/>
-          <p:nvPr/>
-        </p:nvSpPr>
-        <p:spPr>
-          <a:xfrm>
-            <a:off x="4754880" y="1234440"/>
-            <a:ext cx="3749040" cy="1371600"/>
+              <a:t>→</a:t>
+            </a:r>
+            <a:endParaRPr lang="en-US" sz="2400" dirty="0"/>
+          </a:p>
+        </p:txBody>
+      </p:sp>
+      <p:sp>
+        <p:nvSpPr>
+          <p:cNvPr id="10" name="Shape 8"/>
+          <p:cNvSpPr/>
+          <p:nvPr/>
+        </p:nvSpPr>
+        <p:spPr>
+          <a:xfrm>
+            <a:off x="3429000" y="1691640"/>
+            <a:ext cx="2514600" cy="1965960"/>
           </a:xfrm>
           <a:prstGeom prst="roundRect">
             <a:avLst>
-              <a:gd name="adj" fmla="val 6000"/>
+              <a:gd name="adj" fmla="val 4186"/>
             </a:avLst>
           </a:prstGeom>
           <a:solidFill>
-            <a:srgbClr val="FBEFEE"/>
+            <a:srgbClr val="F1F7EC"/>
           </a:solidFill>
           <a:ln/>
           <a:effectLst>
@@ -6356,56 +7619,169 @@
           </a:effectLst>
         </p:spPr>
       </p:sp>
-      <p:pic>
-        <p:nvPicPr>
-          <p:cNvPr id="8" name="Image 1" descr="preencoded.png">    </p:cNvPr>
-          <p:cNvPicPr>
-            <a:picLocks noChangeAspect="1"/>
-          </p:cNvPicPr>
-          <p:nvPr/>
-        </p:nvPicPr>
-        <p:blipFill>
-          <a:blip r:embed="rId2"/>
-          <a:stretch>
-            <a:fillRect/>
-          </a:stretch>
-        </p:blipFill>
-        <p:spPr>
-          <a:xfrm>
-            <a:off x="5029200" y="1508760"/>
-            <a:ext cx="411480" cy="411480"/>
-          </a:xfrm>
-          <a:prstGeom prst="rect">
-            <a:avLst/>
-          </a:prstGeom>
-        </p:spPr>
-      </p:pic>
-      <p:sp>
-        <p:nvSpPr>
-          <p:cNvPr id="9" name="Text 5"/>
-          <p:cNvSpPr/>
-          <p:nvPr/>
-        </p:nvSpPr>
-        <p:spPr>
-          <a:xfrm>
-            <a:off x="5623560" y="1417320"/>
-            <a:ext cx="2651760" cy="320040"/>
-          </a:xfrm>
-          <a:prstGeom prst="rect">
-            <a:avLst/>
-          </a:prstGeom>
-          <a:noFill/>
-          <a:ln/>
-        </p:spPr>
-        <p:txBody>
-          <a:bodyPr wrap="square" lIns="0" tIns="0" rIns="0" bIns="0" rtlCol="0" anchor="ctr"/>
-          <a:lstStyle/>
-          <a:p>
-            <a:pPr indent="0" marL="0">
-              <a:buNone/>
-            </a:pPr>
-            <a:r>
-              <a:rPr lang="en-US" sz="1300" dirty="0">
+      <p:sp>
+        <p:nvSpPr>
+          <p:cNvPr id="11" name="Shape 9"/>
+          <p:cNvSpPr/>
+          <p:nvPr/>
+        </p:nvSpPr>
+        <p:spPr>
+          <a:xfrm>
+            <a:off x="3657600" y="1920240"/>
+            <a:ext cx="502920" cy="502920"/>
+          </a:xfrm>
+          <a:prstGeom prst="ellipse">
+            <a:avLst/>
+          </a:prstGeom>
+          <a:solidFill>
+            <a:srgbClr val="2C6E31"/>
+          </a:solidFill>
+          <a:ln/>
+        </p:spPr>
+      </p:sp>
+      <p:sp>
+        <p:nvSpPr>
+          <p:cNvPr id="12" name="Text 10"/>
+          <p:cNvSpPr/>
+          <p:nvPr/>
+        </p:nvSpPr>
+        <p:spPr>
+          <a:xfrm>
+            <a:off x="3657600" y="1920240"/>
+            <a:ext cx="502920" cy="502920"/>
+          </a:xfrm>
+          <a:prstGeom prst="rect">
+            <a:avLst/>
+          </a:prstGeom>
+          <a:noFill/>
+          <a:ln/>
+        </p:spPr>
+        <p:txBody>
+          <a:bodyPr wrap="square" lIns="0" tIns="0" rIns="0" bIns="0" rtlCol="0" anchor="ctr"/>
+          <a:lstStyle/>
+          <a:p>
+            <a:pPr algn="ctr" indent="0" marL="0">
+              <a:buNone/>
+            </a:pPr>
+            <a:r>
+              <a:rPr lang="en-US" sz="2000" b="1" dirty="0">
+                <a:solidFill>
+                  <a:srgbClr val="FFFFFF"/>
+                </a:solidFill>
+                <a:latin typeface="Microsoft YaHei" pitchFamily="34" charset="0"/>
+                <a:ea typeface="Microsoft YaHei" pitchFamily="34" charset="-122"/>
+                <a:cs typeface="Microsoft YaHei" pitchFamily="34" charset="-120"/>
+              </a:rPr>
+              <a:t>2</a:t>
+            </a:r>
+            <a:endParaRPr lang="en-US" sz="2000" dirty="0"/>
+          </a:p>
+        </p:txBody>
+      </p:sp>
+      <p:sp>
+        <p:nvSpPr>
+          <p:cNvPr id="13" name="Text 11"/>
+          <p:cNvSpPr/>
+          <p:nvPr/>
+        </p:nvSpPr>
+        <p:spPr>
+          <a:xfrm>
+            <a:off x="3657600" y="2606040"/>
+            <a:ext cx="2103120" cy="365760"/>
+          </a:xfrm>
+          <a:prstGeom prst="rect">
+            <a:avLst/>
+          </a:prstGeom>
+          <a:noFill/>
+          <a:ln/>
+        </p:spPr>
+        <p:txBody>
+          <a:bodyPr wrap="square" lIns="0" tIns="0" rIns="0" bIns="0" rtlCol="0" anchor="ctr"/>
+          <a:lstStyle/>
+          <a:p>
+            <a:pPr indent="0" marL="0">
+              <a:buNone/>
+            </a:pPr>
+            <a:r>
+              <a:rPr lang="en-US" sz="1600" b="1" dirty="0">
+                <a:solidFill>
+                  <a:srgbClr val="26312A"/>
+                </a:solidFill>
+                <a:latin typeface="Microsoft YaHei" pitchFamily="34" charset="0"/>
+                <a:ea typeface="Microsoft YaHei" pitchFamily="34" charset="-122"/>
+                <a:cs typeface="Microsoft YaHei" pitchFamily="34" charset="-120"/>
+              </a:rPr>
+              <a:t>看回报数据</a:t>
+            </a:r>
+            <a:endParaRPr lang="en-US" sz="1600" dirty="0"/>
+          </a:p>
+        </p:txBody>
+      </p:sp>
+      <p:sp>
+        <p:nvSpPr>
+          <p:cNvPr id="14" name="Text 12"/>
+          <p:cNvSpPr/>
+          <p:nvPr/>
+        </p:nvSpPr>
+        <p:spPr>
+          <a:xfrm>
+            <a:off x="3657600" y="2971800"/>
+            <a:ext cx="2103120" cy="594360"/>
+          </a:xfrm>
+          <a:prstGeom prst="rect">
+            <a:avLst/>
+          </a:prstGeom>
+          <a:noFill/>
+          <a:ln/>
+        </p:spPr>
+        <p:txBody>
+          <a:bodyPr wrap="square" lIns="0" tIns="0" rIns="0" bIns="0" rtlCol="0" anchor="ctr"/>
+          <a:lstStyle/>
+          <a:p>
+            <a:pPr indent="0" marL="0">
+              <a:buNone/>
+            </a:pPr>
+            <a:r>
+              <a:rPr lang="en-US" sz="1150" dirty="0">
+                <a:solidFill>
+                  <a:srgbClr val="4A554C"/>
+                </a:solidFill>
+                <a:latin typeface="Microsoft YaHei" pitchFamily="34" charset="0"/>
+                <a:ea typeface="Microsoft YaHei" pitchFamily="34" charset="-122"/>
+                <a:cs typeface="Microsoft YaHei" pitchFamily="34" charset="-120"/>
+              </a:rPr>
+              <a:t>算清楚：这笔钱带回多少销售</a:t>
+            </a:r>
+            <a:endParaRPr lang="en-US" sz="1150" dirty="0"/>
+          </a:p>
+        </p:txBody>
+      </p:sp>
+      <p:sp>
+        <p:nvSpPr>
+          <p:cNvPr id="15" name="Text 13"/>
+          <p:cNvSpPr/>
+          <p:nvPr/>
+        </p:nvSpPr>
+        <p:spPr>
+          <a:xfrm>
+            <a:off x="5916168" y="2377440"/>
+            <a:ext cx="457200" cy="548640"/>
+          </a:xfrm>
+          <a:prstGeom prst="rect">
+            <a:avLst/>
+          </a:prstGeom>
+          <a:noFill/>
+          <a:ln/>
+        </p:spPr>
+        <p:txBody>
+          <a:bodyPr wrap="square" lIns="0" tIns="0" rIns="0" bIns="0" rtlCol="0" anchor="ctr"/>
+          <a:lstStyle/>
+          <a:p>
+            <a:pPr algn="ctr" indent="0" marL="0">
+              <a:buNone/>
+            </a:pPr>
+            <a:r>
+              <a:rPr lang="en-US" sz="2400" b="1" dirty="0">
                 <a:solidFill>
                   <a:srgbClr val="6B7A6E"/>
                 </a:solidFill>
@@ -6413,61 +7789,71 @@
                 <a:ea typeface="Microsoft YaHei" pitchFamily="34" charset="-122"/>
                 <a:cs typeface="Microsoft YaHei" pitchFamily="34" charset="-120"/>
               </a:rPr>
-              <a:t>库存周转天数</a:t>
-            </a:r>
-            <a:endParaRPr lang="en-US" sz="1300" dirty="0"/>
-          </a:p>
-        </p:txBody>
-      </p:sp>
-      <p:sp>
-        <p:nvSpPr>
-          <p:cNvPr id="10" name="Text 6"/>
-          <p:cNvSpPr/>
-          <p:nvPr/>
-        </p:nvSpPr>
-        <p:spPr>
-          <a:xfrm>
-            <a:off x="5623560" y="1737360"/>
-            <a:ext cx="2743200" cy="548640"/>
-          </a:xfrm>
-          <a:prstGeom prst="rect">
-            <a:avLst/>
-          </a:prstGeom>
-          <a:noFill/>
-          <a:ln/>
-        </p:spPr>
-        <p:txBody>
-          <a:bodyPr wrap="square" lIns="0" tIns="0" rIns="0" bIns="0" rtlCol="0" anchor="ctr"/>
-          <a:lstStyle/>
-          <a:p>
-            <a:pPr indent="0" marL="0">
-              <a:buNone/>
-            </a:pPr>
-            <a:r>
-              <a:rPr lang="en-US" sz="2600" b="1" dirty="0">
-                <a:solidFill>
-                  <a:srgbClr val="C2453A"/>
-                </a:solidFill>
-                <a:latin typeface="Microsoft YaHei" pitchFamily="34" charset="0"/>
-                <a:ea typeface="Microsoft YaHei" pitchFamily="34" charset="-122"/>
-                <a:cs typeface="Microsoft YaHei" pitchFamily="34" charset="-120"/>
-              </a:rPr>
-              <a:t>132 天</a:t>
-            </a:r>
-            <a:endParaRPr lang="en-US" sz="2600" dirty="0"/>
-          </a:p>
-        </p:txBody>
-      </p:sp>
-      <p:sp>
-        <p:nvSpPr>
-          <p:cNvPr id="11" name="Text 7"/>
-          <p:cNvSpPr/>
-          <p:nvPr/>
-        </p:nvSpPr>
-        <p:spPr>
-          <a:xfrm>
-            <a:off x="640080" y="2926080"/>
-            <a:ext cx="7863840" cy="548640"/>
+              <a:t>→</a:t>
+            </a:r>
+            <a:endParaRPr lang="en-US" sz="2400" dirty="0"/>
+          </a:p>
+        </p:txBody>
+      </p:sp>
+      <p:sp>
+        <p:nvSpPr>
+          <p:cNvPr id="16" name="Shape 14"/>
+          <p:cNvSpPr/>
+          <p:nvPr/>
+        </p:nvSpPr>
+        <p:spPr>
+          <a:xfrm>
+            <a:off x="6309360" y="1691640"/>
+            <a:ext cx="2514600" cy="1965960"/>
+          </a:xfrm>
+          <a:prstGeom prst="roundRect">
+            <a:avLst>
+              <a:gd name="adj" fmla="val 4186"/>
+            </a:avLst>
+          </a:prstGeom>
+          <a:solidFill>
+            <a:srgbClr val="F1F7EC"/>
+          </a:solidFill>
+          <a:ln/>
+          <a:effectLst>
+            <a:outerShdw sx="100000" sy="100000" kx="0" ky="0" algn="bl" rotWithShape="0" blurRad="88900" dist="25400" dir="2700000">
+              <a:srgbClr val="000000">
+                <a:alpha val="13000"/>
+              </a:srgbClr>
+            </a:outerShdw>
+          </a:effectLst>
+        </p:spPr>
+      </p:sp>
+      <p:sp>
+        <p:nvSpPr>
+          <p:cNvPr id="17" name="Shape 15"/>
+          <p:cNvSpPr/>
+          <p:nvPr/>
+        </p:nvSpPr>
+        <p:spPr>
+          <a:xfrm>
+            <a:off x="6537960" y="1920240"/>
+            <a:ext cx="502920" cy="502920"/>
+          </a:xfrm>
+          <a:prstGeom prst="ellipse">
+            <a:avLst/>
+          </a:prstGeom>
+          <a:solidFill>
+            <a:srgbClr val="2C6E31"/>
+          </a:solidFill>
+          <a:ln/>
+        </p:spPr>
+      </p:sp>
+      <p:sp>
+        <p:nvSpPr>
+          <p:cNvPr id="18" name="Text 16"/>
+          <p:cNvSpPr/>
+          <p:nvPr/>
+        </p:nvSpPr>
+        <p:spPr>
+          <a:xfrm>
+            <a:off x="6537960" y="1920240"/>
+            <a:ext cx="502920" cy="502920"/>
           </a:xfrm>
           <a:prstGeom prst="rect">
             <a:avLst/>
@@ -6483,129 +7869,148 @@
               <a:buNone/>
             </a:pPr>
             <a:r>
-              <a:rPr lang="en-US" sz="2200" b="1" dirty="0">
-                <a:solidFill>
-                  <a:srgbClr val="C2453A"/>
-                </a:solidFill>
-                <a:latin typeface="Microsoft YaHei" pitchFamily="34" charset="0"/>
-                <a:ea typeface="Microsoft YaHei" pitchFamily="34" charset="-122"/>
-                <a:cs typeface="Microsoft YaHei" pitchFamily="34" charset="-120"/>
-              </a:rPr>
-              <a:t>132 天 </a:t>
-            </a:r>
-            <a:pPr algn="ctr" indent="0" marL="0">
+              <a:rPr lang="en-US" sz="2000" b="1" dirty="0">
+                <a:solidFill>
+                  <a:srgbClr val="FFFFFF"/>
+                </a:solidFill>
+                <a:latin typeface="Microsoft YaHei" pitchFamily="34" charset="0"/>
+                <a:ea typeface="Microsoft YaHei" pitchFamily="34" charset="-122"/>
+                <a:cs typeface="Microsoft YaHei" pitchFamily="34" charset="-120"/>
+              </a:rPr>
+              <a:t>3</a:t>
+            </a:r>
+            <a:endParaRPr lang="en-US" sz="2000" dirty="0"/>
+          </a:p>
+        </p:txBody>
+      </p:sp>
+      <p:sp>
+        <p:nvSpPr>
+          <p:cNvPr id="19" name="Text 17"/>
+          <p:cNvSpPr/>
+          <p:nvPr/>
+        </p:nvSpPr>
+        <p:spPr>
+          <a:xfrm>
+            <a:off x="6537960" y="2606040"/>
+            <a:ext cx="2103120" cy="365760"/>
+          </a:xfrm>
+          <a:prstGeom prst="rect">
+            <a:avLst/>
+          </a:prstGeom>
+          <a:noFill/>
+          <a:ln/>
+        </p:spPr>
+        <p:txBody>
+          <a:bodyPr wrap="square" lIns="0" tIns="0" rIns="0" bIns="0" rtlCol="0" anchor="ctr"/>
+          <a:lstStyle/>
+          <a:p>
+            <a:pPr indent="0" marL="0">
+              <a:buNone/>
+            </a:pPr>
+            <a:r>
+              <a:rPr lang="en-US" sz="1600" b="1" dirty="0">
+                <a:solidFill>
+                  <a:srgbClr val="26312A"/>
+                </a:solidFill>
+                <a:latin typeface="Microsoft YaHei" pitchFamily="34" charset="0"/>
+                <a:ea typeface="Microsoft YaHei" pitchFamily="34" charset="-122"/>
+                <a:cs typeface="Microsoft YaHei" pitchFamily="34" charset="-120"/>
+              </a:rPr>
+              <a:t>有效才加码</a:t>
+            </a:r>
+            <a:endParaRPr lang="en-US" sz="1600" dirty="0"/>
+          </a:p>
+        </p:txBody>
+      </p:sp>
+      <p:sp>
+        <p:nvSpPr>
+          <p:cNvPr id="20" name="Text 18"/>
+          <p:cNvSpPr/>
+          <p:nvPr/>
+        </p:nvSpPr>
+        <p:spPr>
+          <a:xfrm>
+            <a:off x="6537960" y="2971800"/>
+            <a:ext cx="2103120" cy="594360"/>
+          </a:xfrm>
+          <a:prstGeom prst="rect">
+            <a:avLst/>
+          </a:prstGeom>
+          <a:noFill/>
+          <a:ln/>
+        </p:spPr>
+        <p:txBody>
+          <a:bodyPr wrap="square" lIns="0" tIns="0" rIns="0" bIns="0" rtlCol="0" anchor="ctr"/>
+          <a:lstStyle/>
+          <a:p>
+            <a:pPr indent="0" marL="0">
+              <a:buNone/>
+            </a:pPr>
+            <a:r>
+              <a:rPr lang="en-US" sz="1150" dirty="0">
+                <a:solidFill>
+                  <a:srgbClr val="4A554C"/>
+                </a:solidFill>
+                <a:latin typeface="Microsoft YaHei" pitchFamily="34" charset="0"/>
+                <a:ea typeface="Microsoft YaHei" pitchFamily="34" charset="-122"/>
+                <a:cs typeface="Microsoft YaHei" pitchFamily="34" charset="-120"/>
+              </a:rPr>
+              <a:t>回报达标就放大，不达标立刻停掉</a:t>
+            </a:r>
+            <a:endParaRPr lang="en-US" sz="1150" dirty="0"/>
+          </a:p>
+        </p:txBody>
+      </p:sp>
+      <p:sp>
+        <p:nvSpPr>
+          <p:cNvPr id="21" name="Text 19"/>
+          <p:cNvSpPr/>
+          <p:nvPr/>
+        </p:nvSpPr>
+        <p:spPr>
+          <a:xfrm>
+            <a:off x="548640" y="4023360"/>
+            <a:ext cx="8046720" cy="548640"/>
+          </a:xfrm>
+          <a:prstGeom prst="rect">
+            <a:avLst/>
+          </a:prstGeom>
+          <a:noFill/>
+          <a:ln/>
+        </p:spPr>
+        <p:txBody>
+          <a:bodyPr wrap="square" lIns="0" tIns="0" rIns="0" bIns="0" rtlCol="0" anchor="ctr"/>
+          <a:lstStyle/>
+          <a:p>
+            <a:pPr indent="0" marL="0">
+              <a:buNone/>
+            </a:pPr>
+            <a:r>
+              <a:rPr lang="en-US" sz="1500" b="1" dirty="0">
+                <a:solidFill>
+                  <a:srgbClr val="2C6E31"/>
+                </a:solidFill>
+                <a:latin typeface="Microsoft YaHei" pitchFamily="34" charset="0"/>
+                <a:ea typeface="Microsoft YaHei" pitchFamily="34" charset="-122"/>
+                <a:cs typeface="Microsoft YaHei" pitchFamily="34" charset="-120"/>
+              </a:rPr>
+              <a:t>H2 只有一条营销纪律：</a:t>
+            </a:r>
+            <a:pPr indent="0" marL="0">
               <a:buNone/>
             </a:pPr>
             <a:r>
               <a:rPr lang="en-US" sz="1500" dirty="0">
                 <a:solidFill>
-                  <a:srgbClr val="6B7A6E"/>
-                </a:solidFill>
-                <a:latin typeface="Microsoft YaHei" pitchFamily="34" charset="0"/>
-                <a:ea typeface="Microsoft YaHei" pitchFamily="34" charset="-122"/>
-                <a:cs typeface="Microsoft YaHei" pitchFamily="34" charset="-120"/>
-              </a:rPr>
-              <a:t> 压到 </a:t>
-            </a:r>
-            <a:pPr algn="ctr" indent="0" marL="0">
-              <a:buNone/>
-            </a:pPr>
-            <a:r>
-              <a:rPr lang="en-US" sz="2200" b="1" dirty="0">
-                <a:solidFill>
-                  <a:srgbClr val="2C6E31"/>
-                </a:solidFill>
-                <a:latin typeface="Microsoft YaHei" pitchFamily="34" charset="0"/>
-                <a:ea typeface="Microsoft YaHei" pitchFamily="34" charset="-122"/>
-                <a:cs typeface="Microsoft YaHei" pitchFamily="34" charset="-120"/>
-              </a:rPr>
-              <a:t>90 天</a:t>
-            </a:r>
-            <a:pPr algn="ctr" indent="0" marL="0">
-              <a:buNone/>
-            </a:pPr>
-            <a:r>
-              <a:rPr lang="en-US" sz="1500" dirty="0">
-                <a:solidFill>
-                  <a:srgbClr val="6B7A6E"/>
-                </a:solidFill>
-                <a:latin typeface="Microsoft YaHei" pitchFamily="34" charset="0"/>
-                <a:ea typeface="Microsoft YaHei" pitchFamily="34" charset="-122"/>
-                <a:cs typeface="Microsoft YaHei" pitchFamily="34" charset="-120"/>
-              </a:rPr>
-              <a:t>  ＝  释放现金约 </a:t>
-            </a:r>
-            <a:pPr algn="ctr" indent="0" marL="0">
-              <a:buNone/>
-            </a:pPr>
-            <a:r>
-              <a:rPr lang="en-US" sz="2200" b="1" dirty="0">
-                <a:solidFill>
-                  <a:srgbClr val="2C6E31"/>
-                </a:solidFill>
-                <a:latin typeface="Microsoft YaHei" pitchFamily="34" charset="0"/>
-                <a:ea typeface="Microsoft YaHei" pitchFamily="34" charset="-122"/>
-                <a:cs typeface="Microsoft YaHei" pitchFamily="34" charset="-120"/>
-              </a:rPr>
-              <a:t>RM 360,000</a:t>
-            </a:r>
-            <a:endParaRPr lang="en-US" sz="2200" dirty="0"/>
-          </a:p>
-        </p:txBody>
-      </p:sp>
-      <p:sp>
-        <p:nvSpPr>
-          <p:cNvPr id="12" name="Text 8"/>
-          <p:cNvSpPr/>
-          <p:nvPr/>
-        </p:nvSpPr>
-        <p:spPr>
-          <a:xfrm>
-            <a:off x="640080" y="3794760"/>
-            <a:ext cx="7863840" cy="868680"/>
-          </a:xfrm>
-          <a:prstGeom prst="rect">
-            <a:avLst/>
-          </a:prstGeom>
-          <a:noFill/>
-          <a:ln/>
-        </p:spPr>
-        <p:txBody>
-          <a:bodyPr wrap="square" lIns="0" tIns="0" rIns="0" bIns="0" rtlCol="0" anchor="ctr"/>
-          <a:lstStyle/>
-          <a:p>
-            <a:pPr indent="0" marL="0">
-              <a:buNone/>
-            </a:pPr>
-            <a:r>
-              <a:rPr lang="en-US" sz="1400" b="1" dirty="0">
-                <a:solidFill>
                   <a:srgbClr val="26312A"/>
                 </a:solidFill>
                 <a:latin typeface="Microsoft YaHei" pitchFamily="34" charset="0"/>
                 <a:ea typeface="Microsoft YaHei" pitchFamily="34" charset="-122"/>
                 <a:cs typeface="Microsoft YaHei" pitchFamily="34" charset="-120"/>
               </a:rPr>
-              <a:t>库存不是资产，卖出去才是。</a:t>
-            </a:r>
-            <a:endParaRPr lang="en-US" sz="1400" dirty="0"/>
-          </a:p>
-          <a:p>
-            <a:pPr indent="0" marL="0">
-              <a:buNone/>
-            </a:pPr>
-            <a:r>
-              <a:rPr lang="en-US" sz="1400" dirty="0">
-                <a:solidFill>
-                  <a:srgbClr val="4A554C"/>
-                </a:solidFill>
-                <a:latin typeface="Microsoft YaHei" pitchFamily="34" charset="0"/>
-                <a:ea typeface="Microsoft YaHei" pitchFamily="34" charset="-122"/>
-                <a:cs typeface="Microsoft YaHei" pitchFamily="34" charset="-120"/>
-              </a:rPr>
-              <a:t>H2 原则：先卖完现有的货，再谈进新货；滞销品该促销就促销、该止损就止损。</a:t>
-            </a:r>
-            <a:endParaRPr lang="en-US" sz="1400" dirty="0"/>
+              <a:t>每一笔投放，都必须回答 “带回了多少销售”。回答不了，就不花。</a:t>
+            </a:r>
+            <a:endParaRPr lang="en-US" sz="1500" dirty="0"/>
           </a:p>
         </p:txBody>
       </p:sp>
@@ -6620,6 +8025,490 @@
 <file path=ppt/slides/slide8.xml><?xml version="1.0" encoding="utf-8"?>
 <p:sld xmlns:a="http://schemas.openxmlformats.org/drawingml/2006/main" xmlns:r="http://schemas.openxmlformats.org/officeDocument/2006/relationships" xmlns:p="http://schemas.openxmlformats.org/presentationml/2006/main">
   <p:cSld name="Slide 8">
+    <p:bg>
+      <p:bgPr>
+        <a:solidFill>
+          <a:srgbClr val="FFFFFF"/>
+        </a:solidFill>
+      </p:bgPr>
+    </p:bg>
+    <p:spTree>
+      <p:nvGrpSpPr>
+        <p:cNvPr id="1" name=""/>
+        <p:cNvGrpSpPr/>
+        <p:nvPr/>
+      </p:nvGrpSpPr>
+      <p:grpSpPr>
+        <a:xfrm>
+          <a:off x="0" y="0"/>
+          <a:ext cx="0" cy="0"/>
+          <a:chOff x="0" y="0"/>
+          <a:chExt cx="0" cy="0"/>
+        </a:xfrm>
+      </p:grpSpPr>
+      <p:sp>
+        <p:nvSpPr>
+          <p:cNvPr id="2" name="Text 0"/>
+          <p:cNvSpPr/>
+          <p:nvPr/>
+        </p:nvSpPr>
+        <p:spPr>
+          <a:xfrm>
+            <a:off x="457200" y="292608"/>
+            <a:ext cx="8229600" cy="640080"/>
+          </a:xfrm>
+          <a:prstGeom prst="rect">
+            <a:avLst/>
+          </a:prstGeom>
+          <a:noFill/>
+          <a:ln/>
+        </p:spPr>
+        <p:txBody>
+          <a:bodyPr wrap="square" lIns="0" tIns="0" rIns="0" bIns="0" rtlCol="0" anchor="ctr"/>
+          <a:lstStyle/>
+          <a:p>
+            <a:pPr indent="0" marL="0">
+              <a:buNone/>
+            </a:pPr>
+            <a:r>
+              <a:rPr lang="en-US" sz="2700" b="1" dirty="0">
+                <a:solidFill>
+                  <a:srgbClr val="26312A"/>
+                </a:solidFill>
+                <a:latin typeface="Microsoft YaHei" pitchFamily="34" charset="0"/>
+                <a:ea typeface="Microsoft YaHei" pitchFamily="34" charset="-122"/>
+                <a:cs typeface="Microsoft YaHei" pitchFamily="34" charset="-120"/>
+              </a:rPr>
+              <a:t>原因三：货压在仓库里，现金就不能动</a:t>
+            </a:r>
+            <a:endParaRPr lang="en-US" sz="2700" dirty="0"/>
+          </a:p>
+        </p:txBody>
+      </p:sp>
+      <p:sp>
+        <p:nvSpPr>
+          <p:cNvPr id="3" name="Shape 1"/>
+          <p:cNvSpPr/>
+          <p:nvPr/>
+        </p:nvSpPr>
+        <p:spPr>
+          <a:xfrm>
+            <a:off x="640080" y="1234440"/>
+            <a:ext cx="3749040" cy="1371600"/>
+          </a:xfrm>
+          <a:prstGeom prst="roundRect">
+            <a:avLst>
+              <a:gd name="adj" fmla="val 6000"/>
+            </a:avLst>
+          </a:prstGeom>
+          <a:solidFill>
+            <a:srgbClr val="FBEFEE"/>
+          </a:solidFill>
+          <a:ln/>
+          <a:effectLst>
+            <a:outerShdw sx="100000" sy="100000" kx="0" ky="0" algn="bl" rotWithShape="0" blurRad="88900" dist="25400" dir="2700000">
+              <a:srgbClr val="000000">
+                <a:alpha val="13000"/>
+              </a:srgbClr>
+            </a:outerShdw>
+          </a:effectLst>
+        </p:spPr>
+      </p:sp>
+      <p:pic>
+        <p:nvPicPr>
+          <p:cNvPr id="4" name="Image 0" descr="preencoded.png">    </p:cNvPr>
+          <p:cNvPicPr>
+            <a:picLocks noChangeAspect="1"/>
+          </p:cNvPicPr>
+          <p:nvPr/>
+        </p:nvPicPr>
+        <p:blipFill>
+          <a:blip r:embed="rId1"/>
+          <a:stretch>
+            <a:fillRect/>
+          </a:stretch>
+        </p:blipFill>
+        <p:spPr>
+          <a:xfrm>
+            <a:off x="914400" y="1508760"/>
+            <a:ext cx="411480" cy="411480"/>
+          </a:xfrm>
+          <a:prstGeom prst="rect">
+            <a:avLst/>
+          </a:prstGeom>
+        </p:spPr>
+      </p:pic>
+      <p:sp>
+        <p:nvSpPr>
+          <p:cNvPr id="5" name="Text 2"/>
+          <p:cNvSpPr/>
+          <p:nvPr/>
+        </p:nvSpPr>
+        <p:spPr>
+          <a:xfrm>
+            <a:off x="1508760" y="1417320"/>
+            <a:ext cx="2651760" cy="320040"/>
+          </a:xfrm>
+          <a:prstGeom prst="rect">
+            <a:avLst/>
+          </a:prstGeom>
+          <a:noFill/>
+          <a:ln/>
+        </p:spPr>
+        <p:txBody>
+          <a:bodyPr wrap="square" lIns="0" tIns="0" rIns="0" bIns="0" rtlCol="0" anchor="ctr"/>
+          <a:lstStyle/>
+          <a:p>
+            <a:pPr indent="0" marL="0">
+              <a:buNone/>
+            </a:pPr>
+            <a:r>
+              <a:rPr lang="en-US" sz="1300" dirty="0">
+                <a:solidFill>
+                  <a:srgbClr val="6B7A6E"/>
+                </a:solidFill>
+                <a:latin typeface="Microsoft YaHei" pitchFamily="34" charset="0"/>
+                <a:ea typeface="Microsoft YaHei" pitchFamily="34" charset="-122"/>
+                <a:cs typeface="Microsoft YaHei" pitchFamily="34" charset="-120"/>
+              </a:rPr>
+              <a:t>目前库存金额</a:t>
+            </a:r>
+            <a:endParaRPr lang="en-US" sz="1300" dirty="0"/>
+          </a:p>
+        </p:txBody>
+      </p:sp>
+      <p:sp>
+        <p:nvSpPr>
+          <p:cNvPr id="6" name="Text 3"/>
+          <p:cNvSpPr/>
+          <p:nvPr/>
+        </p:nvSpPr>
+        <p:spPr>
+          <a:xfrm>
+            <a:off x="1508760" y="1737360"/>
+            <a:ext cx="2743200" cy="548640"/>
+          </a:xfrm>
+          <a:prstGeom prst="rect">
+            <a:avLst/>
+          </a:prstGeom>
+          <a:noFill/>
+          <a:ln/>
+        </p:spPr>
+        <p:txBody>
+          <a:bodyPr wrap="square" lIns="0" tIns="0" rIns="0" bIns="0" rtlCol="0" anchor="ctr"/>
+          <a:lstStyle/>
+          <a:p>
+            <a:pPr indent="0" marL="0">
+              <a:buNone/>
+            </a:pPr>
+            <a:r>
+              <a:rPr lang="en-US" sz="2600" b="1" dirty="0">
+                <a:solidFill>
+                  <a:srgbClr val="C2453A"/>
+                </a:solidFill>
+                <a:latin typeface="Microsoft YaHei" pitchFamily="34" charset="0"/>
+                <a:ea typeface="Microsoft YaHei" pitchFamily="34" charset="-122"/>
+                <a:cs typeface="Microsoft YaHei" pitchFamily="34" charset="-120"/>
+              </a:rPr>
+              <a:t>RM 1,065,000</a:t>
+            </a:r>
+            <a:endParaRPr lang="en-US" sz="2600" dirty="0"/>
+          </a:p>
+        </p:txBody>
+      </p:sp>
+      <p:sp>
+        <p:nvSpPr>
+          <p:cNvPr id="7" name="Shape 4"/>
+          <p:cNvSpPr/>
+          <p:nvPr/>
+        </p:nvSpPr>
+        <p:spPr>
+          <a:xfrm>
+            <a:off x="4754880" y="1234440"/>
+            <a:ext cx="3749040" cy="1371600"/>
+          </a:xfrm>
+          <a:prstGeom prst="roundRect">
+            <a:avLst>
+              <a:gd name="adj" fmla="val 6000"/>
+            </a:avLst>
+          </a:prstGeom>
+          <a:solidFill>
+            <a:srgbClr val="FBEFEE"/>
+          </a:solidFill>
+          <a:ln/>
+          <a:effectLst>
+            <a:outerShdw sx="100000" sy="100000" kx="0" ky="0" algn="bl" rotWithShape="0" blurRad="88900" dist="25400" dir="2700000">
+              <a:srgbClr val="000000">
+                <a:alpha val="13000"/>
+              </a:srgbClr>
+            </a:outerShdw>
+          </a:effectLst>
+        </p:spPr>
+      </p:sp>
+      <p:pic>
+        <p:nvPicPr>
+          <p:cNvPr id="8" name="Image 1" descr="preencoded.png">    </p:cNvPr>
+          <p:cNvPicPr>
+            <a:picLocks noChangeAspect="1"/>
+          </p:cNvPicPr>
+          <p:nvPr/>
+        </p:nvPicPr>
+        <p:blipFill>
+          <a:blip r:embed="rId2"/>
+          <a:stretch>
+            <a:fillRect/>
+          </a:stretch>
+        </p:blipFill>
+        <p:spPr>
+          <a:xfrm>
+            <a:off x="5029200" y="1508760"/>
+            <a:ext cx="411480" cy="411480"/>
+          </a:xfrm>
+          <a:prstGeom prst="rect">
+            <a:avLst/>
+          </a:prstGeom>
+        </p:spPr>
+      </p:pic>
+      <p:sp>
+        <p:nvSpPr>
+          <p:cNvPr id="9" name="Text 5"/>
+          <p:cNvSpPr/>
+          <p:nvPr/>
+        </p:nvSpPr>
+        <p:spPr>
+          <a:xfrm>
+            <a:off x="5623560" y="1417320"/>
+            <a:ext cx="2651760" cy="320040"/>
+          </a:xfrm>
+          <a:prstGeom prst="rect">
+            <a:avLst/>
+          </a:prstGeom>
+          <a:noFill/>
+          <a:ln/>
+        </p:spPr>
+        <p:txBody>
+          <a:bodyPr wrap="square" lIns="0" tIns="0" rIns="0" bIns="0" rtlCol="0" anchor="ctr"/>
+          <a:lstStyle/>
+          <a:p>
+            <a:pPr indent="0" marL="0">
+              <a:buNone/>
+            </a:pPr>
+            <a:r>
+              <a:rPr lang="en-US" sz="1300" dirty="0">
+                <a:solidFill>
+                  <a:srgbClr val="6B7A6E"/>
+                </a:solidFill>
+                <a:latin typeface="Microsoft YaHei" pitchFamily="34" charset="0"/>
+                <a:ea typeface="Microsoft YaHei" pitchFamily="34" charset="-122"/>
+                <a:cs typeface="Microsoft YaHei" pitchFamily="34" charset="-120"/>
+              </a:rPr>
+              <a:t>库存周转天数</a:t>
+            </a:r>
+            <a:endParaRPr lang="en-US" sz="1300" dirty="0"/>
+          </a:p>
+        </p:txBody>
+      </p:sp>
+      <p:sp>
+        <p:nvSpPr>
+          <p:cNvPr id="10" name="Text 6"/>
+          <p:cNvSpPr/>
+          <p:nvPr/>
+        </p:nvSpPr>
+        <p:spPr>
+          <a:xfrm>
+            <a:off x="5623560" y="1737360"/>
+            <a:ext cx="2743200" cy="548640"/>
+          </a:xfrm>
+          <a:prstGeom prst="rect">
+            <a:avLst/>
+          </a:prstGeom>
+          <a:noFill/>
+          <a:ln/>
+        </p:spPr>
+        <p:txBody>
+          <a:bodyPr wrap="square" lIns="0" tIns="0" rIns="0" bIns="0" rtlCol="0" anchor="ctr"/>
+          <a:lstStyle/>
+          <a:p>
+            <a:pPr indent="0" marL="0">
+              <a:buNone/>
+            </a:pPr>
+            <a:r>
+              <a:rPr lang="en-US" sz="2600" b="1" dirty="0">
+                <a:solidFill>
+                  <a:srgbClr val="C2453A"/>
+                </a:solidFill>
+                <a:latin typeface="Microsoft YaHei" pitchFamily="34" charset="0"/>
+                <a:ea typeface="Microsoft YaHei" pitchFamily="34" charset="-122"/>
+                <a:cs typeface="Microsoft YaHei" pitchFamily="34" charset="-120"/>
+              </a:rPr>
+              <a:t>132 天</a:t>
+            </a:r>
+            <a:endParaRPr lang="en-US" sz="2600" dirty="0"/>
+          </a:p>
+        </p:txBody>
+      </p:sp>
+      <p:sp>
+        <p:nvSpPr>
+          <p:cNvPr id="11" name="Text 7"/>
+          <p:cNvSpPr/>
+          <p:nvPr/>
+        </p:nvSpPr>
+        <p:spPr>
+          <a:xfrm>
+            <a:off x="640080" y="2926080"/>
+            <a:ext cx="7863840" cy="548640"/>
+          </a:xfrm>
+          <a:prstGeom prst="rect">
+            <a:avLst/>
+          </a:prstGeom>
+          <a:noFill/>
+          <a:ln/>
+        </p:spPr>
+        <p:txBody>
+          <a:bodyPr wrap="square" lIns="0" tIns="0" rIns="0" bIns="0" rtlCol="0" anchor="ctr"/>
+          <a:lstStyle/>
+          <a:p>
+            <a:pPr algn="ctr" indent="0" marL="0">
+              <a:buNone/>
+            </a:pPr>
+            <a:r>
+              <a:rPr lang="en-US" sz="2200" b="1" dirty="0">
+                <a:solidFill>
+                  <a:srgbClr val="C2453A"/>
+                </a:solidFill>
+                <a:latin typeface="Microsoft YaHei" pitchFamily="34" charset="0"/>
+                <a:ea typeface="Microsoft YaHei" pitchFamily="34" charset="-122"/>
+                <a:cs typeface="Microsoft YaHei" pitchFamily="34" charset="-120"/>
+              </a:rPr>
+              <a:t>132 天 </a:t>
+            </a:r>
+            <a:pPr algn="ctr" indent="0" marL="0">
+              <a:buNone/>
+            </a:pPr>
+            <a:r>
+              <a:rPr lang="en-US" sz="1500" dirty="0">
+                <a:solidFill>
+                  <a:srgbClr val="6B7A6E"/>
+                </a:solidFill>
+                <a:latin typeface="Microsoft YaHei" pitchFamily="34" charset="0"/>
+                <a:ea typeface="Microsoft YaHei" pitchFamily="34" charset="-122"/>
+                <a:cs typeface="Microsoft YaHei" pitchFamily="34" charset="-120"/>
+              </a:rPr>
+              <a:t> 压到 </a:t>
+            </a:r>
+            <a:pPr algn="ctr" indent="0" marL="0">
+              <a:buNone/>
+            </a:pPr>
+            <a:r>
+              <a:rPr lang="en-US" sz="2200" b="1" dirty="0">
+                <a:solidFill>
+                  <a:srgbClr val="2C6E31"/>
+                </a:solidFill>
+                <a:latin typeface="Microsoft YaHei" pitchFamily="34" charset="0"/>
+                <a:ea typeface="Microsoft YaHei" pitchFamily="34" charset="-122"/>
+                <a:cs typeface="Microsoft YaHei" pitchFamily="34" charset="-120"/>
+              </a:rPr>
+              <a:t>90 天</a:t>
+            </a:r>
+            <a:pPr algn="ctr" indent="0" marL="0">
+              <a:buNone/>
+            </a:pPr>
+            <a:r>
+              <a:rPr lang="en-US" sz="1500" dirty="0">
+                <a:solidFill>
+                  <a:srgbClr val="6B7A6E"/>
+                </a:solidFill>
+                <a:latin typeface="Microsoft YaHei" pitchFamily="34" charset="0"/>
+                <a:ea typeface="Microsoft YaHei" pitchFamily="34" charset="-122"/>
+                <a:cs typeface="Microsoft YaHei" pitchFamily="34" charset="-120"/>
+              </a:rPr>
+              <a:t>  ＝  释放现金约 </a:t>
+            </a:r>
+            <a:pPr algn="ctr" indent="0" marL="0">
+              <a:buNone/>
+            </a:pPr>
+            <a:r>
+              <a:rPr lang="en-US" sz="2200" b="1" dirty="0">
+                <a:solidFill>
+                  <a:srgbClr val="2C6E31"/>
+                </a:solidFill>
+                <a:latin typeface="Microsoft YaHei" pitchFamily="34" charset="0"/>
+                <a:ea typeface="Microsoft YaHei" pitchFamily="34" charset="-122"/>
+                <a:cs typeface="Microsoft YaHei" pitchFamily="34" charset="-120"/>
+              </a:rPr>
+              <a:t>RM 360,000</a:t>
+            </a:r>
+            <a:endParaRPr lang="en-US" sz="2200" dirty="0"/>
+          </a:p>
+        </p:txBody>
+      </p:sp>
+      <p:sp>
+        <p:nvSpPr>
+          <p:cNvPr id="12" name="Text 8"/>
+          <p:cNvSpPr/>
+          <p:nvPr/>
+        </p:nvSpPr>
+        <p:spPr>
+          <a:xfrm>
+            <a:off x="640080" y="3794760"/>
+            <a:ext cx="7863840" cy="868680"/>
+          </a:xfrm>
+          <a:prstGeom prst="rect">
+            <a:avLst/>
+          </a:prstGeom>
+          <a:noFill/>
+          <a:ln/>
+        </p:spPr>
+        <p:txBody>
+          <a:bodyPr wrap="square" lIns="0" tIns="0" rIns="0" bIns="0" rtlCol="0" anchor="ctr"/>
+          <a:lstStyle/>
+          <a:p>
+            <a:pPr indent="0" marL="0">
+              <a:buNone/>
+            </a:pPr>
+            <a:r>
+              <a:rPr lang="en-US" sz="1400" b="1" dirty="0">
+                <a:solidFill>
+                  <a:srgbClr val="26312A"/>
+                </a:solidFill>
+                <a:latin typeface="Microsoft YaHei" pitchFamily="34" charset="0"/>
+                <a:ea typeface="Microsoft YaHei" pitchFamily="34" charset="-122"/>
+                <a:cs typeface="Microsoft YaHei" pitchFamily="34" charset="-120"/>
+              </a:rPr>
+              <a:t>库存不是资产，卖出去才是。</a:t>
+            </a:r>
+            <a:endParaRPr lang="en-US" sz="1400" dirty="0"/>
+          </a:p>
+          <a:p>
+            <a:pPr indent="0" marL="0">
+              <a:buNone/>
+            </a:pPr>
+            <a:r>
+              <a:rPr lang="en-US" sz="1400" dirty="0">
+                <a:solidFill>
+                  <a:srgbClr val="4A554C"/>
+                </a:solidFill>
+                <a:latin typeface="Microsoft YaHei" pitchFamily="34" charset="0"/>
+                <a:ea typeface="Microsoft YaHei" pitchFamily="34" charset="-122"/>
+                <a:cs typeface="Microsoft YaHei" pitchFamily="34" charset="-120"/>
+              </a:rPr>
+              <a:t>H2 原则：先卖完现有的货，再谈进新货；滞销品该促销就促销、该止损就止损。</a:t>
+            </a:r>
+            <a:endParaRPr lang="en-US" sz="1400" dirty="0"/>
+          </a:p>
+        </p:txBody>
+      </p:sp>
+    </p:spTree>
+  </p:cSld>
+  <p:clrMapOvr>
+    <a:masterClrMapping/>
+  </p:clrMapOvr>
+</p:sld>
+</file>
+
+<file path=ppt/slides/slide9.xml><?xml version="1.0" encoding="utf-8"?>
+<p:sld xmlns:a="http://schemas.openxmlformats.org/drawingml/2006/main" xmlns:r="http://schemas.openxmlformats.org/officeDocument/2006/relationships" xmlns:p="http://schemas.openxmlformats.org/presentationml/2006/main">
+  <p:cSld name="Slide 9">
     <p:bg>
       <p:bgPr>
         <a:solidFill>
@@ -7277,796 +9166,6 @@
               <a:t>三个数字，5 月都摸到过 —— 我们不是在赌，是在重复已经做到的事。</a:t>
             </a:r>
             <a:endParaRPr lang="en-US" sz="1450" dirty="0"/>
-          </a:p>
-        </p:txBody>
-      </p:sp>
-    </p:spTree>
-  </p:cSld>
-  <p:clrMapOvr>
-    <a:masterClrMapping/>
-  </p:clrMapOvr>
-</p:sld>
-</file>
-
-<file path=ppt/slides/slide9.xml><?xml version="1.0" encoding="utf-8"?>
-<p:sld xmlns:a="http://schemas.openxmlformats.org/drawingml/2006/main" xmlns:r="http://schemas.openxmlformats.org/officeDocument/2006/relationships" xmlns:p="http://schemas.openxmlformats.org/presentationml/2006/main">
-  <p:cSld name="Slide 9">
-    <p:bg>
-      <p:bgPr>
-        <a:solidFill>
-          <a:srgbClr val="FFFFFF"/>
-        </a:solidFill>
-      </p:bgPr>
-    </p:bg>
-    <p:spTree>
-      <p:nvGrpSpPr>
-        <p:cNvPr id="1" name=""/>
-        <p:cNvGrpSpPr/>
-        <p:nvPr/>
-      </p:nvGrpSpPr>
-      <p:grpSpPr>
-        <a:xfrm>
-          <a:off x="0" y="0"/>
-          <a:ext cx="0" cy="0"/>
-          <a:chOff x="0" y="0"/>
-          <a:chExt cx="0" cy="0"/>
-        </a:xfrm>
-      </p:grpSpPr>
-      <p:sp>
-        <p:nvSpPr>
-          <p:cNvPr id="2" name="Text 0"/>
-          <p:cNvSpPr/>
-          <p:nvPr/>
-        </p:nvSpPr>
-        <p:spPr>
-          <a:xfrm>
-            <a:off x="457200" y="292608"/>
-            <a:ext cx="8229600" cy="640080"/>
-          </a:xfrm>
-          <a:prstGeom prst="rect">
-            <a:avLst/>
-          </a:prstGeom>
-          <a:noFill/>
-          <a:ln/>
-        </p:spPr>
-        <p:txBody>
-          <a:bodyPr wrap="square" lIns="0" tIns="0" rIns="0" bIns="0" rtlCol="0" anchor="ctr"/>
-          <a:lstStyle/>
-          <a:p>
-            <a:pPr indent="0" marL="0">
-              <a:buNone/>
-            </a:pPr>
-            <a:r>
-              <a:rPr lang="en-US" sz="2700" b="1" dirty="0">
-                <a:solidFill>
-                  <a:srgbClr val="26312A"/>
-                </a:solidFill>
-                <a:latin typeface="Microsoft YaHei" pitchFamily="34" charset="0"/>
-                <a:ea typeface="Microsoft YaHei" pitchFamily="34" charset="-122"/>
-                <a:cs typeface="Microsoft YaHei" pitchFamily="34" charset="-120"/>
-              </a:rPr>
-              <a:t>三个数字达标，会发生什么？</a:t>
-            </a:r>
-            <a:endParaRPr lang="en-US" sz="2700" dirty="0"/>
-          </a:p>
-        </p:txBody>
-      </p:sp>
-      <p:sp>
-        <p:nvSpPr>
-          <p:cNvPr id="3" name="Shape 1"/>
-          <p:cNvSpPr/>
-          <p:nvPr/>
-        </p:nvSpPr>
-        <p:spPr>
-          <a:xfrm>
-            <a:off x="384048" y="1417320"/>
-            <a:ext cx="1325880" cy="1188720"/>
-          </a:xfrm>
-          <a:prstGeom prst="roundRect">
-            <a:avLst>
-              <a:gd name="adj" fmla="val 6154"/>
-            </a:avLst>
-          </a:prstGeom>
-          <a:solidFill>
-            <a:srgbClr val="F5F6F4"/>
-          </a:solidFill>
-          <a:ln/>
-          <a:effectLst>
-            <a:outerShdw sx="100000" sy="100000" kx="0" ky="0" algn="bl" rotWithShape="0" blurRad="88900" dist="25400" dir="2700000">
-              <a:srgbClr val="000000">
-                <a:alpha val="13000"/>
-              </a:srgbClr>
-            </a:outerShdw>
-          </a:effectLst>
-        </p:spPr>
-      </p:sp>
-      <p:sp>
-        <p:nvSpPr>
-          <p:cNvPr id="4" name="Text 2"/>
-          <p:cNvSpPr/>
-          <p:nvPr/>
-        </p:nvSpPr>
-        <p:spPr>
-          <a:xfrm>
-            <a:off x="493776" y="1572768"/>
-            <a:ext cx="1143000" cy="320040"/>
-          </a:xfrm>
-          <a:prstGeom prst="rect">
-            <a:avLst/>
-          </a:prstGeom>
-          <a:noFill/>
-          <a:ln/>
-        </p:spPr>
-        <p:txBody>
-          <a:bodyPr wrap="square" lIns="0" tIns="0" rIns="0" bIns="0" rtlCol="0" anchor="ctr"/>
-          <a:lstStyle/>
-          <a:p>
-            <a:pPr indent="0" marL="0">
-              <a:buNone/>
-            </a:pPr>
-            <a:r>
-              <a:rPr lang="en-US" sz="1150" dirty="0">
-                <a:solidFill>
-                  <a:srgbClr val="6B7A6E"/>
-                </a:solidFill>
-                <a:latin typeface="Microsoft YaHei" pitchFamily="34" charset="0"/>
-                <a:ea typeface="Microsoft YaHei" pitchFamily="34" charset="-122"/>
-                <a:cs typeface="Microsoft YaHei" pitchFamily="34" charset="-120"/>
-              </a:rPr>
-              <a:t>月销售</a:t>
-            </a:r>
-            <a:endParaRPr lang="en-US" sz="1150" dirty="0"/>
-          </a:p>
-        </p:txBody>
-      </p:sp>
-      <p:sp>
-        <p:nvSpPr>
-          <p:cNvPr id="5" name="Text 3"/>
-          <p:cNvSpPr/>
-          <p:nvPr/>
-        </p:nvSpPr>
-        <p:spPr>
-          <a:xfrm>
-            <a:off x="493776" y="1901952"/>
-            <a:ext cx="1179576" cy="548640"/>
-          </a:xfrm>
-          <a:prstGeom prst="rect">
-            <a:avLst/>
-          </a:prstGeom>
-          <a:noFill/>
-          <a:ln/>
-        </p:spPr>
-        <p:txBody>
-          <a:bodyPr wrap="square" lIns="0" tIns="0" rIns="0" bIns="0" rtlCol="0" anchor="ctr"/>
-          <a:lstStyle/>
-          <a:p>
-            <a:pPr indent="0" marL="0">
-              <a:buNone/>
-            </a:pPr>
-            <a:r>
-              <a:rPr lang="en-US" sz="1450" b="1" dirty="0">
-                <a:solidFill>
-                  <a:srgbClr val="26312A"/>
-                </a:solidFill>
-                <a:latin typeface="Microsoft YaHei" pitchFamily="34" charset="0"/>
-                <a:ea typeface="Microsoft YaHei" pitchFamily="34" charset="-122"/>
-                <a:cs typeface="Microsoft YaHei" pitchFamily="34" charset="-120"/>
-              </a:rPr>
-              <a:t>RM 550,000</a:t>
-            </a:r>
-            <a:endParaRPr lang="en-US" sz="1450" dirty="0"/>
-          </a:p>
-        </p:txBody>
-      </p:sp>
-      <p:sp>
-        <p:nvSpPr>
-          <p:cNvPr id="6" name="Text 4"/>
-          <p:cNvSpPr/>
-          <p:nvPr/>
-        </p:nvSpPr>
-        <p:spPr>
-          <a:xfrm>
-            <a:off x="1737360" y="1600200"/>
-            <a:ext cx="384048" cy="822960"/>
-          </a:xfrm>
-          <a:prstGeom prst="rect">
-            <a:avLst/>
-          </a:prstGeom>
-          <a:noFill/>
-          <a:ln/>
-        </p:spPr>
-        <p:txBody>
-          <a:bodyPr wrap="square" lIns="0" tIns="0" rIns="0" bIns="0" rtlCol="0" anchor="ctr"/>
-          <a:lstStyle/>
-          <a:p>
-            <a:pPr algn="ctr" indent="0" marL="0">
-              <a:buNone/>
-            </a:pPr>
-            <a:r>
-              <a:rPr lang="en-US" sz="2400" b="1" dirty="0">
-                <a:solidFill>
-                  <a:srgbClr val="6B7A6E"/>
-                </a:solidFill>
-                <a:latin typeface="Microsoft YaHei" pitchFamily="34" charset="0"/>
-                <a:ea typeface="Microsoft YaHei" pitchFamily="34" charset="-122"/>
-                <a:cs typeface="Microsoft YaHei" pitchFamily="34" charset="-120"/>
-              </a:rPr>
-              <a:t>×</a:t>
-            </a:r>
-            <a:endParaRPr lang="en-US" sz="2400" dirty="0"/>
-          </a:p>
-        </p:txBody>
-      </p:sp>
-      <p:sp>
-        <p:nvSpPr>
-          <p:cNvPr id="7" name="Shape 5"/>
-          <p:cNvSpPr/>
-          <p:nvPr/>
-        </p:nvSpPr>
-        <p:spPr>
-          <a:xfrm>
-            <a:off x="2148840" y="1417320"/>
-            <a:ext cx="1691640" cy="1188720"/>
-          </a:xfrm>
-          <a:prstGeom prst="roundRect">
-            <a:avLst>
-              <a:gd name="adj" fmla="val 6154"/>
-            </a:avLst>
-          </a:prstGeom>
-          <a:solidFill>
-            <a:srgbClr val="F5F6F4"/>
-          </a:solidFill>
-          <a:ln/>
-          <a:effectLst>
-            <a:outerShdw sx="100000" sy="100000" kx="0" ky="0" algn="bl" rotWithShape="0" blurRad="88900" dist="25400" dir="2700000">
-              <a:srgbClr val="000000">
-                <a:alpha val="13000"/>
-              </a:srgbClr>
-            </a:outerShdw>
-          </a:effectLst>
-        </p:spPr>
-      </p:sp>
-      <p:sp>
-        <p:nvSpPr>
-          <p:cNvPr id="8" name="Text 6"/>
-          <p:cNvSpPr/>
-          <p:nvPr/>
-        </p:nvSpPr>
-        <p:spPr>
-          <a:xfrm>
-            <a:off x="2258568" y="1572768"/>
-            <a:ext cx="1508760" cy="320040"/>
-          </a:xfrm>
-          <a:prstGeom prst="rect">
-            <a:avLst/>
-          </a:prstGeom>
-          <a:noFill/>
-          <a:ln/>
-        </p:spPr>
-        <p:txBody>
-          <a:bodyPr wrap="square" lIns="0" tIns="0" rIns="0" bIns="0" rtlCol="0" anchor="ctr"/>
-          <a:lstStyle/>
-          <a:p>
-            <a:pPr indent="0" marL="0">
-              <a:buNone/>
-            </a:pPr>
-            <a:r>
-              <a:rPr lang="en-US" sz="1150" dirty="0">
-                <a:solidFill>
-                  <a:srgbClr val="6B7A6E"/>
-                </a:solidFill>
-                <a:latin typeface="Microsoft YaHei" pitchFamily="34" charset="0"/>
-                <a:ea typeface="Microsoft YaHei" pitchFamily="34" charset="-122"/>
-                <a:cs typeface="Microsoft YaHei" pitchFamily="34" charset="-120"/>
-              </a:rPr>
-              <a:t>毛利率 · 5月水平</a:t>
-            </a:r>
-            <a:endParaRPr lang="en-US" sz="1150" dirty="0"/>
-          </a:p>
-        </p:txBody>
-      </p:sp>
-      <p:sp>
-        <p:nvSpPr>
-          <p:cNvPr id="9" name="Text 7"/>
-          <p:cNvSpPr/>
-          <p:nvPr/>
-        </p:nvSpPr>
-        <p:spPr>
-          <a:xfrm>
-            <a:off x="2258568" y="1901952"/>
-            <a:ext cx="1545336" cy="548640"/>
-          </a:xfrm>
-          <a:prstGeom prst="rect">
-            <a:avLst/>
-          </a:prstGeom>
-          <a:noFill/>
-          <a:ln/>
-        </p:spPr>
-        <p:txBody>
-          <a:bodyPr wrap="square" lIns="0" tIns="0" rIns="0" bIns="0" rtlCol="0" anchor="ctr"/>
-          <a:lstStyle/>
-          <a:p>
-            <a:pPr indent="0" marL="0">
-              <a:buNone/>
-            </a:pPr>
-            <a:r>
-              <a:rPr lang="en-US" sz="1450" b="1" dirty="0">
-                <a:solidFill>
-                  <a:srgbClr val="26312A"/>
-                </a:solidFill>
-                <a:latin typeface="Microsoft YaHei" pitchFamily="34" charset="0"/>
-                <a:ea typeface="Microsoft YaHei" pitchFamily="34" charset="-122"/>
-                <a:cs typeface="Microsoft YaHei" pitchFamily="34" charset="-120"/>
-              </a:rPr>
-              <a:t>约 51%</a:t>
-            </a:r>
-            <a:endParaRPr lang="en-US" sz="1450" dirty="0"/>
-          </a:p>
-        </p:txBody>
-      </p:sp>
-      <p:sp>
-        <p:nvSpPr>
-          <p:cNvPr id="10" name="Text 8"/>
-          <p:cNvSpPr/>
-          <p:nvPr/>
-        </p:nvSpPr>
-        <p:spPr>
-          <a:xfrm>
-            <a:off x="3867912" y="1600200"/>
-            <a:ext cx="384048" cy="822960"/>
-          </a:xfrm>
-          <a:prstGeom prst="rect">
-            <a:avLst/>
-          </a:prstGeom>
-          <a:noFill/>
-          <a:ln/>
-        </p:spPr>
-        <p:txBody>
-          <a:bodyPr wrap="square" lIns="0" tIns="0" rIns="0" bIns="0" rtlCol="0" anchor="ctr"/>
-          <a:lstStyle/>
-          <a:p>
-            <a:pPr algn="ctr" indent="0" marL="0">
-              <a:buNone/>
-            </a:pPr>
-            <a:r>
-              <a:rPr lang="en-US" sz="2400" b="1" dirty="0">
-                <a:solidFill>
-                  <a:srgbClr val="6B7A6E"/>
-                </a:solidFill>
-                <a:latin typeface="Microsoft YaHei" pitchFamily="34" charset="0"/>
-                <a:ea typeface="Microsoft YaHei" pitchFamily="34" charset="-122"/>
-                <a:cs typeface="Microsoft YaHei" pitchFamily="34" charset="-120"/>
-              </a:rPr>
-              <a:t>−</a:t>
-            </a:r>
-            <a:endParaRPr lang="en-US" sz="2400" dirty="0"/>
-          </a:p>
-        </p:txBody>
-      </p:sp>
-      <p:sp>
-        <p:nvSpPr>
-          <p:cNvPr id="11" name="Shape 9"/>
-          <p:cNvSpPr/>
-          <p:nvPr/>
-        </p:nvSpPr>
-        <p:spPr>
-          <a:xfrm>
-            <a:off x="4279392" y="1417320"/>
-            <a:ext cx="1325880" cy="1188720"/>
-          </a:xfrm>
-          <a:prstGeom prst="roundRect">
-            <a:avLst>
-              <a:gd name="adj" fmla="val 6154"/>
-            </a:avLst>
-          </a:prstGeom>
-          <a:solidFill>
-            <a:srgbClr val="F5F6F4"/>
-          </a:solidFill>
-          <a:ln/>
-          <a:effectLst>
-            <a:outerShdw sx="100000" sy="100000" kx="0" ky="0" algn="bl" rotWithShape="0" blurRad="88900" dist="25400" dir="2700000">
-              <a:srgbClr val="000000">
-                <a:alpha val="13000"/>
-              </a:srgbClr>
-            </a:outerShdw>
-          </a:effectLst>
-        </p:spPr>
-      </p:sp>
-      <p:sp>
-        <p:nvSpPr>
-          <p:cNvPr id="12" name="Text 10"/>
-          <p:cNvSpPr/>
-          <p:nvPr/>
-        </p:nvSpPr>
-        <p:spPr>
-          <a:xfrm>
-            <a:off x="4389120" y="1572768"/>
-            <a:ext cx="1143000" cy="320040"/>
-          </a:xfrm>
-          <a:prstGeom prst="rect">
-            <a:avLst/>
-          </a:prstGeom>
-          <a:noFill/>
-          <a:ln/>
-        </p:spPr>
-        <p:txBody>
-          <a:bodyPr wrap="square" lIns="0" tIns="0" rIns="0" bIns="0" rtlCol="0" anchor="ctr"/>
-          <a:lstStyle/>
-          <a:p>
-            <a:pPr indent="0" marL="0">
-              <a:buNone/>
-            </a:pPr>
-            <a:r>
-              <a:rPr lang="en-US" sz="1150" dirty="0">
-                <a:solidFill>
-                  <a:srgbClr val="6B7A6E"/>
-                </a:solidFill>
-                <a:latin typeface="Microsoft YaHei" pitchFamily="34" charset="0"/>
-                <a:ea typeface="Microsoft YaHei" pitchFamily="34" charset="-122"/>
-                <a:cs typeface="Microsoft YaHei" pitchFamily="34" charset="-120"/>
-              </a:rPr>
-              <a:t>月费用</a:t>
-            </a:r>
-            <a:endParaRPr lang="en-US" sz="1150" dirty="0"/>
-          </a:p>
-        </p:txBody>
-      </p:sp>
-      <p:sp>
-        <p:nvSpPr>
-          <p:cNvPr id="13" name="Text 11"/>
-          <p:cNvSpPr/>
-          <p:nvPr/>
-        </p:nvSpPr>
-        <p:spPr>
-          <a:xfrm>
-            <a:off x="4389120" y="1901952"/>
-            <a:ext cx="1179576" cy="548640"/>
-          </a:xfrm>
-          <a:prstGeom prst="rect">
-            <a:avLst/>
-          </a:prstGeom>
-          <a:noFill/>
-          <a:ln/>
-        </p:spPr>
-        <p:txBody>
-          <a:bodyPr wrap="square" lIns="0" tIns="0" rIns="0" bIns="0" rtlCol="0" anchor="ctr"/>
-          <a:lstStyle/>
-          <a:p>
-            <a:pPr indent="0" marL="0">
-              <a:buNone/>
-            </a:pPr>
-            <a:r>
-              <a:rPr lang="en-US" sz="1450" b="1" dirty="0">
-                <a:solidFill>
-                  <a:srgbClr val="26312A"/>
-                </a:solidFill>
-                <a:latin typeface="Microsoft YaHei" pitchFamily="34" charset="0"/>
-                <a:ea typeface="Microsoft YaHei" pitchFamily="34" charset="-122"/>
-                <a:cs typeface="Microsoft YaHei" pitchFamily="34" charset="-120"/>
-              </a:rPr>
-              <a:t>RM 220,000</a:t>
-            </a:r>
-            <a:endParaRPr lang="en-US" sz="1450" dirty="0"/>
-          </a:p>
-        </p:txBody>
-      </p:sp>
-      <p:sp>
-        <p:nvSpPr>
-          <p:cNvPr id="14" name="Text 12"/>
-          <p:cNvSpPr/>
-          <p:nvPr/>
-        </p:nvSpPr>
-        <p:spPr>
-          <a:xfrm>
-            <a:off x="5632704" y="1600200"/>
-            <a:ext cx="384048" cy="822960"/>
-          </a:xfrm>
-          <a:prstGeom prst="rect">
-            <a:avLst/>
-          </a:prstGeom>
-          <a:noFill/>
-          <a:ln/>
-        </p:spPr>
-        <p:txBody>
-          <a:bodyPr wrap="square" lIns="0" tIns="0" rIns="0" bIns="0" rtlCol="0" anchor="ctr"/>
-          <a:lstStyle/>
-          <a:p>
-            <a:pPr algn="ctr" indent="0" marL="0">
-              <a:buNone/>
-            </a:pPr>
-            <a:r>
-              <a:rPr lang="en-US" sz="2400" b="1" dirty="0">
-                <a:solidFill>
-                  <a:srgbClr val="6B7A6E"/>
-                </a:solidFill>
-                <a:latin typeface="Microsoft YaHei" pitchFamily="34" charset="0"/>
-                <a:ea typeface="Microsoft YaHei" pitchFamily="34" charset="-122"/>
-                <a:cs typeface="Microsoft YaHei" pitchFamily="34" charset="-120"/>
-              </a:rPr>
-              <a:t>=</a:t>
-            </a:r>
-            <a:endParaRPr lang="en-US" sz="2400" dirty="0"/>
-          </a:p>
-        </p:txBody>
-      </p:sp>
-      <p:sp>
-        <p:nvSpPr>
-          <p:cNvPr id="15" name="Shape 13"/>
-          <p:cNvSpPr/>
-          <p:nvPr/>
-        </p:nvSpPr>
-        <p:spPr>
-          <a:xfrm>
-            <a:off x="6044184" y="1417320"/>
-            <a:ext cx="1572768" cy="1188720"/>
-          </a:xfrm>
-          <a:prstGeom prst="roundRect">
-            <a:avLst>
-              <a:gd name="adj" fmla="val 6154"/>
-            </a:avLst>
-          </a:prstGeom>
-          <a:solidFill>
-            <a:srgbClr val="F1F7EC"/>
-          </a:solidFill>
-          <a:ln/>
-          <a:effectLst>
-            <a:outerShdw sx="100000" sy="100000" kx="0" ky="0" algn="bl" rotWithShape="0" blurRad="88900" dist="25400" dir="2700000">
-              <a:srgbClr val="000000">
-                <a:alpha val="13000"/>
-              </a:srgbClr>
-            </a:outerShdw>
-          </a:effectLst>
-        </p:spPr>
-      </p:sp>
-      <p:sp>
-        <p:nvSpPr>
-          <p:cNvPr id="16" name="Text 14"/>
-          <p:cNvSpPr/>
-          <p:nvPr/>
-        </p:nvSpPr>
-        <p:spPr>
-          <a:xfrm>
-            <a:off x="6153912" y="1572768"/>
-            <a:ext cx="1389888" cy="320040"/>
-          </a:xfrm>
-          <a:prstGeom prst="rect">
-            <a:avLst/>
-          </a:prstGeom>
-          <a:noFill/>
-          <a:ln/>
-        </p:spPr>
-        <p:txBody>
-          <a:bodyPr wrap="square" lIns="0" tIns="0" rIns="0" bIns="0" rtlCol="0" anchor="ctr"/>
-          <a:lstStyle/>
-          <a:p>
-            <a:pPr indent="0" marL="0">
-              <a:buNone/>
-            </a:pPr>
-            <a:r>
-              <a:rPr lang="en-US" sz="1150" dirty="0">
-                <a:solidFill>
-                  <a:srgbClr val="6B7A6E"/>
-                </a:solidFill>
-                <a:latin typeface="Microsoft YaHei" pitchFamily="34" charset="0"/>
-                <a:ea typeface="Microsoft YaHei" pitchFamily="34" charset="-122"/>
-                <a:cs typeface="Microsoft YaHei" pitchFamily="34" charset="-120"/>
-              </a:rPr>
-              <a:t>每月净赚</a:t>
-            </a:r>
-            <a:endParaRPr lang="en-US" sz="1150" dirty="0"/>
-          </a:p>
-        </p:txBody>
-      </p:sp>
-      <p:sp>
-        <p:nvSpPr>
-          <p:cNvPr id="17" name="Text 15"/>
-          <p:cNvSpPr/>
-          <p:nvPr/>
-        </p:nvSpPr>
-        <p:spPr>
-          <a:xfrm>
-            <a:off x="6153912" y="1901952"/>
-            <a:ext cx="1426464" cy="548640"/>
-          </a:xfrm>
-          <a:prstGeom prst="rect">
-            <a:avLst/>
-          </a:prstGeom>
-          <a:noFill/>
-          <a:ln/>
-        </p:spPr>
-        <p:txBody>
-          <a:bodyPr wrap="square" lIns="0" tIns="0" rIns="0" bIns="0" rtlCol="0" anchor="ctr"/>
-          <a:lstStyle/>
-          <a:p>
-            <a:pPr indent="0" marL="0">
-              <a:buNone/>
-            </a:pPr>
-            <a:r>
-              <a:rPr lang="en-US" sz="1450" b="1" dirty="0">
-                <a:solidFill>
-                  <a:srgbClr val="2C6E31"/>
-                </a:solidFill>
-                <a:latin typeface="Microsoft YaHei" pitchFamily="34" charset="0"/>
-                <a:ea typeface="Microsoft YaHei" pitchFamily="34" charset="-122"/>
-                <a:cs typeface="Microsoft YaHei" pitchFamily="34" charset="-120"/>
-              </a:rPr>
-              <a:t>约 RM 63,000</a:t>
-            </a:r>
-            <a:endParaRPr lang="en-US" sz="1450" dirty="0"/>
-          </a:p>
-        </p:txBody>
-      </p:sp>
-      <p:sp>
-        <p:nvSpPr>
-          <p:cNvPr id="18" name="Text 16"/>
-          <p:cNvSpPr/>
-          <p:nvPr/>
-        </p:nvSpPr>
-        <p:spPr>
-          <a:xfrm>
-            <a:off x="457200" y="2880360"/>
-            <a:ext cx="8229600" cy="457200"/>
-          </a:xfrm>
-          <a:prstGeom prst="rect">
-            <a:avLst/>
-          </a:prstGeom>
-          <a:noFill/>
-          <a:ln/>
-        </p:spPr>
-        <p:txBody>
-          <a:bodyPr wrap="square" lIns="0" tIns="0" rIns="0" bIns="0" rtlCol="0" anchor="ctr"/>
-          <a:lstStyle/>
-          <a:p>
-            <a:pPr algn="ctr" indent="0" marL="0">
-              <a:buNone/>
-            </a:pPr>
-            <a:r>
-              <a:rPr lang="en-US" sz="1700" dirty="0">
-                <a:solidFill>
-                  <a:srgbClr val="26312A"/>
-                </a:solidFill>
-                <a:latin typeface="Microsoft YaHei" pitchFamily="34" charset="0"/>
-                <a:ea typeface="Microsoft YaHei" pitchFamily="34" charset="-122"/>
-                <a:cs typeface="Microsoft YaHei" pitchFamily="34" charset="-120"/>
-              </a:rPr>
-              <a:t>每月约 RM 63,000 × 6 个月 ≈ </a:t>
-            </a:r>
-            <a:pPr algn="ctr" indent="0" marL="0">
-              <a:buNone/>
-            </a:pPr>
-            <a:r>
-              <a:rPr lang="en-US" sz="1700" b="1" dirty="0">
-                <a:solidFill>
-                  <a:srgbClr val="2C6E31"/>
-                </a:solidFill>
-                <a:latin typeface="Microsoft YaHei" pitchFamily="34" charset="0"/>
-                <a:ea typeface="Microsoft YaHei" pitchFamily="34" charset="-122"/>
-                <a:cs typeface="Microsoft YaHei" pitchFamily="34" charset="-120"/>
-              </a:rPr>
-              <a:t>H2 赚回约 RM 380,000</a:t>
-            </a:r>
-            <a:endParaRPr lang="en-US" sz="1700" dirty="0"/>
-          </a:p>
-        </p:txBody>
-      </p:sp>
-      <p:sp>
-        <p:nvSpPr>
-          <p:cNvPr id="19" name="Shape 17"/>
-          <p:cNvSpPr/>
-          <p:nvPr/>
-        </p:nvSpPr>
-        <p:spPr>
-          <a:xfrm>
-            <a:off x="1463040" y="3474720"/>
-            <a:ext cx="6217920" cy="960120"/>
-          </a:xfrm>
-          <a:prstGeom prst="roundRect">
-            <a:avLst>
-              <a:gd name="adj" fmla="val 8571"/>
-            </a:avLst>
-          </a:prstGeom>
-          <a:solidFill>
-            <a:srgbClr val="F1F7EC"/>
-          </a:solidFill>
-          <a:ln/>
-          <a:effectLst>
-            <a:outerShdw sx="100000" sy="100000" kx="0" ky="0" algn="bl" rotWithShape="0" blurRad="88900" dist="25400" dir="2700000">
-              <a:srgbClr val="000000">
-                <a:alpha val="13000"/>
-              </a:srgbClr>
-            </a:outerShdw>
-          </a:effectLst>
-        </p:spPr>
-      </p:sp>
-      <p:sp>
-        <p:nvSpPr>
-          <p:cNvPr id="20" name="Text 18"/>
-          <p:cNvSpPr/>
-          <p:nvPr/>
-        </p:nvSpPr>
-        <p:spPr>
-          <a:xfrm>
-            <a:off x="1463040" y="3474720"/>
-            <a:ext cx="6217920" cy="960120"/>
-          </a:xfrm>
-          <a:prstGeom prst="rect">
-            <a:avLst/>
-          </a:prstGeom>
-          <a:noFill/>
-          <a:ln/>
-        </p:spPr>
-        <p:txBody>
-          <a:bodyPr wrap="square" lIns="0" tIns="0" rIns="0" bIns="0" rtlCol="0" anchor="ctr"/>
-          <a:lstStyle/>
-          <a:p>
-            <a:pPr algn="ctr" indent="0" marL="0">
-              <a:buNone/>
-            </a:pPr>
-            <a:r>
-              <a:rPr lang="en-US" sz="1600" dirty="0">
-                <a:solidFill>
-                  <a:srgbClr val="26312A"/>
-                </a:solidFill>
-                <a:latin typeface="Microsoft YaHei" pitchFamily="34" charset="0"/>
-                <a:ea typeface="Microsoft YaHei" pitchFamily="34" charset="-122"/>
-                <a:cs typeface="Microsoft YaHei" pitchFamily="34" charset="-120"/>
-              </a:rPr>
-              <a:t>上半年 -45 万  +  下半年 +38 万  ≈  </a:t>
-            </a:r>
-            <a:pPr algn="ctr" indent="0" marL="0">
-              <a:buNone/>
-            </a:pPr>
-            <a:r>
-              <a:rPr lang="en-US" sz="1900" b="1" dirty="0">
-                <a:solidFill>
-                  <a:srgbClr val="2C6E31"/>
-                </a:solidFill>
-                <a:latin typeface="Microsoft YaHei" pitchFamily="34" charset="0"/>
-                <a:ea typeface="Microsoft YaHei" pitchFamily="34" charset="-122"/>
-                <a:cs typeface="Microsoft YaHei" pitchFamily="34" charset="-120"/>
-              </a:rPr>
-              <a:t>全年基本打平</a:t>
-            </a:r>
-            <a:endParaRPr lang="en-US" sz="1600" dirty="0"/>
-          </a:p>
-        </p:txBody>
-      </p:sp>
-      <p:sp>
-        <p:nvSpPr>
-          <p:cNvPr id="21" name="Text 19"/>
-          <p:cNvSpPr/>
-          <p:nvPr/>
-        </p:nvSpPr>
-        <p:spPr>
-          <a:xfrm>
-            <a:off x="457200" y="4617720"/>
-            <a:ext cx="8229600" cy="365760"/>
-          </a:xfrm>
-          <a:prstGeom prst="rect">
-            <a:avLst/>
-          </a:prstGeom>
-          <a:noFill/>
-          <a:ln/>
-        </p:spPr>
-        <p:txBody>
-          <a:bodyPr wrap="square" lIns="0" tIns="0" rIns="0" bIns="0" rtlCol="0" anchor="ctr"/>
-          <a:lstStyle/>
-          <a:p>
-            <a:pPr algn="ctr" indent="0" marL="0">
-              <a:buNone/>
-            </a:pPr>
-            <a:r>
-              <a:rPr lang="en-US" sz="1300" i="1" dirty="0">
-                <a:solidFill>
-                  <a:srgbClr val="6B7A6E"/>
-                </a:solidFill>
-                <a:latin typeface="Microsoft YaHei" pitchFamily="34" charset="0"/>
-                <a:ea typeface="Microsoft YaHei" pitchFamily="34" charset="-122"/>
-                <a:cs typeface="Microsoft YaHei" pitchFamily="34" charset="-120"/>
-              </a:rPr>
-              <a:t>不靠奇迹，不靠翻倍 —— 只要把 5 月重复六次。</a:t>
-            </a:r>
-            <a:endParaRPr lang="en-US" sz="1300" dirty="0"/>
           </a:p>
         </p:txBody>
       </p:sp>

--- a/MamaVege_2026上半年业绩报告.pptx
+++ b/MamaVege_2026上半年业绩报告.pptx
@@ -17,9 +17,10 @@
     <p:sldId id="265" r:id="rId11"/>
     <p:sldId id="266" r:id="rId12"/>
     <p:sldId id="267" r:id="rId13"/>
+    <p:sldId id="268" r:id="rId14"/>
   </p:sldIdLst>
   <p:notesMasterIdLst>
-    <p:notesMasterId r:id="rId14"/>
+    <p:notesMasterId r:id="rId15"/>
   </p:notesMasterIdLst>
   <p:sldSz cx="9144000" cy="5143500"/>
   <p:notesSz cx="5143500" cy="9144000"/>
@@ -1627,6 +1628,94 @@
 </p:notes>
 </file>
 
+<file path=ppt/notesSlides/notesSlide13.xml><?xml version="1.0" encoding="utf-8"?>
+<p:notes xmlns:a="http://schemas.openxmlformats.org/drawingml/2006/main" xmlns:r="http://schemas.openxmlformats.org/officeDocument/2006/relationships" xmlns:p="http://schemas.openxmlformats.org/presentationml/2006/main">
+  <p:cSld>
+    <p:spTree>
+      <p:nvGrpSpPr>
+        <p:cNvPr id="1" name=""/>
+        <p:cNvGrpSpPr/>
+        <p:nvPr/>
+      </p:nvGrpSpPr>
+      <p:grpSpPr>
+        <a:xfrm>
+          <a:off x="0" y="0"/>
+          <a:ext cx="0" cy="0"/>
+          <a:chOff x="0" y="0"/>
+          <a:chExt cx="0" cy="0"/>
+        </a:xfrm>
+      </p:grpSpPr>
+      <p:sp>
+        <p:nvSpPr>
+          <p:cNvPr id="2" name="Slide Image Placeholder 1"/>
+          <p:cNvSpPr>
+            <a:spLocks noGrp="1" noRot="1" noChangeAspect="1"/>
+          </p:cNvSpPr>
+          <p:nvPr>
+            <p:ph type="sldImg"/>
+          </p:nvPr>
+        </p:nvSpPr>
+        <p:spPr/>
+      </p:sp>
+      <p:sp>
+        <p:nvSpPr>
+          <p:cNvPr id="3" name="Notes Placeholder 2"/>
+          <p:cNvSpPr>
+            <a:spLocks noGrp="1"/>
+          </p:cNvSpPr>
+          <p:nvPr>
+            <p:ph type="body" idx="1"/>
+          </p:nvPr>
+        </p:nvSpPr>
+        <p:spPr/>
+        <p:txBody>
+          <a:bodyPr/>
+          <a:lstStyle/>
+          <a:p>
+            <a:r>
+              <a:rPr lang="en-US" dirty="0"/>
+              <a:t/>
+            </a:r>
+            <a:endParaRPr lang="en-US" dirty="0"/>
+          </a:p>
+        </p:txBody>
+      </p:sp>
+      <p:sp>
+        <p:nvSpPr>
+          <p:cNvPr id="4" name="Slide Number Placeholder 3"/>
+          <p:cNvSpPr>
+            <a:spLocks noGrp="1"/>
+          </p:cNvSpPr>
+          <p:nvPr>
+            <p:ph type="sldNum" sz="quarter" idx="10"/>
+          </p:nvPr>
+        </p:nvSpPr>
+        <p:spPr/>
+        <p:txBody>
+          <a:bodyPr/>
+          <a:lstStyle/>
+          <a:p>
+            <a:fld id="{F7021451-1387-4CA6-816F-3879F97B5CBC}" type="slidenum">
+              <a:rPr lang="en-US"/>
+              <a:t>13</a:t>
+            </a:fld>
+            <a:endParaRPr lang="en-US"/>
+          </a:p>
+        </p:txBody>
+      </p:sp>
+    </p:spTree>
+    <p:extLst>
+      <p:ext uri="{BB962C8B-B14F-4D97-AF65-F5344CB8AC3E}">
+        <p14:creationId xmlns:p14="http://schemas.microsoft.com/office/powerpoint/2010/main" val="1024086991"/>
+      </p:ext>
+    </p:extLst>
+  </p:cSld>
+  <p:clrMapOvr>
+    <a:masterClrMapping/>
+  </p:clrMapOvr>
+</p:notes>
+</file>
+
 <file path=ppt/notesSlides/notesSlide2.xml><?xml version="1.0" encoding="utf-8"?>
 <p:notes xmlns:a="http://schemas.openxmlformats.org/drawingml/2006/main" xmlns:r="http://schemas.openxmlformats.org/officeDocument/2006/relationships" xmlns:p="http://schemas.openxmlformats.org/presentationml/2006/main">
   <p:cSld>
@@ -3717,7 +3806,7 @@
                 <a:ea typeface="Microsoft YaHei" pitchFamily="34" charset="-122"/>
                 <a:cs typeface="Microsoft YaHei" pitchFamily="34" charset="-120"/>
               </a:rPr>
-              <a:t>把 5 月变成每一个月：每个团队的任务</a:t>
+              <a:t>怎么做到？下半年我们手上的四张牌</a:t>
             </a:r>
             <a:endParaRPr lang="en-US" sz="2700" dirty="0"/>
           </a:p>
@@ -3731,21 +3820,50 @@
         </p:nvSpPr>
         <p:spPr>
           <a:xfrm>
-            <a:off x="548640" y="1143000"/>
-            <a:ext cx="475488" cy="475488"/>
-          </a:xfrm>
-          <a:prstGeom prst="ellipse">
-            <a:avLst/>
+            <a:off x="457200" y="1097280"/>
+            <a:ext cx="3977640" cy="1344168"/>
+          </a:xfrm>
+          <a:prstGeom prst="roundRect">
+            <a:avLst>
+              <a:gd name="adj" fmla="val 5442"/>
+            </a:avLst>
           </a:prstGeom>
           <a:solidFill>
             <a:srgbClr val="F1F7EC"/>
           </a:solidFill>
           <a:ln/>
+          <a:effectLst>
+            <a:outerShdw sx="100000" sy="100000" kx="0" ky="0" algn="bl" rotWithShape="0" blurRad="88900" dist="25400" dir="2700000">
+              <a:srgbClr val="000000">
+                <a:alpha val="13000"/>
+              </a:srgbClr>
+            </a:outerShdw>
+          </a:effectLst>
+        </p:spPr>
+      </p:sp>
+      <p:sp>
+        <p:nvSpPr>
+          <p:cNvPr id="4" name="Shape 2"/>
+          <p:cNvSpPr/>
+          <p:nvPr/>
+        </p:nvSpPr>
+        <p:spPr>
+          <a:xfrm>
+            <a:off x="658368" y="1280160"/>
+            <a:ext cx="475488" cy="475488"/>
+          </a:xfrm>
+          <a:prstGeom prst="ellipse">
+            <a:avLst/>
+          </a:prstGeom>
+          <a:solidFill>
+            <a:srgbClr val="FFFFFF"/>
+          </a:solidFill>
+          <a:ln/>
         </p:spPr>
       </p:sp>
       <p:pic>
         <p:nvPicPr>
-          <p:cNvPr id="4" name="Image 0" descr="preencoded.png">    </p:cNvPr>
+          <p:cNvPr id="5" name="Image 0" descr="preencoded.png">    </p:cNvPr>
           <p:cNvPicPr>
             <a:picLocks noChangeAspect="1"/>
           </p:cNvPicPr>
@@ -3759,7 +3877,7 @@
         </p:blipFill>
         <p:spPr>
           <a:xfrm>
-            <a:off x="667512" y="1261872"/>
+            <a:off x="777240" y="1399032"/>
             <a:ext cx="237744" cy="237744"/>
           </a:xfrm>
           <a:prstGeom prst="rect">
@@ -3769,14 +3887,14 @@
       </p:pic>
       <p:sp>
         <p:nvSpPr>
-          <p:cNvPr id="5" name="Text 2"/>
-          <p:cNvSpPr/>
-          <p:nvPr/>
-        </p:nvSpPr>
-        <p:spPr>
-          <a:xfrm>
-            <a:off x="1234440" y="1078992"/>
-            <a:ext cx="1600200" cy="603504"/>
+          <p:cNvPr id="6" name="Text 3"/>
+          <p:cNvSpPr/>
+          <p:nvPr/>
+        </p:nvSpPr>
+        <p:spPr>
+          <a:xfrm>
+            <a:off x="1280160" y="1225296"/>
+            <a:ext cx="3063240" cy="347472"/>
           </a:xfrm>
           <a:prstGeom prst="rect">
             <a:avLst/>
@@ -3800,7 +3918,21 @@
                 <a:ea typeface="Microsoft YaHei" pitchFamily="34" charset="-122"/>
                 <a:cs typeface="Microsoft YaHei" pitchFamily="34" charset="-120"/>
               </a:rPr>
-              <a:t>销售团队</a:t>
+              <a:t>新品「麻辣面」  </a:t>
+            </a:r>
+            <a:pPr indent="0" marL="0">
+              <a:buNone/>
+            </a:pPr>
+            <a:r>
+              <a:rPr lang="en-US" sz="1050" b="1" dirty="0">
+                <a:solidFill>
+                  <a:srgbClr val="C2453A"/>
+                </a:solidFill>
+                <a:latin typeface="Microsoft YaHei" pitchFamily="34" charset="0"/>
+                <a:ea typeface="Microsoft YaHei" pitchFamily="34" charset="-122"/>
+                <a:cs typeface="Microsoft YaHei" pitchFamily="34" charset="-120"/>
+              </a:rPr>
+              <a:t>9-10 月主推</a:t>
             </a:r>
             <a:endParaRPr lang="en-US" sz="1500" dirty="0"/>
           </a:p>
@@ -3808,30 +3940,30 @@
       </p:sp>
       <p:sp>
         <p:nvSpPr>
-          <p:cNvPr id="6" name="Text 3"/>
-          <p:cNvSpPr/>
-          <p:nvPr/>
-        </p:nvSpPr>
-        <p:spPr>
-          <a:xfrm>
-            <a:off x="2880360" y="1078992"/>
-            <a:ext cx="5760720" cy="603504"/>
-          </a:xfrm>
-          <a:prstGeom prst="rect">
-            <a:avLst/>
-          </a:prstGeom>
-          <a:noFill/>
-          <a:ln/>
-        </p:spPr>
-        <p:txBody>
-          <a:bodyPr wrap="square" lIns="0" tIns="0" rIns="0" bIns="0" rtlCol="0" anchor="ctr"/>
-          <a:lstStyle/>
-          <a:p>
-            <a:pPr indent="0" marL="0">
-              <a:buNone/>
-            </a:pPr>
-            <a:r>
-              <a:rPr lang="en-US" sz="1250" dirty="0">
+          <p:cNvPr id="7" name="Text 4"/>
+          <p:cNvSpPr/>
+          <p:nvPr/>
+        </p:nvSpPr>
+        <p:spPr>
+          <a:xfrm>
+            <a:off x="1280160" y="1600200"/>
+            <a:ext cx="2999232" cy="777240"/>
+          </a:xfrm>
+          <a:prstGeom prst="rect">
+            <a:avLst/>
+          </a:prstGeom>
+          <a:noFill/>
+          <a:ln/>
+        </p:spPr>
+        <p:txBody>
+          <a:bodyPr wrap="square" lIns="0" tIns="0" rIns="0" bIns="0" rtlCol="0" anchor="ctr"/>
+          <a:lstStyle/>
+          <a:p>
+            <a:pPr indent="0" marL="0">
+              <a:buNone/>
+            </a:pPr>
+            <a:r>
+              <a:rPr lang="en-US" sz="1050" dirty="0">
                 <a:solidFill>
                   <a:srgbClr val="4A554C"/>
                 </a:solidFill>
@@ -3839,34 +3971,11 @@
                 <a:ea typeface="Microsoft YaHei" pitchFamily="34" charset="-122"/>
                 <a:cs typeface="Microsoft YaHei" pitchFamily="34" charset="-120"/>
               </a:rPr>
-              <a:t>每月 RM 550,000，主推高毛利产品，盯紧每一家门店与渠道</a:t>
-            </a:r>
-            <a:endParaRPr lang="en-US" sz="1250" dirty="0"/>
-          </a:p>
-        </p:txBody>
-      </p:sp>
-      <p:sp>
-        <p:nvSpPr>
-          <p:cNvPr id="7" name="Shape 4"/>
-          <p:cNvSpPr/>
-          <p:nvPr/>
-        </p:nvSpPr>
-        <p:spPr>
-          <a:xfrm>
-            <a:off x="1234440" y="1755648"/>
-            <a:ext cx="7406640" cy="0"/>
-          </a:xfrm>
-          <a:prstGeom prst="line">
-            <a:avLst/>
-          </a:prstGeom>
-          <a:noFill/>
-          <a:ln w="9525">
-            <a:solidFill>
-              <a:srgbClr val="E4EAE2"/>
-            </a:solidFill>
-            <a:prstDash val="solid"/>
-          </a:ln>
-        </p:spPr>
+              <a:t>干拌 + 汤两个口味，8 月中到货，9 月起全面招商铺市 —— 下半年最大的新增长点</a:t>
+            </a:r>
+            <a:endParaRPr lang="en-US" sz="1050" dirty="0"/>
+          </a:p>
+        </p:txBody>
       </p:sp>
       <p:sp>
         <p:nvSpPr>
@@ -3876,21 +3985,50 @@
         </p:nvSpPr>
         <p:spPr>
           <a:xfrm>
-            <a:off x="548640" y="1892808"/>
-            <a:ext cx="475488" cy="475488"/>
-          </a:xfrm>
-          <a:prstGeom prst="ellipse">
-            <a:avLst/>
+            <a:off x="4709160" y="1097280"/>
+            <a:ext cx="3977640" cy="1344168"/>
+          </a:xfrm>
+          <a:prstGeom prst="roundRect">
+            <a:avLst>
+              <a:gd name="adj" fmla="val 5442"/>
+            </a:avLst>
           </a:prstGeom>
           <a:solidFill>
             <a:srgbClr val="F1F7EC"/>
           </a:solidFill>
           <a:ln/>
+          <a:effectLst>
+            <a:outerShdw sx="100000" sy="100000" kx="0" ky="0" algn="bl" rotWithShape="0" blurRad="88900" dist="25400" dir="2700000">
+              <a:srgbClr val="000000">
+                <a:alpha val="13000"/>
+              </a:srgbClr>
+            </a:outerShdw>
+          </a:effectLst>
+        </p:spPr>
+      </p:sp>
+      <p:sp>
+        <p:nvSpPr>
+          <p:cNvPr id="9" name="Shape 6"/>
+          <p:cNvSpPr/>
+          <p:nvPr/>
+        </p:nvSpPr>
+        <p:spPr>
+          <a:xfrm>
+            <a:off x="4910328" y="1280160"/>
+            <a:ext cx="475488" cy="475488"/>
+          </a:xfrm>
+          <a:prstGeom prst="ellipse">
+            <a:avLst/>
+          </a:prstGeom>
+          <a:solidFill>
+            <a:srgbClr val="FFFFFF"/>
+          </a:solidFill>
+          <a:ln/>
         </p:spPr>
       </p:sp>
       <p:pic>
         <p:nvPicPr>
-          <p:cNvPr id="9" name="Image 1" descr="preencoded.png">    </p:cNvPr>
+          <p:cNvPr id="10" name="Image 1" descr="preencoded.png">    </p:cNvPr>
           <p:cNvPicPr>
             <a:picLocks noChangeAspect="1"/>
           </p:cNvPicPr>
@@ -3904,7 +4042,7 @@
         </p:blipFill>
         <p:spPr>
           <a:xfrm>
-            <a:off x="667512" y="2011680"/>
+            <a:off x="5029200" y="1399032"/>
             <a:ext cx="237744" cy="237744"/>
           </a:xfrm>
           <a:prstGeom prst="rect">
@@ -3914,14 +4052,14 @@
       </p:pic>
       <p:sp>
         <p:nvSpPr>
-          <p:cNvPr id="10" name="Text 6"/>
-          <p:cNvSpPr/>
-          <p:nvPr/>
-        </p:nvSpPr>
-        <p:spPr>
-          <a:xfrm>
-            <a:off x="1234440" y="1828800"/>
-            <a:ext cx="1600200" cy="603504"/>
+          <p:cNvPr id="11" name="Text 7"/>
+          <p:cNvSpPr/>
+          <p:nvPr/>
+        </p:nvSpPr>
+        <p:spPr>
+          <a:xfrm>
+            <a:off x="5532120" y="1225296"/>
+            <a:ext cx="3063240" cy="347472"/>
           </a:xfrm>
           <a:prstGeom prst="rect">
             <a:avLst/>
@@ -3945,7 +4083,21 @@
                 <a:ea typeface="Microsoft YaHei" pitchFamily="34" charset="-122"/>
                 <a:cs typeface="Microsoft YaHei" pitchFamily="34" charset="-120"/>
               </a:rPr>
-              <a:t>市场营销</a:t>
+              <a:t>素食节大促  </a:t>
+            </a:r>
+            <a:pPr indent="0" marL="0">
+              <a:buNone/>
+            </a:pPr>
+            <a:r>
+              <a:rPr lang="en-US" sz="1050" b="1" dirty="0">
+                <a:solidFill>
+                  <a:srgbClr val="E0A93E"/>
+                </a:solidFill>
+                <a:latin typeface="Microsoft YaHei" pitchFamily="34" charset="0"/>
+                <a:ea typeface="Microsoft YaHei" pitchFamily="34" charset="-122"/>
+                <a:cs typeface="Microsoft YaHei" pitchFamily="34" charset="-120"/>
+              </a:rPr>
+              <a:t>10/10-19</a:t>
             </a:r>
             <a:endParaRPr lang="en-US" sz="1500" dirty="0"/>
           </a:p>
@@ -3953,30 +4105,30 @@
       </p:sp>
       <p:sp>
         <p:nvSpPr>
-          <p:cNvPr id="11" name="Text 7"/>
-          <p:cNvSpPr/>
-          <p:nvPr/>
-        </p:nvSpPr>
-        <p:spPr>
-          <a:xfrm>
-            <a:off x="2880360" y="1828800"/>
-            <a:ext cx="5760720" cy="603504"/>
-          </a:xfrm>
-          <a:prstGeom prst="rect">
-            <a:avLst/>
-          </a:prstGeom>
-          <a:noFill/>
-          <a:ln/>
-        </p:spPr>
-        <p:txBody>
-          <a:bodyPr wrap="square" lIns="0" tIns="0" rIns="0" bIns="0" rtlCol="0" anchor="ctr"/>
-          <a:lstStyle/>
-          <a:p>
-            <a:pPr indent="0" marL="0">
-              <a:buNone/>
-            </a:pPr>
-            <a:r>
-              <a:rPr lang="en-US" sz="1250" dirty="0">
+          <p:cNvPr id="12" name="Text 8"/>
+          <p:cNvSpPr/>
+          <p:nvPr/>
+        </p:nvSpPr>
+        <p:spPr>
+          <a:xfrm>
+            <a:off x="5532120" y="1600200"/>
+            <a:ext cx="2999232" cy="777240"/>
+          </a:xfrm>
+          <a:prstGeom prst="rect">
+            <a:avLst/>
+          </a:prstGeom>
+          <a:noFill/>
+          <a:ln/>
+        </p:spPr>
+        <p:txBody>
+          <a:bodyPr wrap="square" lIns="0" tIns="0" rIns="0" bIns="0" rtlCol="0" anchor="ctr"/>
+          <a:lstStyle/>
+          <a:p>
+            <a:pPr indent="0" marL="0">
+              <a:buNone/>
+            </a:pPr>
+            <a:r>
+              <a:rPr lang="en-US" sz="1050" dirty="0">
                 <a:solidFill>
                   <a:srgbClr val="4A554C"/>
                 </a:solidFill>
@@ -3984,34 +4136,11 @@
                 <a:ea typeface="Microsoft YaHei" pitchFamily="34" charset="-122"/>
                 <a:cs typeface="Microsoft YaHei" pitchFamily="34" charset="-120"/>
               </a:rPr>
-              <a:t>每笔投放先小额测试、算回报 —— 对不上回报的，立刻停</a:t>
-            </a:r>
-            <a:endParaRPr lang="en-US" sz="1250" dirty="0"/>
-          </a:p>
-        </p:txBody>
-      </p:sp>
-      <p:sp>
-        <p:nvSpPr>
-          <p:cNvPr id="12" name="Shape 8"/>
-          <p:cNvSpPr/>
-          <p:nvPr/>
-        </p:nvSpPr>
-        <p:spPr>
-          <a:xfrm>
-            <a:off x="1234440" y="2505456"/>
-            <a:ext cx="7406640" cy="0"/>
-          </a:xfrm>
-          <a:prstGeom prst="line">
-            <a:avLst/>
-          </a:prstGeom>
-          <a:noFill/>
-          <a:ln w="9525">
-            <a:solidFill>
-              <a:srgbClr val="E4EAE2"/>
-            </a:solidFill>
-            <a:prstDash val="solid"/>
-          </a:ln>
-        </p:spPr>
+              <a:t>全年最大的素食消费节点，槟城与北马是主战场，9 月起备货布局 —— 冲全年最高峰</a:t>
+            </a:r>
+            <a:endParaRPr lang="en-US" sz="1050" dirty="0"/>
+          </a:p>
+        </p:txBody>
       </p:sp>
       <p:sp>
         <p:nvSpPr>
@@ -4021,21 +4150,50 @@
         </p:nvSpPr>
         <p:spPr>
           <a:xfrm>
-            <a:off x="548640" y="2642616"/>
-            <a:ext cx="475488" cy="475488"/>
-          </a:xfrm>
-          <a:prstGeom prst="ellipse">
-            <a:avLst/>
+            <a:off x="457200" y="2578608"/>
+            <a:ext cx="3977640" cy="1344168"/>
+          </a:xfrm>
+          <a:prstGeom prst="roundRect">
+            <a:avLst>
+              <a:gd name="adj" fmla="val 5442"/>
+            </a:avLst>
           </a:prstGeom>
           <a:solidFill>
             <a:srgbClr val="F1F7EC"/>
           </a:solidFill>
           <a:ln/>
+          <a:effectLst>
+            <a:outerShdw sx="100000" sy="100000" kx="0" ky="0" algn="bl" rotWithShape="0" blurRad="88900" dist="25400" dir="2700000">
+              <a:srgbClr val="000000">
+                <a:alpha val="13000"/>
+              </a:srgbClr>
+            </a:outerShdw>
+          </a:effectLst>
+        </p:spPr>
+      </p:sp>
+      <p:sp>
+        <p:nvSpPr>
+          <p:cNvPr id="14" name="Shape 10"/>
+          <p:cNvSpPr/>
+          <p:nvPr/>
+        </p:nvSpPr>
+        <p:spPr>
+          <a:xfrm>
+            <a:off x="658368" y="2761488"/>
+            <a:ext cx="475488" cy="475488"/>
+          </a:xfrm>
+          <a:prstGeom prst="ellipse">
+            <a:avLst/>
+          </a:prstGeom>
+          <a:solidFill>
+            <a:srgbClr val="FFFFFF"/>
+          </a:solidFill>
+          <a:ln/>
         </p:spPr>
       </p:sp>
       <p:pic>
         <p:nvPicPr>
-          <p:cNvPr id="14" name="Image 2" descr="preencoded.png">    </p:cNvPr>
+          <p:cNvPr id="15" name="Image 2" descr="preencoded.png">    </p:cNvPr>
           <p:cNvPicPr>
             <a:picLocks noChangeAspect="1"/>
           </p:cNvPicPr>
@@ -4049,7 +4207,7 @@
         </p:blipFill>
         <p:spPr>
           <a:xfrm>
-            <a:off x="667512" y="2761488"/>
+            <a:off x="777240" y="2880360"/>
             <a:ext cx="237744" cy="237744"/>
           </a:xfrm>
           <a:prstGeom prst="rect">
@@ -4059,14 +4217,14 @@
       </p:pic>
       <p:sp>
         <p:nvSpPr>
-          <p:cNvPr id="15" name="Text 10"/>
-          <p:cNvSpPr/>
-          <p:nvPr/>
-        </p:nvSpPr>
-        <p:spPr>
-          <a:xfrm>
-            <a:off x="1234440" y="2578608"/>
-            <a:ext cx="1600200" cy="603504"/>
+          <p:cNvPr id="16" name="Text 11"/>
+          <p:cNvSpPr/>
+          <p:nvPr/>
+        </p:nvSpPr>
+        <p:spPr>
+          <a:xfrm>
+            <a:off x="1280160" y="2706624"/>
+            <a:ext cx="3063240" cy="347472"/>
           </a:xfrm>
           <a:prstGeom prst="rect">
             <a:avLst/>
@@ -4090,7 +4248,21 @@
                 <a:ea typeface="Microsoft YaHei" pitchFamily="34" charset="-122"/>
                 <a:cs typeface="Microsoft YaHei" pitchFamily="34" charset="-120"/>
               </a:rPr>
-              <a:t>运营与采购</a:t>
+              <a:t>KPM + 保温盒  </a:t>
+            </a:r>
+            <a:pPr indent="0" marL="0">
+              <a:buNone/>
+            </a:pPr>
+            <a:r>
+              <a:rPr lang="en-US" sz="1050" b="1" dirty="0">
+                <a:solidFill>
+                  <a:srgbClr val="2C6E31"/>
+                </a:solidFill>
+                <a:latin typeface="Microsoft YaHei" pitchFamily="34" charset="0"/>
+                <a:ea typeface="Microsoft YaHei" pitchFamily="34" charset="-122"/>
+                <a:cs typeface="Microsoft YaHei" pitchFamily="34" charset="-120"/>
+              </a:rPr>
+              <a:t>11-12 月</a:t>
             </a:r>
             <a:endParaRPr lang="en-US" sz="1500" dirty="0"/>
           </a:p>
@@ -4098,30 +4270,30 @@
       </p:sp>
       <p:sp>
         <p:nvSpPr>
-          <p:cNvPr id="16" name="Text 11"/>
-          <p:cNvSpPr/>
-          <p:nvPr/>
-        </p:nvSpPr>
-        <p:spPr>
-          <a:xfrm>
-            <a:off x="2880360" y="2578608"/>
-            <a:ext cx="5760720" cy="603504"/>
-          </a:xfrm>
-          <a:prstGeom prst="rect">
-            <a:avLst/>
-          </a:prstGeom>
-          <a:noFill/>
-          <a:ln/>
-        </p:spPr>
-        <p:txBody>
-          <a:bodyPr wrap="square" lIns="0" tIns="0" rIns="0" bIns="0" rtlCol="0" anchor="ctr"/>
-          <a:lstStyle/>
-          <a:p>
-            <a:pPr indent="0" marL="0">
-              <a:buNone/>
-            </a:pPr>
-            <a:r>
-              <a:rPr lang="en-US" sz="1250" dirty="0">
+          <p:cNvPr id="17" name="Text 12"/>
+          <p:cNvSpPr/>
+          <p:nvPr/>
+        </p:nvSpPr>
+        <p:spPr>
+          <a:xfrm>
+            <a:off x="1280160" y="3081528"/>
+            <a:ext cx="2999232" cy="777240"/>
+          </a:xfrm>
+          <a:prstGeom prst="rect">
+            <a:avLst/>
+          </a:prstGeom>
+          <a:noFill/>
+          <a:ln/>
+        </p:spPr>
+        <p:txBody>
+          <a:bodyPr wrap="square" lIns="0" tIns="0" rIns="0" bIns="0" rtlCol="0" anchor="ctr"/>
+          <a:lstStyle/>
+          <a:p>
+            <a:pPr indent="0" marL="0">
+              <a:buNone/>
+            </a:pPr>
+            <a:r>
+              <a:rPr lang="en-US" sz="1050" dirty="0">
                 <a:solidFill>
                   <a:srgbClr val="4A554C"/>
                 </a:solidFill>
@@ -4129,34 +4301,11 @@
                 <a:ea typeface="Microsoft YaHei" pitchFamily="34" charset="-122"/>
                 <a:cs typeface="Microsoft YaHei" pitchFamily="34" charset="-120"/>
               </a:rPr>
-              <a:t>库存天数压到 90 天：先卖完现有库存，再谈进货和新品</a:t>
-            </a:r>
-            <a:endParaRPr lang="en-US" sz="1250" dirty="0"/>
-          </a:p>
-        </p:txBody>
-      </p:sp>
-      <p:sp>
-        <p:nvSpPr>
-          <p:cNvPr id="17" name="Shape 12"/>
-          <p:cNvSpPr/>
-          <p:nvPr/>
-        </p:nvSpPr>
-        <p:spPr>
-          <a:xfrm>
-            <a:off x="1234440" y="3255264"/>
-            <a:ext cx="7406640" cy="0"/>
-          </a:xfrm>
-          <a:prstGeom prst="line">
-            <a:avLst/>
-          </a:prstGeom>
-          <a:noFill/>
-          <a:ln w="9525">
-            <a:solidFill>
-              <a:srgbClr val="E4EAE2"/>
-            </a:solidFill>
-            <a:prstDash val="solid"/>
-          </a:ln>
-        </p:spPr>
+              <a:t>买 KPM 送保温盒的年末组合拳 —— 拉动销量的同时，帮公司加快库存周转</a:t>
+            </a:r>
+            <a:endParaRPr lang="en-US" sz="1050" dirty="0"/>
+          </a:p>
+        </p:txBody>
       </p:sp>
       <p:sp>
         <p:nvSpPr>
@@ -4166,21 +4315,50 @@
         </p:nvSpPr>
         <p:spPr>
           <a:xfrm>
-            <a:off x="548640" y="3392424"/>
-            <a:ext cx="475488" cy="475488"/>
-          </a:xfrm>
-          <a:prstGeom prst="ellipse">
-            <a:avLst/>
+            <a:off x="4709160" y="2578608"/>
+            <a:ext cx="3977640" cy="1344168"/>
+          </a:xfrm>
+          <a:prstGeom prst="roundRect">
+            <a:avLst>
+              <a:gd name="adj" fmla="val 5442"/>
+            </a:avLst>
           </a:prstGeom>
           <a:solidFill>
             <a:srgbClr val="F1F7EC"/>
           </a:solidFill>
           <a:ln/>
+          <a:effectLst>
+            <a:outerShdw sx="100000" sy="100000" kx="0" ky="0" algn="bl" rotWithShape="0" blurRad="88900" dist="25400" dir="2700000">
+              <a:srgbClr val="000000">
+                <a:alpha val="13000"/>
+              </a:srgbClr>
+            </a:outerShdw>
+          </a:effectLst>
+        </p:spPr>
+      </p:sp>
+      <p:sp>
+        <p:nvSpPr>
+          <p:cNvPr id="19" name="Shape 14"/>
+          <p:cNvSpPr/>
+          <p:nvPr/>
+        </p:nvSpPr>
+        <p:spPr>
+          <a:xfrm>
+            <a:off x="4910328" y="2761488"/>
+            <a:ext cx="475488" cy="475488"/>
+          </a:xfrm>
+          <a:prstGeom prst="ellipse">
+            <a:avLst/>
+          </a:prstGeom>
+          <a:solidFill>
+            <a:srgbClr val="FFFFFF"/>
+          </a:solidFill>
+          <a:ln/>
         </p:spPr>
       </p:sp>
       <p:pic>
         <p:nvPicPr>
-          <p:cNvPr id="19" name="Image 3" descr="preencoded.png">    </p:cNvPr>
+          <p:cNvPr id="20" name="Image 3" descr="preencoded.png">    </p:cNvPr>
           <p:cNvPicPr>
             <a:picLocks noChangeAspect="1"/>
           </p:cNvPicPr>
@@ -4194,7 +4372,7 @@
         </p:blipFill>
         <p:spPr>
           <a:xfrm>
-            <a:off x="667512" y="3511296"/>
+            <a:off x="5029200" y="2880360"/>
             <a:ext cx="237744" cy="237744"/>
           </a:xfrm>
           <a:prstGeom prst="rect">
@@ -4204,14 +4382,14 @@
       </p:pic>
       <p:sp>
         <p:nvSpPr>
-          <p:cNvPr id="20" name="Text 14"/>
-          <p:cNvSpPr/>
-          <p:nvPr/>
-        </p:nvSpPr>
-        <p:spPr>
-          <a:xfrm>
-            <a:off x="1234440" y="3328416"/>
-            <a:ext cx="1600200" cy="603504"/>
+          <p:cNvPr id="21" name="Text 15"/>
+          <p:cNvSpPr/>
+          <p:nvPr/>
+        </p:nvSpPr>
+        <p:spPr>
+          <a:xfrm>
+            <a:off x="5532120" y="2706624"/>
+            <a:ext cx="3063240" cy="347472"/>
           </a:xfrm>
           <a:prstGeom prst="rect">
             <a:avLst/>
@@ -4235,7 +4413,21 @@
                 <a:ea typeface="Microsoft YaHei" pitchFamily="34" charset="-122"/>
                 <a:cs typeface="Microsoft YaHei" pitchFamily="34" charset="-120"/>
               </a:rPr>
-              <a:t>财务</a:t>
+              <a:t>酸民挑战赛巡回  </a:t>
+            </a:r>
+            <a:pPr indent="0" marL="0">
+              <a:buNone/>
+            </a:pPr>
+            <a:r>
+              <a:rPr lang="en-US" sz="1050" b="1" dirty="0">
+                <a:solidFill>
+                  <a:srgbClr val="D46A28"/>
+                </a:solidFill>
+                <a:latin typeface="Microsoft YaHei" pitchFamily="34" charset="0"/>
+                <a:ea typeface="Microsoft YaHei" pitchFamily="34" charset="-122"/>
+                <a:cs typeface="Microsoft YaHei" pitchFamily="34" charset="-120"/>
+              </a:rPr>
+              <a:t>7 月起每月 2 场+</a:t>
             </a:r>
             <a:endParaRPr lang="en-US" sz="1500" dirty="0"/>
           </a:p>
@@ -4243,30 +4435,30 @@
       </p:sp>
       <p:sp>
         <p:nvSpPr>
-          <p:cNvPr id="21" name="Text 15"/>
-          <p:cNvSpPr/>
-          <p:nvPr/>
-        </p:nvSpPr>
-        <p:spPr>
-          <a:xfrm>
-            <a:off x="2880360" y="3328416"/>
-            <a:ext cx="5760720" cy="603504"/>
-          </a:xfrm>
-          <a:prstGeom prst="rect">
-            <a:avLst/>
-          </a:prstGeom>
-          <a:noFill/>
-          <a:ln/>
-        </p:spPr>
-        <p:txBody>
-          <a:bodyPr wrap="square" lIns="0" tIns="0" rIns="0" bIns="0" rtlCol="0" anchor="ctr"/>
-          <a:lstStyle/>
-          <a:p>
-            <a:pPr indent="0" marL="0">
-              <a:buNone/>
-            </a:pPr>
-            <a:r>
-              <a:rPr lang="en-US" sz="1250" dirty="0">
+          <p:cNvPr id="22" name="Text 16"/>
+          <p:cNvSpPr/>
+          <p:nvPr/>
+        </p:nvSpPr>
+        <p:spPr>
+          <a:xfrm>
+            <a:off x="5532120" y="3081528"/>
+            <a:ext cx="2999232" cy="777240"/>
+          </a:xfrm>
+          <a:prstGeom prst="rect">
+            <a:avLst/>
+          </a:prstGeom>
+          <a:noFill/>
+          <a:ln/>
+        </p:spPr>
+        <p:txBody>
+          <a:bodyPr wrap="square" lIns="0" tIns="0" rIns="0" bIns="0" rtlCol="0" anchor="ctr"/>
+          <a:lstStyle/>
+          <a:p>
+            <a:pPr indent="0" marL="0">
+              <a:buNone/>
+            </a:pPr>
+            <a:r>
+              <a:rPr lang="en-US" sz="1050" dirty="0">
                 <a:solidFill>
                   <a:srgbClr val="4A554C"/>
                 </a:solidFill>
@@ -4274,34 +4466,11 @@
                 <a:ea typeface="Microsoft YaHei" pitchFamily="34" charset="-122"/>
                 <a:cs typeface="Microsoft YaHei" pitchFamily="34" charset="-120"/>
               </a:rPr>
-              <a:t>守住每月 RM 220,000 费用红线，三个数字每月向全员公开</a:t>
-            </a:r>
-            <a:endParaRPr lang="en-US" sz="1250" dirty="0"/>
-          </a:p>
-        </p:txBody>
-      </p:sp>
-      <p:sp>
-        <p:nvSpPr>
-          <p:cNvPr id="22" name="Shape 16"/>
-          <p:cNvSpPr/>
-          <p:nvPr/>
-        </p:nvSpPr>
-        <p:spPr>
-          <a:xfrm>
-            <a:off x="1234440" y="4005072"/>
-            <a:ext cx="7406640" cy="0"/>
-          </a:xfrm>
-          <a:prstGeom prst="line">
-            <a:avLst/>
-          </a:prstGeom>
-          <a:noFill/>
-          <a:ln w="9525">
-            <a:solidFill>
-              <a:srgbClr val="E4EAE2"/>
-            </a:solidFill>
-            <a:prstDash val="solid"/>
-          </a:ln>
-        </p:spPr>
+              <a:t>两分钟吃面赢现金，观众自发拍视频帮我们传播，还能带动现场开单</a:t>
+            </a:r>
+            <a:endParaRPr lang="en-US" sz="1050" dirty="0"/>
+          </a:p>
+        </p:txBody>
       </p:sp>
       <p:sp>
         <p:nvSpPr>
@@ -4311,68 +4480,46 @@
         </p:nvSpPr>
         <p:spPr>
           <a:xfrm>
-            <a:off x="548640" y="4142232"/>
-            <a:ext cx="475488" cy="475488"/>
-          </a:xfrm>
-          <a:prstGeom prst="ellipse">
-            <a:avLst/>
+            <a:off x="457200" y="4160520"/>
+            <a:ext cx="2606040" cy="713232"/>
+          </a:xfrm>
+          <a:prstGeom prst="roundRect">
+            <a:avLst>
+              <a:gd name="adj" fmla="val 10256"/>
+            </a:avLst>
           </a:prstGeom>
           <a:solidFill>
-            <a:srgbClr val="F1F7EC"/>
+            <a:srgbClr val="F5F6F4"/>
           </a:solidFill>
           <a:ln/>
         </p:spPr>
       </p:sp>
-      <p:pic>
-        <p:nvPicPr>
-          <p:cNvPr id="24" name="Image 4" descr="preencoded.png">    </p:cNvPr>
-          <p:cNvPicPr>
-            <a:picLocks noChangeAspect="1"/>
-          </p:cNvPicPr>
-          <p:nvPr/>
-        </p:nvPicPr>
-        <p:blipFill>
-          <a:blip r:embed="rId5"/>
-          <a:stretch>
-            <a:fillRect/>
-          </a:stretch>
-        </p:blipFill>
-        <p:spPr>
-          <a:xfrm>
-            <a:off x="667512" y="4261104"/>
-            <a:ext cx="237744" cy="237744"/>
-          </a:xfrm>
-          <a:prstGeom prst="rect">
-            <a:avLst/>
-          </a:prstGeom>
-        </p:spPr>
-      </p:pic>
-      <p:sp>
-        <p:nvSpPr>
-          <p:cNvPr id="25" name="Text 18"/>
-          <p:cNvSpPr/>
-          <p:nvPr/>
-        </p:nvSpPr>
-        <p:spPr>
-          <a:xfrm>
-            <a:off x="1234440" y="4078224"/>
-            <a:ext cx="1600200" cy="603504"/>
-          </a:xfrm>
-          <a:prstGeom prst="rect">
-            <a:avLst/>
-          </a:prstGeom>
-          <a:noFill/>
-          <a:ln/>
-        </p:spPr>
-        <p:txBody>
-          <a:bodyPr wrap="square" lIns="0" tIns="0" rIns="0" bIns="0" rtlCol="0" anchor="ctr"/>
-          <a:lstStyle/>
-          <a:p>
-            <a:pPr indent="0" marL="0">
-              <a:buNone/>
-            </a:pPr>
-            <a:r>
-              <a:rPr lang="en-US" sz="1500" b="1" dirty="0">
+      <p:sp>
+        <p:nvSpPr>
+          <p:cNvPr id="24" name="Text 18"/>
+          <p:cNvSpPr/>
+          <p:nvPr/>
+        </p:nvSpPr>
+        <p:spPr>
+          <a:xfrm>
+            <a:off x="621792" y="4233672"/>
+            <a:ext cx="2331720" cy="274320"/>
+          </a:xfrm>
+          <a:prstGeom prst="rect">
+            <a:avLst/>
+          </a:prstGeom>
+          <a:noFill/>
+          <a:ln/>
+        </p:spPr>
+        <p:txBody>
+          <a:bodyPr wrap="square" lIns="0" tIns="0" rIns="0" bIns="0" rtlCol="0" anchor="ctr"/>
+          <a:lstStyle/>
+          <a:p>
+            <a:pPr indent="0" marL="0">
+              <a:buNone/>
+            </a:pPr>
+            <a:r>
+              <a:rPr lang="en-US" sz="1200" b="1" dirty="0">
                 <a:solidFill>
                   <a:srgbClr val="26312A"/>
                 </a:solidFill>
@@ -4380,48 +4527,326 @@
                 <a:ea typeface="Microsoft YaHei" pitchFamily="34" charset="-122"/>
                 <a:cs typeface="Microsoft YaHei" pitchFamily="34" charset="-120"/>
               </a:rPr>
-              <a:t>每一个人</a:t>
-            </a:r>
-            <a:endParaRPr lang="en-US" sz="1500" dirty="0"/>
-          </a:p>
-        </p:txBody>
-      </p:sp>
-      <p:sp>
-        <p:nvSpPr>
-          <p:cNvPr id="26" name="Text 19"/>
-          <p:cNvSpPr/>
-          <p:nvPr/>
-        </p:nvSpPr>
-        <p:spPr>
-          <a:xfrm>
-            <a:off x="2880360" y="4078224"/>
-            <a:ext cx="5760720" cy="603504"/>
-          </a:xfrm>
-          <a:prstGeom prst="rect">
-            <a:avLst/>
-          </a:prstGeom>
-          <a:noFill/>
-          <a:ln/>
-        </p:spPr>
-        <p:txBody>
-          <a:bodyPr wrap="square" lIns="0" tIns="0" rIns="0" bIns="0" rtlCol="0" anchor="ctr"/>
-          <a:lstStyle/>
-          <a:p>
-            <a:pPr indent="0" marL="0">
-              <a:buNone/>
-            </a:pPr>
-            <a:r>
-              <a:rPr lang="en-US" sz="1250" dirty="0">
-                <a:solidFill>
-                  <a:srgbClr val="4A554C"/>
-                </a:solidFill>
-                <a:latin typeface="Microsoft YaHei" pitchFamily="34" charset="0"/>
-                <a:ea typeface="Microsoft YaHei" pitchFamily="34" charset="-122"/>
-                <a:cs typeface="Microsoft YaHei" pitchFamily="34" charset="-120"/>
-              </a:rPr>
-              <a:t>花每一块钱之前先问：这能帮我们多卖多少？</a:t>
-            </a:r>
-            <a:endParaRPr lang="en-US" sz="1250" dirty="0"/>
+              <a:t>7-8 月 · 备弹药</a:t>
+            </a:r>
+            <a:endParaRPr lang="en-US" sz="1200" dirty="0"/>
+          </a:p>
+        </p:txBody>
+      </p:sp>
+      <p:sp>
+        <p:nvSpPr>
+          <p:cNvPr id="25" name="Text 19"/>
+          <p:cNvSpPr/>
+          <p:nvPr/>
+        </p:nvSpPr>
+        <p:spPr>
+          <a:xfrm>
+            <a:off x="621792" y="4507992"/>
+            <a:ext cx="2331720" cy="274320"/>
+          </a:xfrm>
+          <a:prstGeom prst="rect">
+            <a:avLst/>
+          </a:prstGeom>
+          <a:noFill/>
+          <a:ln/>
+        </p:spPr>
+        <p:txBody>
+          <a:bodyPr wrap="square" lIns="0" tIns="0" rIns="0" bIns="0" rtlCol="0" anchor="ctr"/>
+          <a:lstStyle/>
+          <a:p>
+            <a:pPr indent="0" marL="0">
+              <a:buNone/>
+            </a:pPr>
+            <a:r>
+              <a:rPr lang="en-US" sz="950" dirty="0">
+                <a:solidFill>
+                  <a:srgbClr val="6B7A6E"/>
+                </a:solidFill>
+                <a:latin typeface="Microsoft YaHei" pitchFamily="34" charset="0"/>
+                <a:ea typeface="Microsoft YaHei" pitchFamily="34" charset="-122"/>
+                <a:cs typeface="Microsoft YaHei" pitchFamily="34" charset="-120"/>
+              </a:rPr>
+              <a:t>招商包、物料、保温盒采购到位</a:t>
+            </a:r>
+            <a:endParaRPr lang="en-US" sz="950" dirty="0"/>
+          </a:p>
+        </p:txBody>
+      </p:sp>
+      <p:sp>
+        <p:nvSpPr>
+          <p:cNvPr id="26" name="Text 20"/>
+          <p:cNvSpPr/>
+          <p:nvPr/>
+        </p:nvSpPr>
+        <p:spPr>
+          <a:xfrm>
+            <a:off x="3017520" y="4297680"/>
+            <a:ext cx="365760" cy="411480"/>
+          </a:xfrm>
+          <a:prstGeom prst="rect">
+            <a:avLst/>
+          </a:prstGeom>
+          <a:noFill/>
+          <a:ln/>
+        </p:spPr>
+        <p:txBody>
+          <a:bodyPr wrap="square" lIns="0" tIns="0" rIns="0" bIns="0" rtlCol="0" anchor="ctr"/>
+          <a:lstStyle/>
+          <a:p>
+            <a:pPr algn="ctr" indent="0" marL="0">
+              <a:buNone/>
+            </a:pPr>
+            <a:r>
+              <a:rPr lang="en-US" sz="1600" b="1" dirty="0">
+                <a:solidFill>
+                  <a:srgbClr val="6B7A6E"/>
+                </a:solidFill>
+                <a:latin typeface="Microsoft YaHei" pitchFamily="34" charset="0"/>
+                <a:ea typeface="Microsoft YaHei" pitchFamily="34" charset="-122"/>
+                <a:cs typeface="Microsoft YaHei" pitchFamily="34" charset="-120"/>
+              </a:rPr>
+              <a:t>→</a:t>
+            </a:r>
+            <a:endParaRPr lang="en-US" sz="1600" dirty="0"/>
+          </a:p>
+        </p:txBody>
+      </p:sp>
+      <p:sp>
+        <p:nvSpPr>
+          <p:cNvPr id="27" name="Shape 21"/>
+          <p:cNvSpPr/>
+          <p:nvPr/>
+        </p:nvSpPr>
+        <p:spPr>
+          <a:xfrm>
+            <a:off x="3337560" y="4160520"/>
+            <a:ext cx="2606040" cy="713232"/>
+          </a:xfrm>
+          <a:prstGeom prst="roundRect">
+            <a:avLst>
+              <a:gd name="adj" fmla="val 10256"/>
+            </a:avLst>
+          </a:prstGeom>
+          <a:solidFill>
+            <a:srgbClr val="1C3A22"/>
+          </a:solidFill>
+          <a:ln/>
+        </p:spPr>
+      </p:sp>
+      <p:sp>
+        <p:nvSpPr>
+          <p:cNvPr id="28" name="Text 22"/>
+          <p:cNvSpPr/>
+          <p:nvPr/>
+        </p:nvSpPr>
+        <p:spPr>
+          <a:xfrm>
+            <a:off x="3502152" y="4233672"/>
+            <a:ext cx="2331720" cy="274320"/>
+          </a:xfrm>
+          <a:prstGeom prst="rect">
+            <a:avLst/>
+          </a:prstGeom>
+          <a:noFill/>
+          <a:ln/>
+        </p:spPr>
+        <p:txBody>
+          <a:bodyPr wrap="square" lIns="0" tIns="0" rIns="0" bIns="0" rtlCol="0" anchor="ctr"/>
+          <a:lstStyle/>
+          <a:p>
+            <a:pPr indent="0" marL="0">
+              <a:buNone/>
+            </a:pPr>
+            <a:r>
+              <a:rPr lang="en-US" sz="1200" b="1" dirty="0">
+                <a:solidFill>
+                  <a:srgbClr val="FFFFFF"/>
+                </a:solidFill>
+                <a:latin typeface="Microsoft YaHei" pitchFamily="34" charset="0"/>
+                <a:ea typeface="Microsoft YaHei" pitchFamily="34" charset="-122"/>
+                <a:cs typeface="Microsoft YaHei" pitchFamily="34" charset="-120"/>
+              </a:rPr>
+              <a:t>9-10 月 · 总攻</a:t>
+            </a:r>
+            <a:endParaRPr lang="en-US" sz="1200" dirty="0"/>
+          </a:p>
+        </p:txBody>
+      </p:sp>
+      <p:sp>
+        <p:nvSpPr>
+          <p:cNvPr id="29" name="Text 23"/>
+          <p:cNvSpPr/>
+          <p:nvPr/>
+        </p:nvSpPr>
+        <p:spPr>
+          <a:xfrm>
+            <a:off x="3502152" y="4507992"/>
+            <a:ext cx="2331720" cy="274320"/>
+          </a:xfrm>
+          <a:prstGeom prst="rect">
+            <a:avLst/>
+          </a:prstGeom>
+          <a:noFill/>
+          <a:ln/>
+        </p:spPr>
+        <p:txBody>
+          <a:bodyPr wrap="square" lIns="0" tIns="0" rIns="0" bIns="0" rtlCol="0" anchor="ctr"/>
+          <a:lstStyle/>
+          <a:p>
+            <a:pPr indent="0" marL="0">
+              <a:buNone/>
+            </a:pPr>
+            <a:r>
+              <a:rPr lang="en-US" sz="950" dirty="0">
+                <a:solidFill>
+                  <a:srgbClr val="97BC62"/>
+                </a:solidFill>
+                <a:latin typeface="Microsoft YaHei" pitchFamily="34" charset="0"/>
+                <a:ea typeface="Microsoft YaHei" pitchFamily="34" charset="-122"/>
+                <a:cs typeface="Microsoft YaHei" pitchFamily="34" charset="-120"/>
+              </a:rPr>
+              <a:t>素食节 × 麻辣面，冲全年最高峰</a:t>
+            </a:r>
+            <a:endParaRPr lang="en-US" sz="950" dirty="0"/>
+          </a:p>
+        </p:txBody>
+      </p:sp>
+      <p:sp>
+        <p:nvSpPr>
+          <p:cNvPr id="30" name="Text 24"/>
+          <p:cNvSpPr/>
+          <p:nvPr/>
+        </p:nvSpPr>
+        <p:spPr>
+          <a:xfrm>
+            <a:off x="5897880" y="4297680"/>
+            <a:ext cx="365760" cy="411480"/>
+          </a:xfrm>
+          <a:prstGeom prst="rect">
+            <a:avLst/>
+          </a:prstGeom>
+          <a:noFill/>
+          <a:ln/>
+        </p:spPr>
+        <p:txBody>
+          <a:bodyPr wrap="square" lIns="0" tIns="0" rIns="0" bIns="0" rtlCol="0" anchor="ctr"/>
+          <a:lstStyle/>
+          <a:p>
+            <a:pPr algn="ctr" indent="0" marL="0">
+              <a:buNone/>
+            </a:pPr>
+            <a:r>
+              <a:rPr lang="en-US" sz="1600" b="1" dirty="0">
+                <a:solidFill>
+                  <a:srgbClr val="6B7A6E"/>
+                </a:solidFill>
+                <a:latin typeface="Microsoft YaHei" pitchFamily="34" charset="0"/>
+                <a:ea typeface="Microsoft YaHei" pitchFamily="34" charset="-122"/>
+                <a:cs typeface="Microsoft YaHei" pitchFamily="34" charset="-120"/>
+              </a:rPr>
+              <a:t>→</a:t>
+            </a:r>
+            <a:endParaRPr lang="en-US" sz="1600" dirty="0"/>
+          </a:p>
+        </p:txBody>
+      </p:sp>
+      <p:sp>
+        <p:nvSpPr>
+          <p:cNvPr id="31" name="Shape 25"/>
+          <p:cNvSpPr/>
+          <p:nvPr/>
+        </p:nvSpPr>
+        <p:spPr>
+          <a:xfrm>
+            <a:off x="6217920" y="4160520"/>
+            <a:ext cx="2606040" cy="713232"/>
+          </a:xfrm>
+          <a:prstGeom prst="roundRect">
+            <a:avLst>
+              <a:gd name="adj" fmla="val 10256"/>
+            </a:avLst>
+          </a:prstGeom>
+          <a:solidFill>
+            <a:srgbClr val="F5F6F4"/>
+          </a:solidFill>
+          <a:ln/>
+        </p:spPr>
+      </p:sp>
+      <p:sp>
+        <p:nvSpPr>
+          <p:cNvPr id="32" name="Text 26"/>
+          <p:cNvSpPr/>
+          <p:nvPr/>
+        </p:nvSpPr>
+        <p:spPr>
+          <a:xfrm>
+            <a:off x="6382512" y="4233672"/>
+            <a:ext cx="2331720" cy="274320"/>
+          </a:xfrm>
+          <a:prstGeom prst="rect">
+            <a:avLst/>
+          </a:prstGeom>
+          <a:noFill/>
+          <a:ln/>
+        </p:spPr>
+        <p:txBody>
+          <a:bodyPr wrap="square" lIns="0" tIns="0" rIns="0" bIns="0" rtlCol="0" anchor="ctr"/>
+          <a:lstStyle/>
+          <a:p>
+            <a:pPr indent="0" marL="0">
+              <a:buNone/>
+            </a:pPr>
+            <a:r>
+              <a:rPr lang="en-US" sz="1200" b="1" dirty="0">
+                <a:solidFill>
+                  <a:srgbClr val="26312A"/>
+                </a:solidFill>
+                <a:latin typeface="Microsoft YaHei" pitchFamily="34" charset="0"/>
+                <a:ea typeface="Microsoft YaHei" pitchFamily="34" charset="-122"/>
+                <a:cs typeface="Microsoft YaHei" pitchFamily="34" charset="-120"/>
+              </a:rPr>
+              <a:t>11-12 月 · 收官</a:t>
+            </a:r>
+            <a:endParaRPr lang="en-US" sz="1200" dirty="0"/>
+          </a:p>
+        </p:txBody>
+      </p:sp>
+      <p:sp>
+        <p:nvSpPr>
+          <p:cNvPr id="33" name="Text 27"/>
+          <p:cNvSpPr/>
+          <p:nvPr/>
+        </p:nvSpPr>
+        <p:spPr>
+          <a:xfrm>
+            <a:off x="6382512" y="4507992"/>
+            <a:ext cx="2331720" cy="274320"/>
+          </a:xfrm>
+          <a:prstGeom prst="rect">
+            <a:avLst/>
+          </a:prstGeom>
+          <a:noFill/>
+          <a:ln/>
+        </p:spPr>
+        <p:txBody>
+          <a:bodyPr wrap="square" lIns="0" tIns="0" rIns="0" bIns="0" rtlCol="0" anchor="ctr"/>
+          <a:lstStyle/>
+          <a:p>
+            <a:pPr indent="0" marL="0">
+              <a:buNone/>
+            </a:pPr>
+            <a:r>
+              <a:rPr lang="en-US" sz="950" dirty="0">
+                <a:solidFill>
+                  <a:srgbClr val="6B7A6E"/>
+                </a:solidFill>
+                <a:latin typeface="Microsoft YaHei" pitchFamily="34" charset="0"/>
+                <a:ea typeface="Microsoft YaHei" pitchFamily="34" charset="-122"/>
+                <a:cs typeface="Microsoft YaHei" pitchFamily="34" charset="-120"/>
+              </a:rPr>
+              <a:t>KPM+保温盒，备战 CNY 2027</a:t>
+            </a:r>
+            <a:endParaRPr lang="en-US" sz="950" dirty="0"/>
           </a:p>
         </p:txBody>
       </p:sp>
@@ -4436,6 +4861,779 @@
 <file path=ppt/slides/slide12.xml><?xml version="1.0" encoding="utf-8"?>
 <p:sld xmlns:a="http://schemas.openxmlformats.org/drawingml/2006/main" xmlns:r="http://schemas.openxmlformats.org/officeDocument/2006/relationships" xmlns:p="http://schemas.openxmlformats.org/presentationml/2006/main">
   <p:cSld name="Slide 12">
+    <p:bg>
+      <p:bgPr>
+        <a:solidFill>
+          <a:srgbClr val="FFFFFF"/>
+        </a:solidFill>
+      </p:bgPr>
+    </p:bg>
+    <p:spTree>
+      <p:nvGrpSpPr>
+        <p:cNvPr id="1" name=""/>
+        <p:cNvGrpSpPr/>
+        <p:nvPr/>
+      </p:nvGrpSpPr>
+      <p:grpSpPr>
+        <a:xfrm>
+          <a:off x="0" y="0"/>
+          <a:ext cx="0" cy="0"/>
+          <a:chOff x="0" y="0"/>
+          <a:chExt cx="0" cy="0"/>
+        </a:xfrm>
+      </p:grpSpPr>
+      <p:sp>
+        <p:nvSpPr>
+          <p:cNvPr id="2" name="Text 0"/>
+          <p:cNvSpPr/>
+          <p:nvPr/>
+        </p:nvSpPr>
+        <p:spPr>
+          <a:xfrm>
+            <a:off x="457200" y="292608"/>
+            <a:ext cx="8229600" cy="640080"/>
+          </a:xfrm>
+          <a:prstGeom prst="rect">
+            <a:avLst/>
+          </a:prstGeom>
+          <a:noFill/>
+          <a:ln/>
+        </p:spPr>
+        <p:txBody>
+          <a:bodyPr wrap="square" lIns="0" tIns="0" rIns="0" bIns="0" rtlCol="0" anchor="ctr"/>
+          <a:lstStyle/>
+          <a:p>
+            <a:pPr indent="0" marL="0">
+              <a:buNone/>
+            </a:pPr>
+            <a:r>
+              <a:rPr lang="en-US" sz="2700" b="1" dirty="0">
+                <a:solidFill>
+                  <a:srgbClr val="26312A"/>
+                </a:solidFill>
+                <a:latin typeface="Microsoft YaHei" pitchFamily="34" charset="0"/>
+                <a:ea typeface="Microsoft YaHei" pitchFamily="34" charset="-122"/>
+                <a:cs typeface="Microsoft YaHei" pitchFamily="34" charset="-120"/>
+              </a:rPr>
+              <a:t>把 5 月变成每一个月：每个团队的任务</a:t>
+            </a:r>
+            <a:endParaRPr lang="en-US" sz="2700" dirty="0"/>
+          </a:p>
+        </p:txBody>
+      </p:sp>
+      <p:sp>
+        <p:nvSpPr>
+          <p:cNvPr id="3" name="Shape 1"/>
+          <p:cNvSpPr/>
+          <p:nvPr/>
+        </p:nvSpPr>
+        <p:spPr>
+          <a:xfrm>
+            <a:off x="548640" y="1143000"/>
+            <a:ext cx="475488" cy="475488"/>
+          </a:xfrm>
+          <a:prstGeom prst="ellipse">
+            <a:avLst/>
+          </a:prstGeom>
+          <a:solidFill>
+            <a:srgbClr val="F1F7EC"/>
+          </a:solidFill>
+          <a:ln/>
+        </p:spPr>
+      </p:sp>
+      <p:pic>
+        <p:nvPicPr>
+          <p:cNvPr id="4" name="Image 0" descr="preencoded.png">    </p:cNvPr>
+          <p:cNvPicPr>
+            <a:picLocks noChangeAspect="1"/>
+          </p:cNvPicPr>
+          <p:nvPr/>
+        </p:nvPicPr>
+        <p:blipFill>
+          <a:blip r:embed="rId1"/>
+          <a:stretch>
+            <a:fillRect/>
+          </a:stretch>
+        </p:blipFill>
+        <p:spPr>
+          <a:xfrm>
+            <a:off x="667512" y="1261872"/>
+            <a:ext cx="237744" cy="237744"/>
+          </a:xfrm>
+          <a:prstGeom prst="rect">
+            <a:avLst/>
+          </a:prstGeom>
+        </p:spPr>
+      </p:pic>
+      <p:sp>
+        <p:nvSpPr>
+          <p:cNvPr id="5" name="Text 2"/>
+          <p:cNvSpPr/>
+          <p:nvPr/>
+        </p:nvSpPr>
+        <p:spPr>
+          <a:xfrm>
+            <a:off x="1234440" y="1078992"/>
+            <a:ext cx="1600200" cy="603504"/>
+          </a:xfrm>
+          <a:prstGeom prst="rect">
+            <a:avLst/>
+          </a:prstGeom>
+          <a:noFill/>
+          <a:ln/>
+        </p:spPr>
+        <p:txBody>
+          <a:bodyPr wrap="square" lIns="0" tIns="0" rIns="0" bIns="0" rtlCol="0" anchor="ctr"/>
+          <a:lstStyle/>
+          <a:p>
+            <a:pPr indent="0" marL="0">
+              <a:buNone/>
+            </a:pPr>
+            <a:r>
+              <a:rPr lang="en-US" sz="1500" b="1" dirty="0">
+                <a:solidFill>
+                  <a:srgbClr val="26312A"/>
+                </a:solidFill>
+                <a:latin typeface="Microsoft YaHei" pitchFamily="34" charset="0"/>
+                <a:ea typeface="Microsoft YaHei" pitchFamily="34" charset="-122"/>
+                <a:cs typeface="Microsoft YaHei" pitchFamily="34" charset="-120"/>
+              </a:rPr>
+              <a:t>销售团队</a:t>
+            </a:r>
+            <a:endParaRPr lang="en-US" sz="1500" dirty="0"/>
+          </a:p>
+        </p:txBody>
+      </p:sp>
+      <p:sp>
+        <p:nvSpPr>
+          <p:cNvPr id="6" name="Text 3"/>
+          <p:cNvSpPr/>
+          <p:nvPr/>
+        </p:nvSpPr>
+        <p:spPr>
+          <a:xfrm>
+            <a:off x="2880360" y="1078992"/>
+            <a:ext cx="5760720" cy="603504"/>
+          </a:xfrm>
+          <a:prstGeom prst="rect">
+            <a:avLst/>
+          </a:prstGeom>
+          <a:noFill/>
+          <a:ln/>
+        </p:spPr>
+        <p:txBody>
+          <a:bodyPr wrap="square" lIns="0" tIns="0" rIns="0" bIns="0" rtlCol="0" anchor="ctr"/>
+          <a:lstStyle/>
+          <a:p>
+            <a:pPr indent="0" marL="0">
+              <a:buNone/>
+            </a:pPr>
+            <a:r>
+              <a:rPr lang="en-US" sz="1250" dirty="0">
+                <a:solidFill>
+                  <a:srgbClr val="4A554C"/>
+                </a:solidFill>
+                <a:latin typeface="Microsoft YaHei" pitchFamily="34" charset="0"/>
+                <a:ea typeface="Microsoft YaHei" pitchFamily="34" charset="-122"/>
+                <a:cs typeface="Microsoft YaHei" pitchFamily="34" charset="-120"/>
+              </a:rPr>
+              <a:t>每月 RM 550,000，主推高毛利产品，盯紧每一家门店与渠道</a:t>
+            </a:r>
+            <a:endParaRPr lang="en-US" sz="1250" dirty="0"/>
+          </a:p>
+        </p:txBody>
+      </p:sp>
+      <p:sp>
+        <p:nvSpPr>
+          <p:cNvPr id="7" name="Shape 4"/>
+          <p:cNvSpPr/>
+          <p:nvPr/>
+        </p:nvSpPr>
+        <p:spPr>
+          <a:xfrm>
+            <a:off x="1234440" y="1755648"/>
+            <a:ext cx="7406640" cy="0"/>
+          </a:xfrm>
+          <a:prstGeom prst="line">
+            <a:avLst/>
+          </a:prstGeom>
+          <a:noFill/>
+          <a:ln w="9525">
+            <a:solidFill>
+              <a:srgbClr val="E4EAE2"/>
+            </a:solidFill>
+            <a:prstDash val="solid"/>
+          </a:ln>
+        </p:spPr>
+      </p:sp>
+      <p:sp>
+        <p:nvSpPr>
+          <p:cNvPr id="8" name="Shape 5"/>
+          <p:cNvSpPr/>
+          <p:nvPr/>
+        </p:nvSpPr>
+        <p:spPr>
+          <a:xfrm>
+            <a:off x="548640" y="1892808"/>
+            <a:ext cx="475488" cy="475488"/>
+          </a:xfrm>
+          <a:prstGeom prst="ellipse">
+            <a:avLst/>
+          </a:prstGeom>
+          <a:solidFill>
+            <a:srgbClr val="F1F7EC"/>
+          </a:solidFill>
+          <a:ln/>
+        </p:spPr>
+      </p:sp>
+      <p:pic>
+        <p:nvPicPr>
+          <p:cNvPr id="9" name="Image 1" descr="preencoded.png">    </p:cNvPr>
+          <p:cNvPicPr>
+            <a:picLocks noChangeAspect="1"/>
+          </p:cNvPicPr>
+          <p:nvPr/>
+        </p:nvPicPr>
+        <p:blipFill>
+          <a:blip r:embed="rId2"/>
+          <a:stretch>
+            <a:fillRect/>
+          </a:stretch>
+        </p:blipFill>
+        <p:spPr>
+          <a:xfrm>
+            <a:off x="667512" y="2011680"/>
+            <a:ext cx="237744" cy="237744"/>
+          </a:xfrm>
+          <a:prstGeom prst="rect">
+            <a:avLst/>
+          </a:prstGeom>
+        </p:spPr>
+      </p:pic>
+      <p:sp>
+        <p:nvSpPr>
+          <p:cNvPr id="10" name="Text 6"/>
+          <p:cNvSpPr/>
+          <p:nvPr/>
+        </p:nvSpPr>
+        <p:spPr>
+          <a:xfrm>
+            <a:off x="1234440" y="1828800"/>
+            <a:ext cx="1600200" cy="603504"/>
+          </a:xfrm>
+          <a:prstGeom prst="rect">
+            <a:avLst/>
+          </a:prstGeom>
+          <a:noFill/>
+          <a:ln/>
+        </p:spPr>
+        <p:txBody>
+          <a:bodyPr wrap="square" lIns="0" tIns="0" rIns="0" bIns="0" rtlCol="0" anchor="ctr"/>
+          <a:lstStyle/>
+          <a:p>
+            <a:pPr indent="0" marL="0">
+              <a:buNone/>
+            </a:pPr>
+            <a:r>
+              <a:rPr lang="en-US" sz="1500" b="1" dirty="0">
+                <a:solidFill>
+                  <a:srgbClr val="26312A"/>
+                </a:solidFill>
+                <a:latin typeface="Microsoft YaHei" pitchFamily="34" charset="0"/>
+                <a:ea typeface="Microsoft YaHei" pitchFamily="34" charset="-122"/>
+                <a:cs typeface="Microsoft YaHei" pitchFamily="34" charset="-120"/>
+              </a:rPr>
+              <a:t>市场营销</a:t>
+            </a:r>
+            <a:endParaRPr lang="en-US" sz="1500" dirty="0"/>
+          </a:p>
+        </p:txBody>
+      </p:sp>
+      <p:sp>
+        <p:nvSpPr>
+          <p:cNvPr id="11" name="Text 7"/>
+          <p:cNvSpPr/>
+          <p:nvPr/>
+        </p:nvSpPr>
+        <p:spPr>
+          <a:xfrm>
+            <a:off x="2880360" y="1828800"/>
+            <a:ext cx="5760720" cy="603504"/>
+          </a:xfrm>
+          <a:prstGeom prst="rect">
+            <a:avLst/>
+          </a:prstGeom>
+          <a:noFill/>
+          <a:ln/>
+        </p:spPr>
+        <p:txBody>
+          <a:bodyPr wrap="square" lIns="0" tIns="0" rIns="0" bIns="0" rtlCol="0" anchor="ctr"/>
+          <a:lstStyle/>
+          <a:p>
+            <a:pPr indent="0" marL="0">
+              <a:buNone/>
+            </a:pPr>
+            <a:r>
+              <a:rPr lang="en-US" sz="1250" dirty="0">
+                <a:solidFill>
+                  <a:srgbClr val="4A554C"/>
+                </a:solidFill>
+                <a:latin typeface="Microsoft YaHei" pitchFamily="34" charset="0"/>
+                <a:ea typeface="Microsoft YaHei" pitchFamily="34" charset="-122"/>
+                <a:cs typeface="Microsoft YaHei" pitchFamily="34" charset="-120"/>
+              </a:rPr>
+              <a:t>每笔投放先小额测试、算回报 —— 对不上回报的，立刻停</a:t>
+            </a:r>
+            <a:endParaRPr lang="en-US" sz="1250" dirty="0"/>
+          </a:p>
+        </p:txBody>
+      </p:sp>
+      <p:sp>
+        <p:nvSpPr>
+          <p:cNvPr id="12" name="Shape 8"/>
+          <p:cNvSpPr/>
+          <p:nvPr/>
+        </p:nvSpPr>
+        <p:spPr>
+          <a:xfrm>
+            <a:off x="1234440" y="2505456"/>
+            <a:ext cx="7406640" cy="0"/>
+          </a:xfrm>
+          <a:prstGeom prst="line">
+            <a:avLst/>
+          </a:prstGeom>
+          <a:noFill/>
+          <a:ln w="9525">
+            <a:solidFill>
+              <a:srgbClr val="E4EAE2"/>
+            </a:solidFill>
+            <a:prstDash val="solid"/>
+          </a:ln>
+        </p:spPr>
+      </p:sp>
+      <p:sp>
+        <p:nvSpPr>
+          <p:cNvPr id="13" name="Shape 9"/>
+          <p:cNvSpPr/>
+          <p:nvPr/>
+        </p:nvSpPr>
+        <p:spPr>
+          <a:xfrm>
+            <a:off x="548640" y="2642616"/>
+            <a:ext cx="475488" cy="475488"/>
+          </a:xfrm>
+          <a:prstGeom prst="ellipse">
+            <a:avLst/>
+          </a:prstGeom>
+          <a:solidFill>
+            <a:srgbClr val="F1F7EC"/>
+          </a:solidFill>
+          <a:ln/>
+        </p:spPr>
+      </p:sp>
+      <p:pic>
+        <p:nvPicPr>
+          <p:cNvPr id="14" name="Image 2" descr="preencoded.png">    </p:cNvPr>
+          <p:cNvPicPr>
+            <a:picLocks noChangeAspect="1"/>
+          </p:cNvPicPr>
+          <p:nvPr/>
+        </p:nvPicPr>
+        <p:blipFill>
+          <a:blip r:embed="rId3"/>
+          <a:stretch>
+            <a:fillRect/>
+          </a:stretch>
+        </p:blipFill>
+        <p:spPr>
+          <a:xfrm>
+            <a:off x="667512" y="2761488"/>
+            <a:ext cx="237744" cy="237744"/>
+          </a:xfrm>
+          <a:prstGeom prst="rect">
+            <a:avLst/>
+          </a:prstGeom>
+        </p:spPr>
+      </p:pic>
+      <p:sp>
+        <p:nvSpPr>
+          <p:cNvPr id="15" name="Text 10"/>
+          <p:cNvSpPr/>
+          <p:nvPr/>
+        </p:nvSpPr>
+        <p:spPr>
+          <a:xfrm>
+            <a:off x="1234440" y="2578608"/>
+            <a:ext cx="1600200" cy="603504"/>
+          </a:xfrm>
+          <a:prstGeom prst="rect">
+            <a:avLst/>
+          </a:prstGeom>
+          <a:noFill/>
+          <a:ln/>
+        </p:spPr>
+        <p:txBody>
+          <a:bodyPr wrap="square" lIns="0" tIns="0" rIns="0" bIns="0" rtlCol="0" anchor="ctr"/>
+          <a:lstStyle/>
+          <a:p>
+            <a:pPr indent="0" marL="0">
+              <a:buNone/>
+            </a:pPr>
+            <a:r>
+              <a:rPr lang="en-US" sz="1500" b="1" dirty="0">
+                <a:solidFill>
+                  <a:srgbClr val="26312A"/>
+                </a:solidFill>
+                <a:latin typeface="Microsoft YaHei" pitchFamily="34" charset="0"/>
+                <a:ea typeface="Microsoft YaHei" pitchFamily="34" charset="-122"/>
+                <a:cs typeface="Microsoft YaHei" pitchFamily="34" charset="-120"/>
+              </a:rPr>
+              <a:t>运营与采购</a:t>
+            </a:r>
+            <a:endParaRPr lang="en-US" sz="1500" dirty="0"/>
+          </a:p>
+        </p:txBody>
+      </p:sp>
+      <p:sp>
+        <p:nvSpPr>
+          <p:cNvPr id="16" name="Text 11"/>
+          <p:cNvSpPr/>
+          <p:nvPr/>
+        </p:nvSpPr>
+        <p:spPr>
+          <a:xfrm>
+            <a:off x="2880360" y="2578608"/>
+            <a:ext cx="5760720" cy="603504"/>
+          </a:xfrm>
+          <a:prstGeom prst="rect">
+            <a:avLst/>
+          </a:prstGeom>
+          <a:noFill/>
+          <a:ln/>
+        </p:spPr>
+        <p:txBody>
+          <a:bodyPr wrap="square" lIns="0" tIns="0" rIns="0" bIns="0" rtlCol="0" anchor="ctr"/>
+          <a:lstStyle/>
+          <a:p>
+            <a:pPr indent="0" marL="0">
+              <a:buNone/>
+            </a:pPr>
+            <a:r>
+              <a:rPr lang="en-US" sz="1250" dirty="0">
+                <a:solidFill>
+                  <a:srgbClr val="4A554C"/>
+                </a:solidFill>
+                <a:latin typeface="Microsoft YaHei" pitchFamily="34" charset="0"/>
+                <a:ea typeface="Microsoft YaHei" pitchFamily="34" charset="-122"/>
+                <a:cs typeface="Microsoft YaHei" pitchFamily="34" charset="-120"/>
+              </a:rPr>
+              <a:t>库存天数压到 90 天：先卖完现有库存，再谈进货和新品</a:t>
+            </a:r>
+            <a:endParaRPr lang="en-US" sz="1250" dirty="0"/>
+          </a:p>
+        </p:txBody>
+      </p:sp>
+      <p:sp>
+        <p:nvSpPr>
+          <p:cNvPr id="17" name="Shape 12"/>
+          <p:cNvSpPr/>
+          <p:nvPr/>
+        </p:nvSpPr>
+        <p:spPr>
+          <a:xfrm>
+            <a:off x="1234440" y="3255264"/>
+            <a:ext cx="7406640" cy="0"/>
+          </a:xfrm>
+          <a:prstGeom prst="line">
+            <a:avLst/>
+          </a:prstGeom>
+          <a:noFill/>
+          <a:ln w="9525">
+            <a:solidFill>
+              <a:srgbClr val="E4EAE2"/>
+            </a:solidFill>
+            <a:prstDash val="solid"/>
+          </a:ln>
+        </p:spPr>
+      </p:sp>
+      <p:sp>
+        <p:nvSpPr>
+          <p:cNvPr id="18" name="Shape 13"/>
+          <p:cNvSpPr/>
+          <p:nvPr/>
+        </p:nvSpPr>
+        <p:spPr>
+          <a:xfrm>
+            <a:off x="548640" y="3392424"/>
+            <a:ext cx="475488" cy="475488"/>
+          </a:xfrm>
+          <a:prstGeom prst="ellipse">
+            <a:avLst/>
+          </a:prstGeom>
+          <a:solidFill>
+            <a:srgbClr val="F1F7EC"/>
+          </a:solidFill>
+          <a:ln/>
+        </p:spPr>
+      </p:sp>
+      <p:pic>
+        <p:nvPicPr>
+          <p:cNvPr id="19" name="Image 3" descr="preencoded.png">    </p:cNvPr>
+          <p:cNvPicPr>
+            <a:picLocks noChangeAspect="1"/>
+          </p:cNvPicPr>
+          <p:nvPr/>
+        </p:nvPicPr>
+        <p:blipFill>
+          <a:blip r:embed="rId4"/>
+          <a:stretch>
+            <a:fillRect/>
+          </a:stretch>
+        </p:blipFill>
+        <p:spPr>
+          <a:xfrm>
+            <a:off x="667512" y="3511296"/>
+            <a:ext cx="237744" cy="237744"/>
+          </a:xfrm>
+          <a:prstGeom prst="rect">
+            <a:avLst/>
+          </a:prstGeom>
+        </p:spPr>
+      </p:pic>
+      <p:sp>
+        <p:nvSpPr>
+          <p:cNvPr id="20" name="Text 14"/>
+          <p:cNvSpPr/>
+          <p:nvPr/>
+        </p:nvSpPr>
+        <p:spPr>
+          <a:xfrm>
+            <a:off x="1234440" y="3328416"/>
+            <a:ext cx="1600200" cy="603504"/>
+          </a:xfrm>
+          <a:prstGeom prst="rect">
+            <a:avLst/>
+          </a:prstGeom>
+          <a:noFill/>
+          <a:ln/>
+        </p:spPr>
+        <p:txBody>
+          <a:bodyPr wrap="square" lIns="0" tIns="0" rIns="0" bIns="0" rtlCol="0" anchor="ctr"/>
+          <a:lstStyle/>
+          <a:p>
+            <a:pPr indent="0" marL="0">
+              <a:buNone/>
+            </a:pPr>
+            <a:r>
+              <a:rPr lang="en-US" sz="1500" b="1" dirty="0">
+                <a:solidFill>
+                  <a:srgbClr val="26312A"/>
+                </a:solidFill>
+                <a:latin typeface="Microsoft YaHei" pitchFamily="34" charset="0"/>
+                <a:ea typeface="Microsoft YaHei" pitchFamily="34" charset="-122"/>
+                <a:cs typeface="Microsoft YaHei" pitchFamily="34" charset="-120"/>
+              </a:rPr>
+              <a:t>财务</a:t>
+            </a:r>
+            <a:endParaRPr lang="en-US" sz="1500" dirty="0"/>
+          </a:p>
+        </p:txBody>
+      </p:sp>
+      <p:sp>
+        <p:nvSpPr>
+          <p:cNvPr id="21" name="Text 15"/>
+          <p:cNvSpPr/>
+          <p:nvPr/>
+        </p:nvSpPr>
+        <p:spPr>
+          <a:xfrm>
+            <a:off x="2880360" y="3328416"/>
+            <a:ext cx="5760720" cy="603504"/>
+          </a:xfrm>
+          <a:prstGeom prst="rect">
+            <a:avLst/>
+          </a:prstGeom>
+          <a:noFill/>
+          <a:ln/>
+        </p:spPr>
+        <p:txBody>
+          <a:bodyPr wrap="square" lIns="0" tIns="0" rIns="0" bIns="0" rtlCol="0" anchor="ctr"/>
+          <a:lstStyle/>
+          <a:p>
+            <a:pPr indent="0" marL="0">
+              <a:buNone/>
+            </a:pPr>
+            <a:r>
+              <a:rPr lang="en-US" sz="1250" dirty="0">
+                <a:solidFill>
+                  <a:srgbClr val="4A554C"/>
+                </a:solidFill>
+                <a:latin typeface="Microsoft YaHei" pitchFamily="34" charset="0"/>
+                <a:ea typeface="Microsoft YaHei" pitchFamily="34" charset="-122"/>
+                <a:cs typeface="Microsoft YaHei" pitchFamily="34" charset="-120"/>
+              </a:rPr>
+              <a:t>守住每月 RM 220,000 费用红线，三个数字每月向全员公开</a:t>
+            </a:r>
+            <a:endParaRPr lang="en-US" sz="1250" dirty="0"/>
+          </a:p>
+        </p:txBody>
+      </p:sp>
+      <p:sp>
+        <p:nvSpPr>
+          <p:cNvPr id="22" name="Shape 16"/>
+          <p:cNvSpPr/>
+          <p:nvPr/>
+        </p:nvSpPr>
+        <p:spPr>
+          <a:xfrm>
+            <a:off x="1234440" y="4005072"/>
+            <a:ext cx="7406640" cy="0"/>
+          </a:xfrm>
+          <a:prstGeom prst="line">
+            <a:avLst/>
+          </a:prstGeom>
+          <a:noFill/>
+          <a:ln w="9525">
+            <a:solidFill>
+              <a:srgbClr val="E4EAE2"/>
+            </a:solidFill>
+            <a:prstDash val="solid"/>
+          </a:ln>
+        </p:spPr>
+      </p:sp>
+      <p:sp>
+        <p:nvSpPr>
+          <p:cNvPr id="23" name="Shape 17"/>
+          <p:cNvSpPr/>
+          <p:nvPr/>
+        </p:nvSpPr>
+        <p:spPr>
+          <a:xfrm>
+            <a:off x="548640" y="4142232"/>
+            <a:ext cx="475488" cy="475488"/>
+          </a:xfrm>
+          <a:prstGeom prst="ellipse">
+            <a:avLst/>
+          </a:prstGeom>
+          <a:solidFill>
+            <a:srgbClr val="F1F7EC"/>
+          </a:solidFill>
+          <a:ln/>
+        </p:spPr>
+      </p:sp>
+      <p:pic>
+        <p:nvPicPr>
+          <p:cNvPr id="24" name="Image 4" descr="preencoded.png">    </p:cNvPr>
+          <p:cNvPicPr>
+            <a:picLocks noChangeAspect="1"/>
+          </p:cNvPicPr>
+          <p:nvPr/>
+        </p:nvPicPr>
+        <p:blipFill>
+          <a:blip r:embed="rId5"/>
+          <a:stretch>
+            <a:fillRect/>
+          </a:stretch>
+        </p:blipFill>
+        <p:spPr>
+          <a:xfrm>
+            <a:off x="667512" y="4261104"/>
+            <a:ext cx="237744" cy="237744"/>
+          </a:xfrm>
+          <a:prstGeom prst="rect">
+            <a:avLst/>
+          </a:prstGeom>
+        </p:spPr>
+      </p:pic>
+      <p:sp>
+        <p:nvSpPr>
+          <p:cNvPr id="25" name="Text 18"/>
+          <p:cNvSpPr/>
+          <p:nvPr/>
+        </p:nvSpPr>
+        <p:spPr>
+          <a:xfrm>
+            <a:off x="1234440" y="4078224"/>
+            <a:ext cx="1600200" cy="603504"/>
+          </a:xfrm>
+          <a:prstGeom prst="rect">
+            <a:avLst/>
+          </a:prstGeom>
+          <a:noFill/>
+          <a:ln/>
+        </p:spPr>
+        <p:txBody>
+          <a:bodyPr wrap="square" lIns="0" tIns="0" rIns="0" bIns="0" rtlCol="0" anchor="ctr"/>
+          <a:lstStyle/>
+          <a:p>
+            <a:pPr indent="0" marL="0">
+              <a:buNone/>
+            </a:pPr>
+            <a:r>
+              <a:rPr lang="en-US" sz="1500" b="1" dirty="0">
+                <a:solidFill>
+                  <a:srgbClr val="26312A"/>
+                </a:solidFill>
+                <a:latin typeface="Microsoft YaHei" pitchFamily="34" charset="0"/>
+                <a:ea typeface="Microsoft YaHei" pitchFamily="34" charset="-122"/>
+                <a:cs typeface="Microsoft YaHei" pitchFamily="34" charset="-120"/>
+              </a:rPr>
+              <a:t>每一个人</a:t>
+            </a:r>
+            <a:endParaRPr lang="en-US" sz="1500" dirty="0"/>
+          </a:p>
+        </p:txBody>
+      </p:sp>
+      <p:sp>
+        <p:nvSpPr>
+          <p:cNvPr id="26" name="Text 19"/>
+          <p:cNvSpPr/>
+          <p:nvPr/>
+        </p:nvSpPr>
+        <p:spPr>
+          <a:xfrm>
+            <a:off x="2880360" y="4078224"/>
+            <a:ext cx="5760720" cy="603504"/>
+          </a:xfrm>
+          <a:prstGeom prst="rect">
+            <a:avLst/>
+          </a:prstGeom>
+          <a:noFill/>
+          <a:ln/>
+        </p:spPr>
+        <p:txBody>
+          <a:bodyPr wrap="square" lIns="0" tIns="0" rIns="0" bIns="0" rtlCol="0" anchor="ctr"/>
+          <a:lstStyle/>
+          <a:p>
+            <a:pPr indent="0" marL="0">
+              <a:buNone/>
+            </a:pPr>
+            <a:r>
+              <a:rPr lang="en-US" sz="1250" dirty="0">
+                <a:solidFill>
+                  <a:srgbClr val="4A554C"/>
+                </a:solidFill>
+                <a:latin typeface="Microsoft YaHei" pitchFamily="34" charset="0"/>
+                <a:ea typeface="Microsoft YaHei" pitchFamily="34" charset="-122"/>
+                <a:cs typeface="Microsoft YaHei" pitchFamily="34" charset="-120"/>
+              </a:rPr>
+              <a:t>花每一块钱之前先问：这能帮我们多卖多少？</a:t>
+            </a:r>
+            <a:endParaRPr lang="en-US" sz="1250" dirty="0"/>
+          </a:p>
+        </p:txBody>
+      </p:sp>
+    </p:spTree>
+  </p:cSld>
+  <p:clrMapOvr>
+    <a:masterClrMapping/>
+  </p:clrMapOvr>
+</p:sld>
+</file>
+
+<file path=ppt/slides/slide13.xml><?xml version="1.0" encoding="utf-8"?>
+<p:sld xmlns:a="http://schemas.openxmlformats.org/drawingml/2006/main" xmlns:r="http://schemas.openxmlformats.org/officeDocument/2006/relationships" xmlns:p="http://schemas.openxmlformats.org/presentationml/2006/main">
+  <p:cSld name="Slide 13">
     <p:bg>
       <p:bgPr>
         <a:solidFill>
